--- a/docs/presentation/final_presentation.pptx
+++ b/docs/presentation/final_presentation.pptx
@@ -2,31 +2,31 @@
 <file path=ppt/presentation.xml><?xml version="1.0" encoding="utf-8"?>
 <p:presentation xmlns:p="http://schemas.openxmlformats.org/presentationml/2006/main">
   <p:sldMasterIdLst>
-    <p:sldMasterId xmlns:r="http://schemas.openxmlformats.org/officeDocument/2006/relationships" id="2147483648" r:id="R49837a947b52478e"/>
+    <p:sldMasterId xmlns:r="http://schemas.openxmlformats.org/officeDocument/2006/relationships" id="2147483648" r:id="R2974e333520f4511"/>
   </p:sldMasterIdLst>
   <p:notesMasterIdLst>
-    <p:notesMasterId xmlns:r="http://schemas.openxmlformats.org/officeDocument/2006/relationships" r:id="R06a38519547b4bdb"/>
+    <p:notesMasterId xmlns:r="http://schemas.openxmlformats.org/officeDocument/2006/relationships" r:id="R71134c7f6bef4d37"/>
   </p:notesMasterIdLst>
   <p:sldIdLst>
-    <p:sldId xmlns:r="http://schemas.openxmlformats.org/officeDocument/2006/relationships" id="256" r:id="R2409f659d07a463d"/>
-    <p:sldId xmlns:r="http://schemas.openxmlformats.org/officeDocument/2006/relationships" id="257" r:id="Rb27d7660367e4cf5"/>
-    <p:sldId xmlns:r="http://schemas.openxmlformats.org/officeDocument/2006/relationships" id="258" r:id="Rd3b470b016954446"/>
-    <p:sldId xmlns:r="http://schemas.openxmlformats.org/officeDocument/2006/relationships" id="259" r:id="Rb4de07405ca54c96"/>
-    <p:sldId xmlns:r="http://schemas.openxmlformats.org/officeDocument/2006/relationships" id="260" r:id="R439f7ebde7114355"/>
-    <p:sldId xmlns:r="http://schemas.openxmlformats.org/officeDocument/2006/relationships" id="261" r:id="R3d7a88689adf43b8"/>
-    <p:sldId xmlns:r="http://schemas.openxmlformats.org/officeDocument/2006/relationships" id="262" r:id="R259503c0bc694f90"/>
-    <p:sldId xmlns:r="http://schemas.openxmlformats.org/officeDocument/2006/relationships" id="263" r:id="R92e8d5ad0694419a"/>
-    <p:sldId xmlns:r="http://schemas.openxmlformats.org/officeDocument/2006/relationships" id="264" r:id="Rb8eb64adaf9748b3"/>
-    <p:sldId xmlns:r="http://schemas.openxmlformats.org/officeDocument/2006/relationships" id="265" r:id="R2ae52070500c4e67"/>
-    <p:sldId xmlns:r="http://schemas.openxmlformats.org/officeDocument/2006/relationships" id="266" r:id="R6debc899ce9c492d"/>
-    <p:sldId xmlns:r="http://schemas.openxmlformats.org/officeDocument/2006/relationships" id="267" r:id="R874c0d753113461b"/>
-    <p:sldId xmlns:r="http://schemas.openxmlformats.org/officeDocument/2006/relationships" id="268" r:id="R142306c2b45e4882"/>
-    <p:sldId xmlns:r="http://schemas.openxmlformats.org/officeDocument/2006/relationships" id="269" r:id="Ra5a06028ef83452a"/>
-    <p:sldId xmlns:r="http://schemas.openxmlformats.org/officeDocument/2006/relationships" id="270" r:id="R170405ad3db7462c"/>
-    <p:sldId xmlns:r="http://schemas.openxmlformats.org/officeDocument/2006/relationships" id="271" r:id="R941380ef0db24054"/>
-    <p:sldId xmlns:r="http://schemas.openxmlformats.org/officeDocument/2006/relationships" id="272" r:id="R0dc0151826954368"/>
-    <p:sldId xmlns:r="http://schemas.openxmlformats.org/officeDocument/2006/relationships" id="273" r:id="Rfd6092a0873a42cc"/>
-    <p:sldId xmlns:r="http://schemas.openxmlformats.org/officeDocument/2006/relationships" id="274" r:id="Rc86b96871d494d1f"/>
+    <p:sldId xmlns:r="http://schemas.openxmlformats.org/officeDocument/2006/relationships" id="256" r:id="Rb655ef46d6374c93"/>
+    <p:sldId xmlns:r="http://schemas.openxmlformats.org/officeDocument/2006/relationships" id="257" r:id="R1eae1c5388284ae8"/>
+    <p:sldId xmlns:r="http://schemas.openxmlformats.org/officeDocument/2006/relationships" id="258" r:id="Re9a849a3b25643e0"/>
+    <p:sldId xmlns:r="http://schemas.openxmlformats.org/officeDocument/2006/relationships" id="259" r:id="R6717e361f5584471"/>
+    <p:sldId xmlns:r="http://schemas.openxmlformats.org/officeDocument/2006/relationships" id="260" r:id="R9e7278bc0aa743d3"/>
+    <p:sldId xmlns:r="http://schemas.openxmlformats.org/officeDocument/2006/relationships" id="261" r:id="R1d45cb1cdc4c4615"/>
+    <p:sldId xmlns:r="http://schemas.openxmlformats.org/officeDocument/2006/relationships" id="262" r:id="R3f7d129b79a44c80"/>
+    <p:sldId xmlns:r="http://schemas.openxmlformats.org/officeDocument/2006/relationships" id="263" r:id="R9113fce1720e4755"/>
+    <p:sldId xmlns:r="http://schemas.openxmlformats.org/officeDocument/2006/relationships" id="264" r:id="R58cb66edb27e4052"/>
+    <p:sldId xmlns:r="http://schemas.openxmlformats.org/officeDocument/2006/relationships" id="265" r:id="Rc5f73be73a8149cd"/>
+    <p:sldId xmlns:r="http://schemas.openxmlformats.org/officeDocument/2006/relationships" id="266" r:id="Rbc75243ee00d4d15"/>
+    <p:sldId xmlns:r="http://schemas.openxmlformats.org/officeDocument/2006/relationships" id="267" r:id="R1c8d2143d5394a35"/>
+    <p:sldId xmlns:r="http://schemas.openxmlformats.org/officeDocument/2006/relationships" id="268" r:id="R9809f7f7e52e4ea4"/>
+    <p:sldId xmlns:r="http://schemas.openxmlformats.org/officeDocument/2006/relationships" id="269" r:id="R3c64b177cbe34692"/>
+    <p:sldId xmlns:r="http://schemas.openxmlformats.org/officeDocument/2006/relationships" id="270" r:id="Re1960094abb74478"/>
+    <p:sldId xmlns:r="http://schemas.openxmlformats.org/officeDocument/2006/relationships" id="271" r:id="R6a2cd57d03044443"/>
+    <p:sldId xmlns:r="http://schemas.openxmlformats.org/officeDocument/2006/relationships" id="272" r:id="R5373315ebc99462d"/>
+    <p:sldId xmlns:r="http://schemas.openxmlformats.org/officeDocument/2006/relationships" id="273" r:id="Rb28426591b26409f"/>
+    <p:sldId xmlns:r="http://schemas.openxmlformats.org/officeDocument/2006/relationships" id="274" r:id="Recf5bfa0e60142f9"/>
   </p:sldIdLst>
   <p:sldSz cx="12192000" cy="6858000"/>
   <p:notesSz cx="6858000" cy="9144000"/>
@@ -695,7 +695,7 @@
           <a:lstStyle xmlns:a="http://schemas.openxmlformats.org/drawingml/2006/main"/>
           <a:p xmlns:a="http://schemas.openxmlformats.org/drawingml/2006/main">
             <a:r>
-              <a:t>30초 버전: 뉴스 수집, 임베딩 저장, Hybrid 검색, reranker, evidence/risk 생성 순서만 말한다.</a:t>
+              <a:t>30초 버전: 뉴스 수집, 임베딩 저장, Hybrid 검색, reranker, evidence/risk 생성 순서만 말한다. 영상에서 뉴스 fallback이 보이면 기능 실패가 아니라 DB 헬스체크 또는 임베딩 검색 연결 실패를 보수적으로 노출한 것이며, DATABASE_URL과 rag_chunks 임베딩 적재 상태를 확인해야 한다고 답변한다.</a:t>
             </a:r>
           </a:p>
         </p:txBody>
@@ -1883,7 +1883,7 @@
   </p:cSld>
   <p:clrMap bg1="lt1" tx1="dk1" bg2="lt2" tx2="dk2" accent1="accent1" accent2="accent2" accent3="accent3" accent4="accent4" accent5="accent5" accent6="accent6" hlink="hlink" folHlink="folHlink"/>
   <p:sldLayoutIdLst>
-    <p:sldLayoutId xmlns:r="http://schemas.openxmlformats.org/officeDocument/2006/relationships" id="2147483649" r:id="Ra4a583b141f14452"/>
+    <p:sldLayoutId xmlns:r="http://schemas.openxmlformats.org/officeDocument/2006/relationships" id="2147483649" r:id="Rfc0029e6f95d4ffd"/>
   </p:sldLayoutIdLst>
   <p:txStyles>
     <p:titleStyle>
@@ -2434,7 +2434,7 @@
           <p:cNvPr id="1" name="left-band">
             <a:extLst xmlns:a="http://schemas.openxmlformats.org/drawingml/2006/main">
               <a:ext uri="{FF2B5EF4-FFF2-40B4-BE49-F238E27FC236}">
-                <a16:creationId xmlns:a16="http://schemas.microsoft.com/office/drawing/2014/main" id="{7E088484-0940-4047-8846-4EBDF514F3AB}"/>
+                <a16:creationId xmlns:a16="http://schemas.microsoft.com/office/drawing/2014/main" id="{30834984-58CD-47C6-8C63-72B847208A41}"/>
               </a:ext>
             </a:extLst>
           </p:cNvPr>
@@ -2469,7 +2469,7 @@
           <p:cNvPr id="2" name="surface">
             <a:extLst xmlns:a="http://schemas.openxmlformats.org/drawingml/2006/main">
               <a:ext uri="{FF2B5EF4-FFF2-40B4-BE49-F238E27FC236}">
-                <a16:creationId xmlns:a16="http://schemas.microsoft.com/office/drawing/2014/main" id="{8FAB8194-CB39-430C-813C-216D4F4F9B6E}"/>
+                <a16:creationId xmlns:a16="http://schemas.microsoft.com/office/drawing/2014/main" id="{BD10D107-65FB-4F46-B546-6E80F8EB63BE}"/>
               </a:ext>
             </a:extLst>
           </p:cNvPr>
@@ -2531,7 +2531,7 @@
           <p:cNvPr id="3" name="text">
             <a:extLst xmlns:a="http://schemas.openxmlformats.org/drawingml/2006/main">
               <a:ext uri="{FF2B5EF4-FFF2-40B4-BE49-F238E27FC236}">
-                <a16:creationId xmlns:a16="http://schemas.microsoft.com/office/drawing/2014/main" id="{F45F8929-ACB0-4834-90DF-FD26C5DD95AB}"/>
+                <a16:creationId xmlns:a16="http://schemas.microsoft.com/office/drawing/2014/main" id="{E4988C5E-6793-4612-A812-8AB418F619D5}"/>
               </a:ext>
             </a:extLst>
           </p:cNvPr>
@@ -2599,7 +2599,7 @@
           <p:cNvPr id="4" name="text">
             <a:extLst xmlns:a="http://schemas.openxmlformats.org/drawingml/2006/main">
               <a:ext uri="{FF2B5EF4-FFF2-40B4-BE49-F238E27FC236}">
-                <a16:creationId xmlns:a16="http://schemas.microsoft.com/office/drawing/2014/main" id="{9BA47EAE-387F-491F-B7B8-56B86849B2EB}"/>
+                <a16:creationId xmlns:a16="http://schemas.microsoft.com/office/drawing/2014/main" id="{C8EC0809-2A72-4983-A0FC-9404DF756B2E}"/>
               </a:ext>
             </a:extLst>
           </p:cNvPr>
@@ -2667,7 +2667,7 @@
           <p:cNvPr id="5" name="surface">
             <a:extLst xmlns:a="http://schemas.openxmlformats.org/drawingml/2006/main">
               <a:ext uri="{FF2B5EF4-FFF2-40B4-BE49-F238E27FC236}">
-                <a16:creationId xmlns:a16="http://schemas.microsoft.com/office/drawing/2014/main" id="{58DA8EC4-C7A6-45F6-BF85-8113BDB628F0}"/>
+                <a16:creationId xmlns:a16="http://schemas.microsoft.com/office/drawing/2014/main" id="{B4880D4D-3D28-4683-81F5-5817FD29B76C}"/>
               </a:ext>
             </a:extLst>
           </p:cNvPr>
@@ -2704,7 +2704,7 @@
           <p:cNvPr id="6" name="text">
             <a:extLst xmlns:a="http://schemas.openxmlformats.org/drawingml/2006/main">
               <a:ext uri="{FF2B5EF4-FFF2-40B4-BE49-F238E27FC236}">
-                <a16:creationId xmlns:a16="http://schemas.microsoft.com/office/drawing/2014/main" id="{1132DD6C-1F29-4805-8F45-293B7B73228F}"/>
+                <a16:creationId xmlns:a16="http://schemas.microsoft.com/office/drawing/2014/main" id="{1E98F045-20DC-4970-86B7-33FA68574CDF}"/>
               </a:ext>
             </a:extLst>
           </p:cNvPr>
@@ -2772,7 +2772,7 @@
           <p:cNvPr id="7" name="surface">
             <a:extLst xmlns:a="http://schemas.openxmlformats.org/drawingml/2006/main">
               <a:ext uri="{FF2B5EF4-FFF2-40B4-BE49-F238E27FC236}">
-                <a16:creationId xmlns:a16="http://schemas.microsoft.com/office/drawing/2014/main" id="{1EC5A2E7-987C-4F13-B812-40CF4174E1D1}"/>
+                <a16:creationId xmlns:a16="http://schemas.microsoft.com/office/drawing/2014/main" id="{F7A6FA18-6CA2-40FC-B7E8-15D79938A33D}"/>
               </a:ext>
             </a:extLst>
           </p:cNvPr>
@@ -2809,7 +2809,7 @@
           <p:cNvPr id="8" name="text">
             <a:extLst xmlns:a="http://schemas.openxmlformats.org/drawingml/2006/main">
               <a:ext uri="{FF2B5EF4-FFF2-40B4-BE49-F238E27FC236}">
-                <a16:creationId xmlns:a16="http://schemas.microsoft.com/office/drawing/2014/main" id="{3D568109-AF52-4C9D-9E0D-8EB978A915D6}"/>
+                <a16:creationId xmlns:a16="http://schemas.microsoft.com/office/drawing/2014/main" id="{357B66A6-F584-4D66-8F7A-22868B7FBE5F}"/>
               </a:ext>
             </a:extLst>
           </p:cNvPr>
@@ -2877,7 +2877,7 @@
           <p:cNvPr id="9" name="surface">
             <a:extLst xmlns:a="http://schemas.openxmlformats.org/drawingml/2006/main">
               <a:ext uri="{FF2B5EF4-FFF2-40B4-BE49-F238E27FC236}">
-                <a16:creationId xmlns:a16="http://schemas.microsoft.com/office/drawing/2014/main" id="{2783CB0F-6B31-488C-8D23-385FE496B22F}"/>
+                <a16:creationId xmlns:a16="http://schemas.microsoft.com/office/drawing/2014/main" id="{A70F03A0-7BFC-4901-8FE7-44437D92DC20}"/>
               </a:ext>
             </a:extLst>
           </p:cNvPr>
@@ -2914,7 +2914,7 @@
           <p:cNvPr id="10" name="text">
             <a:extLst xmlns:a="http://schemas.openxmlformats.org/drawingml/2006/main">
               <a:ext uri="{FF2B5EF4-FFF2-40B4-BE49-F238E27FC236}">
-                <a16:creationId xmlns:a16="http://schemas.microsoft.com/office/drawing/2014/main" id="{81CDE0B3-2AB3-435F-B325-AB760628CD87}"/>
+                <a16:creationId xmlns:a16="http://schemas.microsoft.com/office/drawing/2014/main" id="{10E1EA92-3A5C-4127-AED1-401C60933459}"/>
               </a:ext>
             </a:extLst>
           </p:cNvPr>
@@ -2982,7 +2982,7 @@
           <p:cNvPr id="11" name="text">
             <a:extLst xmlns:a="http://schemas.openxmlformats.org/drawingml/2006/main">
               <a:ext uri="{FF2B5EF4-FFF2-40B4-BE49-F238E27FC236}">
-                <a16:creationId xmlns:a16="http://schemas.microsoft.com/office/drawing/2014/main" id="{F80FA0BB-7496-4BCD-8969-AC012EC39136}"/>
+                <a16:creationId xmlns:a16="http://schemas.microsoft.com/office/drawing/2014/main" id="{EF69A680-294A-4A0E-A7FF-2684B3FE08B0}"/>
               </a:ext>
             </a:extLst>
           </p:cNvPr>
@@ -3054,7 +3054,7 @@
           <p:nvPr/>
         </p:nvPicPr>
         <p:blipFill>
-          <a:blip xmlns:r="http://schemas.openxmlformats.org/officeDocument/2006/relationships" xmlns:a="http://schemas.openxmlformats.org/drawingml/2006/main" r:embed="R074d89156ade4f7f"/>
+          <a:blip xmlns:r="http://schemas.openxmlformats.org/officeDocument/2006/relationships" xmlns:a="http://schemas.openxmlformats.org/drawingml/2006/main" r:embed="R4234cb0ee853408b"/>
           <a:srcRect xmlns:a="http://schemas.openxmlformats.org/drawingml/2006/main" l="24803" t="0" r="24803" b="0"/>
           <a:stretch xmlns:a="http://schemas.openxmlformats.org/drawingml/2006/main">
             <a:fillRect l="0" t="0" r="0" b="0"/>
@@ -3075,7 +3075,7 @@
     </p:spTree>
     <p:extLst>
       <p:ext uri="{BB962C8B-B14F-4D97-AF65-F5344CB8AC3E}">
-        <p14:creationId xmlns:p14="http://schemas.microsoft.com/office/powerpoint/2010/main" val="152167791"/>
+        <p14:creationId xmlns:p14="http://schemas.microsoft.com/office/powerpoint/2010/main" val="1602475641"/>
       </p:ext>
     </p:extLst>
   </p:cSld>
@@ -3106,7 +3106,7 @@
           <p:cNvPr id="1" name="top-accent">
             <a:extLst xmlns:a="http://schemas.openxmlformats.org/drawingml/2006/main">
               <a:ext uri="{FF2B5EF4-FFF2-40B4-BE49-F238E27FC236}">
-                <a16:creationId xmlns:a16="http://schemas.microsoft.com/office/drawing/2014/main" id="{F2D00608-8CFE-496E-9C71-1A1639147BCD}"/>
+                <a16:creationId xmlns:a16="http://schemas.microsoft.com/office/drawing/2014/main" id="{F03EB25A-3ACD-4ABA-9006-5300CB92A4E1}"/>
               </a:ext>
             </a:extLst>
           </p:cNvPr>
@@ -3141,7 +3141,7 @@
           <p:cNvPr id="2" name="bottom-line">
             <a:extLst xmlns:a="http://schemas.openxmlformats.org/drawingml/2006/main">
               <a:ext uri="{FF2B5EF4-FFF2-40B4-BE49-F238E27FC236}">
-                <a16:creationId xmlns:a16="http://schemas.microsoft.com/office/drawing/2014/main" id="{9DFBEE16-40FB-4C36-9FC1-00F38477E06A}"/>
+                <a16:creationId xmlns:a16="http://schemas.microsoft.com/office/drawing/2014/main" id="{6F1C9D57-6C83-4E4E-AB5A-8182C63BD858}"/>
               </a:ext>
             </a:extLst>
           </p:cNvPr>
@@ -3176,7 +3176,7 @@
           <p:cNvPr id="3" name="surface">
             <a:extLst xmlns:a="http://schemas.openxmlformats.org/drawingml/2006/main">
               <a:ext uri="{FF2B5EF4-FFF2-40B4-BE49-F238E27FC236}">
-                <a16:creationId xmlns:a16="http://schemas.microsoft.com/office/drawing/2014/main" id="{93506103-1CC8-4228-9BB1-27D6428AC090}"/>
+                <a16:creationId xmlns:a16="http://schemas.microsoft.com/office/drawing/2014/main" id="{2EEA406B-0D4E-4F21-99B4-CCB55FE45215}"/>
               </a:ext>
             </a:extLst>
           </p:cNvPr>
@@ -3238,7 +3238,7 @@
           <p:cNvPr id="4" name="text">
             <a:extLst xmlns:a="http://schemas.openxmlformats.org/drawingml/2006/main">
               <a:ext uri="{FF2B5EF4-FFF2-40B4-BE49-F238E27FC236}">
-                <a16:creationId xmlns:a16="http://schemas.microsoft.com/office/drawing/2014/main" id="{5EC7FA36-2E0D-440E-9BDC-BC977AD7E1A1}"/>
+                <a16:creationId xmlns:a16="http://schemas.microsoft.com/office/drawing/2014/main" id="{62EC951C-5FE5-47F9-A324-EE9BEE103135}"/>
               </a:ext>
             </a:extLst>
           </p:cNvPr>
@@ -3306,7 +3306,7 @@
           <p:cNvPr id="5" name="text">
             <a:extLst xmlns:a="http://schemas.openxmlformats.org/drawingml/2006/main">
               <a:ext uri="{FF2B5EF4-FFF2-40B4-BE49-F238E27FC236}">
-                <a16:creationId xmlns:a16="http://schemas.microsoft.com/office/drawing/2014/main" id="{48765110-4F29-4FD2-A7E3-74610CFEF1BB}"/>
+                <a16:creationId xmlns:a16="http://schemas.microsoft.com/office/drawing/2014/main" id="{5BA4139C-0197-41BD-B4DB-264565E8AED7}"/>
               </a:ext>
             </a:extLst>
           </p:cNvPr>
@@ -3374,7 +3374,7 @@
           <p:cNvPr id="6" name="text">
             <a:extLst xmlns:a="http://schemas.openxmlformats.org/drawingml/2006/main">
               <a:ext uri="{FF2B5EF4-FFF2-40B4-BE49-F238E27FC236}">
-                <a16:creationId xmlns:a16="http://schemas.microsoft.com/office/drawing/2014/main" id="{D61722EB-F13B-45B1-B2DB-5D06BCBD7762}"/>
+                <a16:creationId xmlns:a16="http://schemas.microsoft.com/office/drawing/2014/main" id="{155C9EDB-E353-4DDD-8517-ABCB43D6A3A5}"/>
               </a:ext>
             </a:extLst>
           </p:cNvPr>
@@ -3442,7 +3442,7 @@
           <p:cNvPr id="7" name="surface">
             <a:extLst xmlns:a="http://schemas.openxmlformats.org/drawingml/2006/main">
               <a:ext uri="{FF2B5EF4-FFF2-40B4-BE49-F238E27FC236}">
-                <a16:creationId xmlns:a16="http://schemas.microsoft.com/office/drawing/2014/main" id="{1998708C-FAD1-48EC-A793-F1FE3638FC52}"/>
+                <a16:creationId xmlns:a16="http://schemas.microsoft.com/office/drawing/2014/main" id="{F9F0F874-A7B0-4EB6-9642-6722CABB4823}"/>
               </a:ext>
             </a:extLst>
           </p:cNvPr>
@@ -3477,7 +3477,7 @@
           <p:cNvPr id="8" name="surface">
             <a:extLst xmlns:a="http://schemas.openxmlformats.org/drawingml/2006/main">
               <a:ext uri="{FF2B5EF4-FFF2-40B4-BE49-F238E27FC236}">
-                <a16:creationId xmlns:a16="http://schemas.microsoft.com/office/drawing/2014/main" id="{8655D13F-3792-4109-B27E-41A6D32A7156}"/>
+                <a16:creationId xmlns:a16="http://schemas.microsoft.com/office/drawing/2014/main" id="{69B5113C-404B-481B-BBBA-9CF08E317835}"/>
               </a:ext>
             </a:extLst>
           </p:cNvPr>
@@ -3514,7 +3514,7 @@
           <p:cNvPr id="9" name="text">
             <a:extLst xmlns:a="http://schemas.openxmlformats.org/drawingml/2006/main">
               <a:ext uri="{FF2B5EF4-FFF2-40B4-BE49-F238E27FC236}">
-                <a16:creationId xmlns:a16="http://schemas.microsoft.com/office/drawing/2014/main" id="{98EBC49E-7B0C-4130-83B2-8BF251B3D953}"/>
+                <a16:creationId xmlns:a16="http://schemas.microsoft.com/office/drawing/2014/main" id="{FDCCC4AC-E807-401B-828A-C36B9A619398}"/>
               </a:ext>
             </a:extLst>
           </p:cNvPr>
@@ -3582,7 +3582,7 @@
           <p:cNvPr id="10" name="text">
             <a:extLst xmlns:a="http://schemas.openxmlformats.org/drawingml/2006/main">
               <a:ext uri="{FF2B5EF4-FFF2-40B4-BE49-F238E27FC236}">
-                <a16:creationId xmlns:a16="http://schemas.microsoft.com/office/drawing/2014/main" id="{6C744FD0-5928-43FE-8E7D-471118E3B98C}"/>
+                <a16:creationId xmlns:a16="http://schemas.microsoft.com/office/drawing/2014/main" id="{F7D13BDF-9A64-4555-83CD-1AA879386458}"/>
               </a:ext>
             </a:extLst>
           </p:cNvPr>
@@ -3650,7 +3650,7 @@
           <p:cNvPr id="11" name="surface">
             <a:extLst xmlns:a="http://schemas.openxmlformats.org/drawingml/2006/main">
               <a:ext uri="{FF2B5EF4-FFF2-40B4-BE49-F238E27FC236}">
-                <a16:creationId xmlns:a16="http://schemas.microsoft.com/office/drawing/2014/main" id="{817EE3A7-2AAB-471F-8AF0-3F70194B2799}"/>
+                <a16:creationId xmlns:a16="http://schemas.microsoft.com/office/drawing/2014/main" id="{7F516380-6CAA-4BFB-82DC-3FB627B7744B}"/>
               </a:ext>
             </a:extLst>
           </p:cNvPr>
@@ -3685,7 +3685,7 @@
           <p:cNvPr id="12" name="surface">
             <a:extLst xmlns:a="http://schemas.openxmlformats.org/drawingml/2006/main">
               <a:ext uri="{FF2B5EF4-FFF2-40B4-BE49-F238E27FC236}">
-                <a16:creationId xmlns:a16="http://schemas.microsoft.com/office/drawing/2014/main" id="{82B16F0A-852A-492D-B2F0-106CB4EA92D3}"/>
+                <a16:creationId xmlns:a16="http://schemas.microsoft.com/office/drawing/2014/main" id="{D7D3E857-FAB9-4524-A9F2-F33F14D709AC}"/>
               </a:ext>
             </a:extLst>
           </p:cNvPr>
@@ -3722,7 +3722,7 @@
           <p:cNvPr id="13" name="text">
             <a:extLst xmlns:a="http://schemas.openxmlformats.org/drawingml/2006/main">
               <a:ext uri="{FF2B5EF4-FFF2-40B4-BE49-F238E27FC236}">
-                <a16:creationId xmlns:a16="http://schemas.microsoft.com/office/drawing/2014/main" id="{61E5B94A-E661-4B42-9180-1BCD90D6BF89}"/>
+                <a16:creationId xmlns:a16="http://schemas.microsoft.com/office/drawing/2014/main" id="{01B370A6-DF49-4FC0-8095-04C99BC11B1F}"/>
               </a:ext>
             </a:extLst>
           </p:cNvPr>
@@ -3790,7 +3790,7 @@
           <p:cNvPr id="14" name="text">
             <a:extLst xmlns:a="http://schemas.openxmlformats.org/drawingml/2006/main">
               <a:ext uri="{FF2B5EF4-FFF2-40B4-BE49-F238E27FC236}">
-                <a16:creationId xmlns:a16="http://schemas.microsoft.com/office/drawing/2014/main" id="{5BA2F824-6631-4A4E-950D-BFCCAD7A65E6}"/>
+                <a16:creationId xmlns:a16="http://schemas.microsoft.com/office/drawing/2014/main" id="{9A3C0598-4D54-4331-9E41-1B3B0E05E622}"/>
               </a:ext>
             </a:extLst>
           </p:cNvPr>
@@ -3858,7 +3858,7 @@
           <p:cNvPr id="15" name="surface">
             <a:extLst xmlns:a="http://schemas.openxmlformats.org/drawingml/2006/main">
               <a:ext uri="{FF2B5EF4-FFF2-40B4-BE49-F238E27FC236}">
-                <a16:creationId xmlns:a16="http://schemas.microsoft.com/office/drawing/2014/main" id="{AE48868C-6069-413F-B637-2AA792DAF347}"/>
+                <a16:creationId xmlns:a16="http://schemas.microsoft.com/office/drawing/2014/main" id="{9EFFB1A5-6BF9-45A4-B767-C63CC3CE24AA}"/>
               </a:ext>
             </a:extLst>
           </p:cNvPr>
@@ -3893,7 +3893,7 @@
           <p:cNvPr id="16" name="surface">
             <a:extLst xmlns:a="http://schemas.openxmlformats.org/drawingml/2006/main">
               <a:ext uri="{FF2B5EF4-FFF2-40B4-BE49-F238E27FC236}">
-                <a16:creationId xmlns:a16="http://schemas.microsoft.com/office/drawing/2014/main" id="{6F59DEC4-2A92-49B6-9688-72F974E666D4}"/>
+                <a16:creationId xmlns:a16="http://schemas.microsoft.com/office/drawing/2014/main" id="{6E788EB8-4994-42FC-B882-41E83EF2F94C}"/>
               </a:ext>
             </a:extLst>
           </p:cNvPr>
@@ -3930,7 +3930,7 @@
           <p:cNvPr id="17" name="text">
             <a:extLst xmlns:a="http://schemas.openxmlformats.org/drawingml/2006/main">
               <a:ext uri="{FF2B5EF4-FFF2-40B4-BE49-F238E27FC236}">
-                <a16:creationId xmlns:a16="http://schemas.microsoft.com/office/drawing/2014/main" id="{9E80E8F7-397C-4EC4-AFFA-5A644964FEDC}"/>
+                <a16:creationId xmlns:a16="http://schemas.microsoft.com/office/drawing/2014/main" id="{44914D70-4440-43E8-9A6F-CD73E5924FEA}"/>
               </a:ext>
             </a:extLst>
           </p:cNvPr>
@@ -3998,7 +3998,7 @@
           <p:cNvPr id="18" name="text">
             <a:extLst xmlns:a="http://schemas.openxmlformats.org/drawingml/2006/main">
               <a:ext uri="{FF2B5EF4-FFF2-40B4-BE49-F238E27FC236}">
-                <a16:creationId xmlns:a16="http://schemas.microsoft.com/office/drawing/2014/main" id="{9C4B0AA4-737D-40E3-B916-BB211F0C065D}"/>
+                <a16:creationId xmlns:a16="http://schemas.microsoft.com/office/drawing/2014/main" id="{D72875F9-FD7A-4829-BA42-5F967249AADF}"/>
               </a:ext>
             </a:extLst>
           </p:cNvPr>
@@ -4066,7 +4066,7 @@
           <p:cNvPr id="19" name="surface">
             <a:extLst xmlns:a="http://schemas.openxmlformats.org/drawingml/2006/main">
               <a:ext uri="{FF2B5EF4-FFF2-40B4-BE49-F238E27FC236}">
-                <a16:creationId xmlns:a16="http://schemas.microsoft.com/office/drawing/2014/main" id="{70EED7AE-D444-46DF-8A7E-DDAF39D6BC3E}"/>
+                <a16:creationId xmlns:a16="http://schemas.microsoft.com/office/drawing/2014/main" id="{FCE4CE8C-5313-42A5-832D-DBC6C96B0BEC}"/>
               </a:ext>
             </a:extLst>
           </p:cNvPr>
@@ -4101,7 +4101,7 @@
           <p:cNvPr id="20" name="surface">
             <a:extLst xmlns:a="http://schemas.openxmlformats.org/drawingml/2006/main">
               <a:ext uri="{FF2B5EF4-FFF2-40B4-BE49-F238E27FC236}">
-                <a16:creationId xmlns:a16="http://schemas.microsoft.com/office/drawing/2014/main" id="{4C394196-C62E-4FD4-AE58-D5DA089B0DEC}"/>
+                <a16:creationId xmlns:a16="http://schemas.microsoft.com/office/drawing/2014/main" id="{09721BDD-E056-4F0A-9866-716F5DFB49C6}"/>
               </a:ext>
             </a:extLst>
           </p:cNvPr>
@@ -4138,7 +4138,7 @@
           <p:cNvPr id="21" name="text">
             <a:extLst xmlns:a="http://schemas.openxmlformats.org/drawingml/2006/main">
               <a:ext uri="{FF2B5EF4-FFF2-40B4-BE49-F238E27FC236}">
-                <a16:creationId xmlns:a16="http://schemas.microsoft.com/office/drawing/2014/main" id="{D6DBCDB1-E038-4B8F-B833-914C36E09AE5}"/>
+                <a16:creationId xmlns:a16="http://schemas.microsoft.com/office/drawing/2014/main" id="{8F5E03D6-5306-4F1D-82EF-AB42E92864D4}"/>
               </a:ext>
             </a:extLst>
           </p:cNvPr>
@@ -4206,7 +4206,7 @@
           <p:cNvPr id="22" name="text">
             <a:extLst xmlns:a="http://schemas.openxmlformats.org/drawingml/2006/main">
               <a:ext uri="{FF2B5EF4-FFF2-40B4-BE49-F238E27FC236}">
-                <a16:creationId xmlns:a16="http://schemas.microsoft.com/office/drawing/2014/main" id="{E9CDA246-6F5C-49D2-9136-4DBC712BA26F}"/>
+                <a16:creationId xmlns:a16="http://schemas.microsoft.com/office/drawing/2014/main" id="{99E53725-96CC-4A53-A81E-F3D5E54F88EF}"/>
               </a:ext>
             </a:extLst>
           </p:cNvPr>
@@ -4274,7 +4274,7 @@
           <p:cNvPr id="23" name="surface">
             <a:extLst xmlns:a="http://schemas.openxmlformats.org/drawingml/2006/main">
               <a:ext uri="{FF2B5EF4-FFF2-40B4-BE49-F238E27FC236}">
-                <a16:creationId xmlns:a16="http://schemas.microsoft.com/office/drawing/2014/main" id="{55B1ED9E-EE7D-4F7A-B0A1-790A1E3487DF}"/>
+                <a16:creationId xmlns:a16="http://schemas.microsoft.com/office/drawing/2014/main" id="{0390AA6C-BCCF-4E89-8A39-254C3D5B2F4F}"/>
               </a:ext>
             </a:extLst>
           </p:cNvPr>
@@ -4309,7 +4309,7 @@
           <p:cNvPr id="24" name="text">
             <a:extLst xmlns:a="http://schemas.openxmlformats.org/drawingml/2006/main">
               <a:ext uri="{FF2B5EF4-FFF2-40B4-BE49-F238E27FC236}">
-                <a16:creationId xmlns:a16="http://schemas.microsoft.com/office/drawing/2014/main" id="{8D69C569-E26F-4813-BE53-A9BF08C94B79}"/>
+                <a16:creationId xmlns:a16="http://schemas.microsoft.com/office/drawing/2014/main" id="{8A2178F1-EE39-4695-9882-D66810DE2BA2}"/>
               </a:ext>
             </a:extLst>
           </p:cNvPr>
@@ -4377,7 +4377,7 @@
           <p:cNvPr id="25" name="text">
             <a:extLst xmlns:a="http://schemas.openxmlformats.org/drawingml/2006/main">
               <a:ext uri="{FF2B5EF4-FFF2-40B4-BE49-F238E27FC236}">
-                <a16:creationId xmlns:a16="http://schemas.microsoft.com/office/drawing/2014/main" id="{75A0062B-D2EC-475A-8E4D-87BEE0E5FA16}"/>
+                <a16:creationId xmlns:a16="http://schemas.microsoft.com/office/drawing/2014/main" id="{CD77D2C8-E24F-464B-AD0A-AE7BFD118D14}"/>
               </a:ext>
             </a:extLst>
           </p:cNvPr>
@@ -4445,7 +4445,7 @@
           <p:cNvPr id="26" name="surface">
             <a:extLst xmlns:a="http://schemas.openxmlformats.org/drawingml/2006/main">
               <a:ext uri="{FF2B5EF4-FFF2-40B4-BE49-F238E27FC236}">
-                <a16:creationId xmlns:a16="http://schemas.microsoft.com/office/drawing/2014/main" id="{C58F3645-3B29-4533-BBD9-F879B45B5225}"/>
+                <a16:creationId xmlns:a16="http://schemas.microsoft.com/office/drawing/2014/main" id="{8CDACD63-3CA9-42BA-BB45-8B35814C8EB7}"/>
               </a:ext>
             </a:extLst>
           </p:cNvPr>
@@ -4480,7 +4480,7 @@
           <p:cNvPr id="27" name="text">
             <a:extLst xmlns:a="http://schemas.openxmlformats.org/drawingml/2006/main">
               <a:ext uri="{FF2B5EF4-FFF2-40B4-BE49-F238E27FC236}">
-                <a16:creationId xmlns:a16="http://schemas.microsoft.com/office/drawing/2014/main" id="{EC39AF5B-DA03-4490-BCEE-807D30DFA4D9}"/>
+                <a16:creationId xmlns:a16="http://schemas.microsoft.com/office/drawing/2014/main" id="{D902ACBC-A771-4E9A-B47F-4A87EDB6B786}"/>
               </a:ext>
             </a:extLst>
           </p:cNvPr>
@@ -4548,7 +4548,7 @@
           <p:cNvPr id="28" name="text">
             <a:extLst xmlns:a="http://schemas.openxmlformats.org/drawingml/2006/main">
               <a:ext uri="{FF2B5EF4-FFF2-40B4-BE49-F238E27FC236}">
-                <a16:creationId xmlns:a16="http://schemas.microsoft.com/office/drawing/2014/main" id="{E16D1D50-5C5B-478B-904A-5C4C472D1F65}"/>
+                <a16:creationId xmlns:a16="http://schemas.microsoft.com/office/drawing/2014/main" id="{071DF95C-8FFD-4F40-A69C-24A9FEC478A9}"/>
               </a:ext>
             </a:extLst>
           </p:cNvPr>
@@ -4616,7 +4616,7 @@
           <p:cNvPr id="29" name="surface">
             <a:extLst xmlns:a="http://schemas.openxmlformats.org/drawingml/2006/main">
               <a:ext uri="{FF2B5EF4-FFF2-40B4-BE49-F238E27FC236}">
-                <a16:creationId xmlns:a16="http://schemas.microsoft.com/office/drawing/2014/main" id="{B8655970-946D-4764-BC6B-EFF624F1227A}"/>
+                <a16:creationId xmlns:a16="http://schemas.microsoft.com/office/drawing/2014/main" id="{A7D72CD7-C18E-4D39-B5BE-F6D9DF59B4AF}"/>
               </a:ext>
             </a:extLst>
           </p:cNvPr>
@@ -4651,7 +4651,7 @@
           <p:cNvPr id="30" name="text">
             <a:extLst xmlns:a="http://schemas.openxmlformats.org/drawingml/2006/main">
               <a:ext uri="{FF2B5EF4-FFF2-40B4-BE49-F238E27FC236}">
-                <a16:creationId xmlns:a16="http://schemas.microsoft.com/office/drawing/2014/main" id="{78B79C63-FEE3-4860-AEC4-E823E6183B78}"/>
+                <a16:creationId xmlns:a16="http://schemas.microsoft.com/office/drawing/2014/main" id="{0F9A6C68-8810-4FF8-933E-208BD22DE172}"/>
               </a:ext>
             </a:extLst>
           </p:cNvPr>
@@ -4719,7 +4719,7 @@
           <p:cNvPr id="31" name="text">
             <a:extLst xmlns:a="http://schemas.openxmlformats.org/drawingml/2006/main">
               <a:ext uri="{FF2B5EF4-FFF2-40B4-BE49-F238E27FC236}">
-                <a16:creationId xmlns:a16="http://schemas.microsoft.com/office/drawing/2014/main" id="{DED759A9-F29F-4468-B160-C59316FBAF60}"/>
+                <a16:creationId xmlns:a16="http://schemas.microsoft.com/office/drawing/2014/main" id="{27930876-A8B2-4069-ADE0-FFDC07466AB6}"/>
               </a:ext>
             </a:extLst>
           </p:cNvPr>
@@ -4787,7 +4787,7 @@
           <p:cNvPr id="32" name="surface">
             <a:extLst xmlns:a="http://schemas.openxmlformats.org/drawingml/2006/main">
               <a:ext uri="{FF2B5EF4-FFF2-40B4-BE49-F238E27FC236}">
-                <a16:creationId xmlns:a16="http://schemas.microsoft.com/office/drawing/2014/main" id="{1C85D547-F305-4D06-9887-9188E72EAAC0}"/>
+                <a16:creationId xmlns:a16="http://schemas.microsoft.com/office/drawing/2014/main" id="{B27562D3-3C6B-4483-9C42-40A8E6FE92DB}"/>
               </a:ext>
             </a:extLst>
           </p:cNvPr>
@@ -4822,7 +4822,7 @@
           <p:cNvPr id="33" name="text">
             <a:extLst xmlns:a="http://schemas.openxmlformats.org/drawingml/2006/main">
               <a:ext uri="{FF2B5EF4-FFF2-40B4-BE49-F238E27FC236}">
-                <a16:creationId xmlns:a16="http://schemas.microsoft.com/office/drawing/2014/main" id="{329518DB-6934-4204-BB13-F4077AE73D2C}"/>
+                <a16:creationId xmlns:a16="http://schemas.microsoft.com/office/drawing/2014/main" id="{297CBF55-FADF-4B55-B60B-71D0CC5A00FA}"/>
               </a:ext>
             </a:extLst>
           </p:cNvPr>
@@ -4890,7 +4890,7 @@
           <p:cNvPr id="34" name="text">
             <a:extLst xmlns:a="http://schemas.openxmlformats.org/drawingml/2006/main">
               <a:ext uri="{FF2B5EF4-FFF2-40B4-BE49-F238E27FC236}">
-                <a16:creationId xmlns:a16="http://schemas.microsoft.com/office/drawing/2014/main" id="{F7CCDDB8-C307-4681-B68D-10F73047701C}"/>
+                <a16:creationId xmlns:a16="http://schemas.microsoft.com/office/drawing/2014/main" id="{368D1A53-EF4E-4F08-A45E-27FE26B5FD3E}"/>
               </a:ext>
             </a:extLst>
           </p:cNvPr>
@@ -4956,7 +4956,7 @@
     </p:spTree>
     <p:extLst>
       <p:ext uri="{BB962C8B-B14F-4D97-AF65-F5344CB8AC3E}">
-        <p14:creationId xmlns:p14="http://schemas.microsoft.com/office/powerpoint/2010/main" val="1663683141"/>
+        <p14:creationId xmlns:p14="http://schemas.microsoft.com/office/powerpoint/2010/main" val="1412099076"/>
       </p:ext>
     </p:extLst>
   </p:cSld>
@@ -4987,7 +4987,7 @@
           <p:cNvPr id="1" name="top-accent">
             <a:extLst xmlns:a="http://schemas.openxmlformats.org/drawingml/2006/main">
               <a:ext uri="{FF2B5EF4-FFF2-40B4-BE49-F238E27FC236}">
-                <a16:creationId xmlns:a16="http://schemas.microsoft.com/office/drawing/2014/main" id="{32B8D3A0-C8D6-4121-B6A7-A7B8A57E2CD4}"/>
+                <a16:creationId xmlns:a16="http://schemas.microsoft.com/office/drawing/2014/main" id="{3C0946BF-BB29-44CA-9AB9-E3882978AE4B}"/>
               </a:ext>
             </a:extLst>
           </p:cNvPr>
@@ -5022,7 +5022,7 @@
           <p:cNvPr id="2" name="bottom-line">
             <a:extLst xmlns:a="http://schemas.openxmlformats.org/drawingml/2006/main">
               <a:ext uri="{FF2B5EF4-FFF2-40B4-BE49-F238E27FC236}">
-                <a16:creationId xmlns:a16="http://schemas.microsoft.com/office/drawing/2014/main" id="{DD4F83B9-2E02-42CF-95C7-70F6F577A746}"/>
+                <a16:creationId xmlns:a16="http://schemas.microsoft.com/office/drawing/2014/main" id="{66B78E29-F0E4-49E1-8689-1CBCE8CD9382}"/>
               </a:ext>
             </a:extLst>
           </p:cNvPr>
@@ -5057,7 +5057,7 @@
           <p:cNvPr id="3" name="surface">
             <a:extLst xmlns:a="http://schemas.openxmlformats.org/drawingml/2006/main">
               <a:ext uri="{FF2B5EF4-FFF2-40B4-BE49-F238E27FC236}">
-                <a16:creationId xmlns:a16="http://schemas.microsoft.com/office/drawing/2014/main" id="{D13E3CCA-2B1F-4C7D-B92C-32081CDD92D6}"/>
+                <a16:creationId xmlns:a16="http://schemas.microsoft.com/office/drawing/2014/main" id="{BB4E7FA0-B9E0-41CB-BCBB-148C08B2883A}"/>
               </a:ext>
             </a:extLst>
           </p:cNvPr>
@@ -5119,7 +5119,7 @@
           <p:cNvPr id="4" name="text">
             <a:extLst xmlns:a="http://schemas.openxmlformats.org/drawingml/2006/main">
               <a:ext uri="{FF2B5EF4-FFF2-40B4-BE49-F238E27FC236}">
-                <a16:creationId xmlns:a16="http://schemas.microsoft.com/office/drawing/2014/main" id="{331C40A1-21E1-4F47-963C-F66E307D50F5}"/>
+                <a16:creationId xmlns:a16="http://schemas.microsoft.com/office/drawing/2014/main" id="{1226519E-9542-43CC-8D59-87BFE7C0CEAC}"/>
               </a:ext>
             </a:extLst>
           </p:cNvPr>
@@ -5187,7 +5187,7 @@
           <p:cNvPr id="5" name="text">
             <a:extLst xmlns:a="http://schemas.openxmlformats.org/drawingml/2006/main">
               <a:ext uri="{FF2B5EF4-FFF2-40B4-BE49-F238E27FC236}">
-                <a16:creationId xmlns:a16="http://schemas.microsoft.com/office/drawing/2014/main" id="{9115DE3E-3C1C-433E-99A0-B986BD7B6765}"/>
+                <a16:creationId xmlns:a16="http://schemas.microsoft.com/office/drawing/2014/main" id="{6BA19861-CDA8-4401-8AFF-043B00F84246}"/>
               </a:ext>
             </a:extLst>
           </p:cNvPr>
@@ -5255,7 +5255,7 @@
           <p:cNvPr id="6" name="text">
             <a:extLst xmlns:a="http://schemas.openxmlformats.org/drawingml/2006/main">
               <a:ext uri="{FF2B5EF4-FFF2-40B4-BE49-F238E27FC236}">
-                <a16:creationId xmlns:a16="http://schemas.microsoft.com/office/drawing/2014/main" id="{2EDE99C5-A6AF-4F2D-95A1-725ABDEBC343}"/>
+                <a16:creationId xmlns:a16="http://schemas.microsoft.com/office/drawing/2014/main" id="{BA21B58C-123D-4E2E-8376-EC74BC23E374}"/>
               </a:ext>
             </a:extLst>
           </p:cNvPr>
@@ -5323,7 +5323,7 @@
           <p:cNvPr id="7" name="surface">
             <a:extLst xmlns:a="http://schemas.openxmlformats.org/drawingml/2006/main">
               <a:ext uri="{FF2B5EF4-FFF2-40B4-BE49-F238E27FC236}">
-                <a16:creationId xmlns:a16="http://schemas.microsoft.com/office/drawing/2014/main" id="{954CA5E6-16FB-41B1-966B-FF3B6FE47325}"/>
+                <a16:creationId xmlns:a16="http://schemas.microsoft.com/office/drawing/2014/main" id="{D28749EA-0C54-4609-AE25-A45E289F726C}"/>
               </a:ext>
             </a:extLst>
           </p:cNvPr>
@@ -5358,7 +5358,7 @@
           <p:cNvPr id="8" name="surface">
             <a:extLst xmlns:a="http://schemas.openxmlformats.org/drawingml/2006/main">
               <a:ext uri="{FF2B5EF4-FFF2-40B4-BE49-F238E27FC236}">
-                <a16:creationId xmlns:a16="http://schemas.microsoft.com/office/drawing/2014/main" id="{7CEDB90C-35D2-410B-B958-6573906A5A7D}"/>
+                <a16:creationId xmlns:a16="http://schemas.microsoft.com/office/drawing/2014/main" id="{76670742-ADE3-487A-B9CF-AACACD3CBF42}"/>
               </a:ext>
             </a:extLst>
           </p:cNvPr>
@@ -5420,7 +5420,7 @@
           <p:cNvPr id="9" name="text">
             <a:extLst xmlns:a="http://schemas.openxmlformats.org/drawingml/2006/main">
               <a:ext uri="{FF2B5EF4-FFF2-40B4-BE49-F238E27FC236}">
-                <a16:creationId xmlns:a16="http://schemas.microsoft.com/office/drawing/2014/main" id="{BBFD8F78-AB76-419B-A592-F61C18CC5027}"/>
+                <a16:creationId xmlns:a16="http://schemas.microsoft.com/office/drawing/2014/main" id="{3F3CA345-6E57-4E68-8682-DDF102FEA953}"/>
               </a:ext>
             </a:extLst>
           </p:cNvPr>
@@ -5488,7 +5488,7 @@
           <p:cNvPr id="10" name="text">
             <a:extLst xmlns:a="http://schemas.openxmlformats.org/drawingml/2006/main">
               <a:ext uri="{FF2B5EF4-FFF2-40B4-BE49-F238E27FC236}">
-                <a16:creationId xmlns:a16="http://schemas.microsoft.com/office/drawing/2014/main" id="{20C18607-4674-41F8-8224-4D8789387632}"/>
+                <a16:creationId xmlns:a16="http://schemas.microsoft.com/office/drawing/2014/main" id="{1FB53CEF-1731-4133-AAC0-4F241D3E3F54}"/>
               </a:ext>
             </a:extLst>
           </p:cNvPr>
@@ -5556,7 +5556,7 @@
           <p:cNvPr id="11" name="surface">
             <a:extLst xmlns:a="http://schemas.openxmlformats.org/drawingml/2006/main">
               <a:ext uri="{FF2B5EF4-FFF2-40B4-BE49-F238E27FC236}">
-                <a16:creationId xmlns:a16="http://schemas.microsoft.com/office/drawing/2014/main" id="{A3559CD3-1CDE-4C74-8808-B476D6537B73}"/>
+                <a16:creationId xmlns:a16="http://schemas.microsoft.com/office/drawing/2014/main" id="{FC3E1868-B619-4818-A915-C5223D9CC44B}"/>
               </a:ext>
             </a:extLst>
           </p:cNvPr>
@@ -5591,7 +5591,7 @@
           <p:cNvPr id="12" name="surface">
             <a:extLst xmlns:a="http://schemas.openxmlformats.org/drawingml/2006/main">
               <a:ext uri="{FF2B5EF4-FFF2-40B4-BE49-F238E27FC236}">
-                <a16:creationId xmlns:a16="http://schemas.microsoft.com/office/drawing/2014/main" id="{9170E3F5-4EE8-4F4A-B1EE-6A08699BBDBE}"/>
+                <a16:creationId xmlns:a16="http://schemas.microsoft.com/office/drawing/2014/main" id="{B11DFEC4-747E-4706-A64C-DD413201DFEC}"/>
               </a:ext>
             </a:extLst>
           </p:cNvPr>
@@ -5653,7 +5653,7 @@
           <p:cNvPr id="13" name="text">
             <a:extLst xmlns:a="http://schemas.openxmlformats.org/drawingml/2006/main">
               <a:ext uri="{FF2B5EF4-FFF2-40B4-BE49-F238E27FC236}">
-                <a16:creationId xmlns:a16="http://schemas.microsoft.com/office/drawing/2014/main" id="{9C5295F1-6153-4B9B-A8A7-5EBEC004A7A2}"/>
+                <a16:creationId xmlns:a16="http://schemas.microsoft.com/office/drawing/2014/main" id="{1DC7A43D-9E3E-4566-826D-3B94473F5ACB}"/>
               </a:ext>
             </a:extLst>
           </p:cNvPr>
@@ -5721,7 +5721,7 @@
           <p:cNvPr id="14" name="text">
             <a:extLst xmlns:a="http://schemas.openxmlformats.org/drawingml/2006/main">
               <a:ext uri="{FF2B5EF4-FFF2-40B4-BE49-F238E27FC236}">
-                <a16:creationId xmlns:a16="http://schemas.microsoft.com/office/drawing/2014/main" id="{AF5F58A5-5BA3-411A-89CC-8239C7B8B338}"/>
+                <a16:creationId xmlns:a16="http://schemas.microsoft.com/office/drawing/2014/main" id="{403FB2BE-DFEF-4FF6-BF77-92C967ED7AE4}"/>
               </a:ext>
             </a:extLst>
           </p:cNvPr>
@@ -5789,7 +5789,7 @@
           <p:cNvPr id="15" name="surface">
             <a:extLst xmlns:a="http://schemas.openxmlformats.org/drawingml/2006/main">
               <a:ext uri="{FF2B5EF4-FFF2-40B4-BE49-F238E27FC236}">
-                <a16:creationId xmlns:a16="http://schemas.microsoft.com/office/drawing/2014/main" id="{756E3D76-A31E-45D6-8F9D-016619806EF6}"/>
+                <a16:creationId xmlns:a16="http://schemas.microsoft.com/office/drawing/2014/main" id="{71DC3251-43A4-41EE-9FC8-66D7332A6DD3}"/>
               </a:ext>
             </a:extLst>
           </p:cNvPr>
@@ -5824,7 +5824,7 @@
           <p:cNvPr id="16" name="surface">
             <a:extLst xmlns:a="http://schemas.openxmlformats.org/drawingml/2006/main">
               <a:ext uri="{FF2B5EF4-FFF2-40B4-BE49-F238E27FC236}">
-                <a16:creationId xmlns:a16="http://schemas.microsoft.com/office/drawing/2014/main" id="{45DBA62A-6AAD-437F-A60A-634FBD1D6BD1}"/>
+                <a16:creationId xmlns:a16="http://schemas.microsoft.com/office/drawing/2014/main" id="{C4A0EEBE-4A6E-44CE-A2C9-91849F12267E}"/>
               </a:ext>
             </a:extLst>
           </p:cNvPr>
@@ -5886,7 +5886,7 @@
           <p:cNvPr id="17" name="text">
             <a:extLst xmlns:a="http://schemas.openxmlformats.org/drawingml/2006/main">
               <a:ext uri="{FF2B5EF4-FFF2-40B4-BE49-F238E27FC236}">
-                <a16:creationId xmlns:a16="http://schemas.microsoft.com/office/drawing/2014/main" id="{7097B788-1358-434A-9F0B-21D72E8E0E7F}"/>
+                <a16:creationId xmlns:a16="http://schemas.microsoft.com/office/drawing/2014/main" id="{D8CD37E3-B40F-43E4-B516-8017AF59F8B7}"/>
               </a:ext>
             </a:extLst>
           </p:cNvPr>
@@ -5954,7 +5954,7 @@
           <p:cNvPr id="18" name="text">
             <a:extLst xmlns:a="http://schemas.openxmlformats.org/drawingml/2006/main">
               <a:ext uri="{FF2B5EF4-FFF2-40B4-BE49-F238E27FC236}">
-                <a16:creationId xmlns:a16="http://schemas.microsoft.com/office/drawing/2014/main" id="{FDB2AE66-79D5-4D05-A924-FD7C4358D6F2}"/>
+                <a16:creationId xmlns:a16="http://schemas.microsoft.com/office/drawing/2014/main" id="{1B6584F7-5661-45EB-8993-416228B41BE1}"/>
               </a:ext>
             </a:extLst>
           </p:cNvPr>
@@ -6022,7 +6022,7 @@
           <p:cNvPr id="19" name="surface">
             <a:extLst xmlns:a="http://schemas.openxmlformats.org/drawingml/2006/main">
               <a:ext uri="{FF2B5EF4-FFF2-40B4-BE49-F238E27FC236}">
-                <a16:creationId xmlns:a16="http://schemas.microsoft.com/office/drawing/2014/main" id="{BBEE3782-516F-4C34-B8A8-E887718356E1}"/>
+                <a16:creationId xmlns:a16="http://schemas.microsoft.com/office/drawing/2014/main" id="{5B52DE1F-ADFA-4742-9699-EB63A5C5C71A}"/>
               </a:ext>
             </a:extLst>
           </p:cNvPr>
@@ -6057,7 +6057,7 @@
           <p:cNvPr id="20" name="surface">
             <a:extLst xmlns:a="http://schemas.openxmlformats.org/drawingml/2006/main">
               <a:ext uri="{FF2B5EF4-FFF2-40B4-BE49-F238E27FC236}">
-                <a16:creationId xmlns:a16="http://schemas.microsoft.com/office/drawing/2014/main" id="{58B125E6-320E-4174-8191-4CE6EF7A0784}"/>
+                <a16:creationId xmlns:a16="http://schemas.microsoft.com/office/drawing/2014/main" id="{798B1D57-47DD-4282-88B8-C7E15173FE7C}"/>
               </a:ext>
             </a:extLst>
           </p:cNvPr>
@@ -6119,7 +6119,7 @@
           <p:cNvPr id="21" name="text">
             <a:extLst xmlns:a="http://schemas.openxmlformats.org/drawingml/2006/main">
               <a:ext uri="{FF2B5EF4-FFF2-40B4-BE49-F238E27FC236}">
-                <a16:creationId xmlns:a16="http://schemas.microsoft.com/office/drawing/2014/main" id="{27561742-C215-4689-9B5D-A0150728050C}"/>
+                <a16:creationId xmlns:a16="http://schemas.microsoft.com/office/drawing/2014/main" id="{BCC94475-71AE-4FC2-B0F5-4EFC1E73E2EB}"/>
               </a:ext>
             </a:extLst>
           </p:cNvPr>
@@ -6187,7 +6187,7 @@
           <p:cNvPr id="22" name="text">
             <a:extLst xmlns:a="http://schemas.openxmlformats.org/drawingml/2006/main">
               <a:ext uri="{FF2B5EF4-FFF2-40B4-BE49-F238E27FC236}">
-                <a16:creationId xmlns:a16="http://schemas.microsoft.com/office/drawing/2014/main" id="{1F46F0DE-A1E7-4F71-AB6F-18090B9475A0}"/>
+                <a16:creationId xmlns:a16="http://schemas.microsoft.com/office/drawing/2014/main" id="{34657B67-7314-4FAB-86FD-B3CB9C70DA34}"/>
               </a:ext>
             </a:extLst>
           </p:cNvPr>
@@ -6255,7 +6255,7 @@
           <p:cNvPr id="23" name="surface">
             <a:extLst xmlns:a="http://schemas.openxmlformats.org/drawingml/2006/main">
               <a:ext uri="{FF2B5EF4-FFF2-40B4-BE49-F238E27FC236}">
-                <a16:creationId xmlns:a16="http://schemas.microsoft.com/office/drawing/2014/main" id="{5BC13CDF-C0AE-455F-8638-6D9ABD7E963C}"/>
+                <a16:creationId xmlns:a16="http://schemas.microsoft.com/office/drawing/2014/main" id="{9BBB26F0-D1FD-4F28-BF9C-54F8C7601A1C}"/>
               </a:ext>
             </a:extLst>
           </p:cNvPr>
@@ -6290,7 +6290,7 @@
           <p:cNvPr id="24" name="surface">
             <a:extLst xmlns:a="http://schemas.openxmlformats.org/drawingml/2006/main">
               <a:ext uri="{FF2B5EF4-FFF2-40B4-BE49-F238E27FC236}">
-                <a16:creationId xmlns:a16="http://schemas.microsoft.com/office/drawing/2014/main" id="{49BADE69-42B1-412B-AF5E-099CAE315F62}"/>
+                <a16:creationId xmlns:a16="http://schemas.microsoft.com/office/drawing/2014/main" id="{829D210D-312C-4583-8B2D-4340062AE00A}"/>
               </a:ext>
             </a:extLst>
           </p:cNvPr>
@@ -6352,7 +6352,7 @@
           <p:cNvPr id="25" name="text">
             <a:extLst xmlns:a="http://schemas.openxmlformats.org/drawingml/2006/main">
               <a:ext uri="{FF2B5EF4-FFF2-40B4-BE49-F238E27FC236}">
-                <a16:creationId xmlns:a16="http://schemas.microsoft.com/office/drawing/2014/main" id="{0801DAC1-28C9-4845-9E59-7AEBB06353E6}"/>
+                <a16:creationId xmlns:a16="http://schemas.microsoft.com/office/drawing/2014/main" id="{D8BD1132-349B-40C6-B842-03F401098350}"/>
               </a:ext>
             </a:extLst>
           </p:cNvPr>
@@ -6420,7 +6420,7 @@
           <p:cNvPr id="26" name="text">
             <a:extLst xmlns:a="http://schemas.openxmlformats.org/drawingml/2006/main">
               <a:ext uri="{FF2B5EF4-FFF2-40B4-BE49-F238E27FC236}">
-                <a16:creationId xmlns:a16="http://schemas.microsoft.com/office/drawing/2014/main" id="{3A0D4F7E-6BC3-4233-91F8-C6FB88D8FFF1}"/>
+                <a16:creationId xmlns:a16="http://schemas.microsoft.com/office/drawing/2014/main" id="{0E580AE9-38A6-4165-A7C0-B9D19CD854AB}"/>
               </a:ext>
             </a:extLst>
           </p:cNvPr>
@@ -6488,7 +6488,7 @@
           <p:cNvPr id="27" name="surface">
             <a:extLst xmlns:a="http://schemas.openxmlformats.org/drawingml/2006/main">
               <a:ext uri="{FF2B5EF4-FFF2-40B4-BE49-F238E27FC236}">
-                <a16:creationId xmlns:a16="http://schemas.microsoft.com/office/drawing/2014/main" id="{1EDEC6AE-B7D2-40F4-B435-F024DFD3D7BF}"/>
+                <a16:creationId xmlns:a16="http://schemas.microsoft.com/office/drawing/2014/main" id="{540F46E4-03BE-4865-934D-C458265ACF11}"/>
               </a:ext>
             </a:extLst>
           </p:cNvPr>
@@ -6523,7 +6523,7 @@
           <p:cNvPr id="28" name="text">
             <a:extLst xmlns:a="http://schemas.openxmlformats.org/drawingml/2006/main">
               <a:ext uri="{FF2B5EF4-FFF2-40B4-BE49-F238E27FC236}">
-                <a16:creationId xmlns:a16="http://schemas.microsoft.com/office/drawing/2014/main" id="{D1686DAB-B2F2-49E0-9A19-C43E03E7ECCA}"/>
+                <a16:creationId xmlns:a16="http://schemas.microsoft.com/office/drawing/2014/main" id="{F379D0D9-6580-49B4-8556-79C6159A5196}"/>
               </a:ext>
             </a:extLst>
           </p:cNvPr>
@@ -6591,7 +6591,7 @@
           <p:cNvPr id="29" name="text">
             <a:extLst xmlns:a="http://schemas.openxmlformats.org/drawingml/2006/main">
               <a:ext uri="{FF2B5EF4-FFF2-40B4-BE49-F238E27FC236}">
-                <a16:creationId xmlns:a16="http://schemas.microsoft.com/office/drawing/2014/main" id="{7A788BA8-6DFD-4C2C-8AD9-2587E4896C8C}"/>
+                <a16:creationId xmlns:a16="http://schemas.microsoft.com/office/drawing/2014/main" id="{479BBA96-AFDB-4C72-BC32-2DD0D0C7CDC8}"/>
               </a:ext>
             </a:extLst>
           </p:cNvPr>
@@ -6659,7 +6659,7 @@
           <p:cNvPr id="30" name="surface">
             <a:extLst xmlns:a="http://schemas.openxmlformats.org/drawingml/2006/main">
               <a:ext uri="{FF2B5EF4-FFF2-40B4-BE49-F238E27FC236}">
-                <a16:creationId xmlns:a16="http://schemas.microsoft.com/office/drawing/2014/main" id="{9EDB0D22-CC45-45E8-8C64-0515C39ED99D}"/>
+                <a16:creationId xmlns:a16="http://schemas.microsoft.com/office/drawing/2014/main" id="{677B9FFE-DC2B-44E2-9411-B9D3E21F8FCD}"/>
               </a:ext>
             </a:extLst>
           </p:cNvPr>
@@ -6694,7 +6694,7 @@
           <p:cNvPr id="31" name="text">
             <a:extLst xmlns:a="http://schemas.openxmlformats.org/drawingml/2006/main">
               <a:ext uri="{FF2B5EF4-FFF2-40B4-BE49-F238E27FC236}">
-                <a16:creationId xmlns:a16="http://schemas.microsoft.com/office/drawing/2014/main" id="{7B38F356-3E2E-4808-AE4A-87D7B10521F1}"/>
+                <a16:creationId xmlns:a16="http://schemas.microsoft.com/office/drawing/2014/main" id="{073B28A8-183B-4EF1-8D88-7E45CA5F6FBA}"/>
               </a:ext>
             </a:extLst>
           </p:cNvPr>
@@ -6762,7 +6762,7 @@
           <p:cNvPr id="32" name="text">
             <a:extLst xmlns:a="http://schemas.openxmlformats.org/drawingml/2006/main">
               <a:ext uri="{FF2B5EF4-FFF2-40B4-BE49-F238E27FC236}">
-                <a16:creationId xmlns:a16="http://schemas.microsoft.com/office/drawing/2014/main" id="{58D07B7F-AB1E-435E-9E62-6B7EA8D47308}"/>
+                <a16:creationId xmlns:a16="http://schemas.microsoft.com/office/drawing/2014/main" id="{1FD48A56-68B1-4B0E-8AC9-18F546B7A09C}"/>
               </a:ext>
             </a:extLst>
           </p:cNvPr>
@@ -6830,7 +6830,7 @@
           <p:cNvPr id="33" name="surface">
             <a:extLst xmlns:a="http://schemas.openxmlformats.org/drawingml/2006/main">
               <a:ext uri="{FF2B5EF4-FFF2-40B4-BE49-F238E27FC236}">
-                <a16:creationId xmlns:a16="http://schemas.microsoft.com/office/drawing/2014/main" id="{735939CA-FAD7-4E01-8402-88DB1F47320E}"/>
+                <a16:creationId xmlns:a16="http://schemas.microsoft.com/office/drawing/2014/main" id="{904294BF-0C62-4DBC-A186-D5ECAA66BE5B}"/>
               </a:ext>
             </a:extLst>
           </p:cNvPr>
@@ -6865,7 +6865,7 @@
           <p:cNvPr id="34" name="text">
             <a:extLst xmlns:a="http://schemas.openxmlformats.org/drawingml/2006/main">
               <a:ext uri="{FF2B5EF4-FFF2-40B4-BE49-F238E27FC236}">
-                <a16:creationId xmlns:a16="http://schemas.microsoft.com/office/drawing/2014/main" id="{7199D643-34A0-40E5-90F0-BFF36D935824}"/>
+                <a16:creationId xmlns:a16="http://schemas.microsoft.com/office/drawing/2014/main" id="{C477A978-93E8-4F60-93B8-4DA676DA4E48}"/>
               </a:ext>
             </a:extLst>
           </p:cNvPr>
@@ -6933,7 +6933,7 @@
           <p:cNvPr id="35" name="text">
             <a:extLst xmlns:a="http://schemas.openxmlformats.org/drawingml/2006/main">
               <a:ext uri="{FF2B5EF4-FFF2-40B4-BE49-F238E27FC236}">
-                <a16:creationId xmlns:a16="http://schemas.microsoft.com/office/drawing/2014/main" id="{1F516516-6522-4F4E-ACCF-ACECD59E2202}"/>
+                <a16:creationId xmlns:a16="http://schemas.microsoft.com/office/drawing/2014/main" id="{22692A57-E7C6-44F7-AFAC-4C24661C7908}"/>
               </a:ext>
             </a:extLst>
           </p:cNvPr>
@@ -6991,7 +6991,7 @@
                 <a:ea typeface="Malgun Gothic"/>
                 <a:cs typeface="Malgun Gothic"/>
               </a:rPr>
-              <a:t>DB/임베딩 실패 시 fallback evidence와 reason을 남겨 Guardrail까지 전달</a:t>
+              <a:t>데모에서 뉴스 fallback이 보이면 DB/임베딩 연결 실패 신호로 보고 연결 상태를 점검</a:t>
             </a:r>
           </a:p>
         </p:txBody>
@@ -7001,7 +7001,7 @@
           <p:cNvPr id="36" name="surface">
             <a:extLst xmlns:a="http://schemas.openxmlformats.org/drawingml/2006/main">
               <a:ext uri="{FF2B5EF4-FFF2-40B4-BE49-F238E27FC236}">
-                <a16:creationId xmlns:a16="http://schemas.microsoft.com/office/drawing/2014/main" id="{DF92EAE5-459B-413D-BA37-8CD79DA3BEBC}"/>
+                <a16:creationId xmlns:a16="http://schemas.microsoft.com/office/drawing/2014/main" id="{2DE4C6F1-D521-41F4-9A80-0F4B1D69A05B}"/>
               </a:ext>
             </a:extLst>
           </p:cNvPr>
@@ -7036,7 +7036,7 @@
           <p:cNvPr id="37" name="text">
             <a:extLst xmlns:a="http://schemas.openxmlformats.org/drawingml/2006/main">
               <a:ext uri="{FF2B5EF4-FFF2-40B4-BE49-F238E27FC236}">
-                <a16:creationId xmlns:a16="http://schemas.microsoft.com/office/drawing/2014/main" id="{48D0392F-D636-4A3D-A199-A9094051A6C3}"/>
+                <a16:creationId xmlns:a16="http://schemas.microsoft.com/office/drawing/2014/main" id="{0E6BF3B0-89FA-4840-9952-47B3EF77DBE7}"/>
               </a:ext>
             </a:extLst>
           </p:cNvPr>
@@ -7104,7 +7104,7 @@
           <p:cNvPr id="38" name="text">
             <a:extLst xmlns:a="http://schemas.openxmlformats.org/drawingml/2006/main">
               <a:ext uri="{FF2B5EF4-FFF2-40B4-BE49-F238E27FC236}">
-                <a16:creationId xmlns:a16="http://schemas.microsoft.com/office/drawing/2014/main" id="{0F1B7CE4-C692-4189-B228-05658E25CBB1}"/>
+                <a16:creationId xmlns:a16="http://schemas.microsoft.com/office/drawing/2014/main" id="{D6DAA999-7B0D-4DF1-B283-335306C11F52}"/>
               </a:ext>
             </a:extLst>
           </p:cNvPr>
@@ -7170,7 +7170,7 @@
     </p:spTree>
     <p:extLst>
       <p:ext uri="{BB962C8B-B14F-4D97-AF65-F5344CB8AC3E}">
-        <p14:creationId xmlns:p14="http://schemas.microsoft.com/office/powerpoint/2010/main" val="980401857"/>
+        <p14:creationId xmlns:p14="http://schemas.microsoft.com/office/powerpoint/2010/main" val="1722556156"/>
       </p:ext>
     </p:extLst>
   </p:cSld>
@@ -7201,7 +7201,7 @@
           <p:cNvPr id="1" name="top-accent">
             <a:extLst xmlns:a="http://schemas.openxmlformats.org/drawingml/2006/main">
               <a:ext uri="{FF2B5EF4-FFF2-40B4-BE49-F238E27FC236}">
-                <a16:creationId xmlns:a16="http://schemas.microsoft.com/office/drawing/2014/main" id="{7ECCFF70-B0ED-467F-BE0D-40CEE7027A23}"/>
+                <a16:creationId xmlns:a16="http://schemas.microsoft.com/office/drawing/2014/main" id="{373EA7D9-E918-4972-A44A-140F30D9373E}"/>
               </a:ext>
             </a:extLst>
           </p:cNvPr>
@@ -7236,7 +7236,7 @@
           <p:cNvPr id="2" name="bottom-line">
             <a:extLst xmlns:a="http://schemas.openxmlformats.org/drawingml/2006/main">
               <a:ext uri="{FF2B5EF4-FFF2-40B4-BE49-F238E27FC236}">
-                <a16:creationId xmlns:a16="http://schemas.microsoft.com/office/drawing/2014/main" id="{2F47D626-17E2-4277-896B-2EF10E8F03F6}"/>
+                <a16:creationId xmlns:a16="http://schemas.microsoft.com/office/drawing/2014/main" id="{00FD0E47-FD10-4151-8162-BF7A1FFD9583}"/>
               </a:ext>
             </a:extLst>
           </p:cNvPr>
@@ -7271,7 +7271,7 @@
           <p:cNvPr id="3" name="surface">
             <a:extLst xmlns:a="http://schemas.openxmlformats.org/drawingml/2006/main">
               <a:ext uri="{FF2B5EF4-FFF2-40B4-BE49-F238E27FC236}">
-                <a16:creationId xmlns:a16="http://schemas.microsoft.com/office/drawing/2014/main" id="{590092BF-6830-4243-834C-12831AC9D5CE}"/>
+                <a16:creationId xmlns:a16="http://schemas.microsoft.com/office/drawing/2014/main" id="{0C7EF5A6-9E05-4212-805E-7CE0A369AF53}"/>
               </a:ext>
             </a:extLst>
           </p:cNvPr>
@@ -7333,7 +7333,7 @@
           <p:cNvPr id="4" name="text">
             <a:extLst xmlns:a="http://schemas.openxmlformats.org/drawingml/2006/main">
               <a:ext uri="{FF2B5EF4-FFF2-40B4-BE49-F238E27FC236}">
-                <a16:creationId xmlns:a16="http://schemas.microsoft.com/office/drawing/2014/main" id="{8D5C530E-D7CE-448B-BFF7-1536E46F1104}"/>
+                <a16:creationId xmlns:a16="http://schemas.microsoft.com/office/drawing/2014/main" id="{FCB752BB-0428-488E-AA7A-FE7AAC180E03}"/>
               </a:ext>
             </a:extLst>
           </p:cNvPr>
@@ -7401,7 +7401,7 @@
           <p:cNvPr id="5" name="text">
             <a:extLst xmlns:a="http://schemas.openxmlformats.org/drawingml/2006/main">
               <a:ext uri="{FF2B5EF4-FFF2-40B4-BE49-F238E27FC236}">
-                <a16:creationId xmlns:a16="http://schemas.microsoft.com/office/drawing/2014/main" id="{A87ABC42-D151-442D-BCD1-BA158BE90F52}"/>
+                <a16:creationId xmlns:a16="http://schemas.microsoft.com/office/drawing/2014/main" id="{4573A8B1-382A-4F68-B238-F0966BE443D1}"/>
               </a:ext>
             </a:extLst>
           </p:cNvPr>
@@ -7469,7 +7469,7 @@
           <p:cNvPr id="6" name="text">
             <a:extLst xmlns:a="http://schemas.openxmlformats.org/drawingml/2006/main">
               <a:ext uri="{FF2B5EF4-FFF2-40B4-BE49-F238E27FC236}">
-                <a16:creationId xmlns:a16="http://schemas.microsoft.com/office/drawing/2014/main" id="{8B84BC0E-0E51-4F20-9E6B-61CCE698F8A9}"/>
+                <a16:creationId xmlns:a16="http://schemas.microsoft.com/office/drawing/2014/main" id="{225EFBC6-D27D-475A-8183-2A353F121FC0}"/>
               </a:ext>
             </a:extLst>
           </p:cNvPr>
@@ -7537,7 +7537,7 @@
           <p:cNvPr id="7" name="surface">
             <a:extLst xmlns:a="http://schemas.openxmlformats.org/drawingml/2006/main">
               <a:ext uri="{FF2B5EF4-FFF2-40B4-BE49-F238E27FC236}">
-                <a16:creationId xmlns:a16="http://schemas.microsoft.com/office/drawing/2014/main" id="{ADC86240-796F-4B7E-B56F-35AE73A5746F}"/>
+                <a16:creationId xmlns:a16="http://schemas.microsoft.com/office/drawing/2014/main" id="{E8055233-E798-4446-B9B5-379B1F4BD307}"/>
               </a:ext>
             </a:extLst>
           </p:cNvPr>
@@ -7572,7 +7572,7 @@
           <p:cNvPr id="8" name="surface">
             <a:extLst xmlns:a="http://schemas.openxmlformats.org/drawingml/2006/main">
               <a:ext uri="{FF2B5EF4-FFF2-40B4-BE49-F238E27FC236}">
-                <a16:creationId xmlns:a16="http://schemas.microsoft.com/office/drawing/2014/main" id="{6276FA91-4B93-4EAC-94A6-08A8327FA084}"/>
+                <a16:creationId xmlns:a16="http://schemas.microsoft.com/office/drawing/2014/main" id="{2165FE30-FF16-4529-BD3D-AF0440165927}"/>
               </a:ext>
             </a:extLst>
           </p:cNvPr>
@@ -7609,7 +7609,7 @@
           <p:cNvPr id="9" name="text">
             <a:extLst xmlns:a="http://schemas.openxmlformats.org/drawingml/2006/main">
               <a:ext uri="{FF2B5EF4-FFF2-40B4-BE49-F238E27FC236}">
-                <a16:creationId xmlns:a16="http://schemas.microsoft.com/office/drawing/2014/main" id="{42D9FDB8-780A-48CF-ADF8-3D5E303EB490}"/>
+                <a16:creationId xmlns:a16="http://schemas.microsoft.com/office/drawing/2014/main" id="{094365E7-8CF5-49BF-81D5-58C163BEB3E0}"/>
               </a:ext>
             </a:extLst>
           </p:cNvPr>
@@ -7677,7 +7677,7 @@
           <p:cNvPr id="10" name="text">
             <a:extLst xmlns:a="http://schemas.openxmlformats.org/drawingml/2006/main">
               <a:ext uri="{FF2B5EF4-FFF2-40B4-BE49-F238E27FC236}">
-                <a16:creationId xmlns:a16="http://schemas.microsoft.com/office/drawing/2014/main" id="{CE766D61-99E6-4E53-B070-3165D7EDFB12}"/>
+                <a16:creationId xmlns:a16="http://schemas.microsoft.com/office/drawing/2014/main" id="{AEE42DEC-1DC9-4FFA-8B00-F1030058D542}"/>
               </a:ext>
             </a:extLst>
           </p:cNvPr>
@@ -7745,7 +7745,7 @@
           <p:cNvPr id="11" name="surface">
             <a:extLst xmlns:a="http://schemas.openxmlformats.org/drawingml/2006/main">
               <a:ext uri="{FF2B5EF4-FFF2-40B4-BE49-F238E27FC236}">
-                <a16:creationId xmlns:a16="http://schemas.microsoft.com/office/drawing/2014/main" id="{355FEA9B-C8B1-45C8-BB86-28E0A0A19DF3}"/>
+                <a16:creationId xmlns:a16="http://schemas.microsoft.com/office/drawing/2014/main" id="{254F5682-8314-47DE-86AD-A9C18F473D29}"/>
               </a:ext>
             </a:extLst>
           </p:cNvPr>
@@ -7780,7 +7780,7 @@
           <p:cNvPr id="12" name="surface">
             <a:extLst xmlns:a="http://schemas.openxmlformats.org/drawingml/2006/main">
               <a:ext uri="{FF2B5EF4-FFF2-40B4-BE49-F238E27FC236}">
-                <a16:creationId xmlns:a16="http://schemas.microsoft.com/office/drawing/2014/main" id="{832D0277-0906-471A-B903-B6D428F86CFF}"/>
+                <a16:creationId xmlns:a16="http://schemas.microsoft.com/office/drawing/2014/main" id="{AF3501EE-96E8-4E6F-B3B3-87EE02159860}"/>
               </a:ext>
             </a:extLst>
           </p:cNvPr>
@@ -7817,7 +7817,7 @@
           <p:cNvPr id="13" name="text">
             <a:extLst xmlns:a="http://schemas.openxmlformats.org/drawingml/2006/main">
               <a:ext uri="{FF2B5EF4-FFF2-40B4-BE49-F238E27FC236}">
-                <a16:creationId xmlns:a16="http://schemas.microsoft.com/office/drawing/2014/main" id="{D73869E2-0428-4F32-93E1-3B0DCF4A23A3}"/>
+                <a16:creationId xmlns:a16="http://schemas.microsoft.com/office/drawing/2014/main" id="{3A70757B-399D-460A-9812-48701A250B6F}"/>
               </a:ext>
             </a:extLst>
           </p:cNvPr>
@@ -7885,7 +7885,7 @@
           <p:cNvPr id="14" name="text">
             <a:extLst xmlns:a="http://schemas.openxmlformats.org/drawingml/2006/main">
               <a:ext uri="{FF2B5EF4-FFF2-40B4-BE49-F238E27FC236}">
-                <a16:creationId xmlns:a16="http://schemas.microsoft.com/office/drawing/2014/main" id="{0B911857-DD7B-43E0-88A3-F262FF4EB855}"/>
+                <a16:creationId xmlns:a16="http://schemas.microsoft.com/office/drawing/2014/main" id="{7455F824-2CF1-410A-A202-578416C3F800}"/>
               </a:ext>
             </a:extLst>
           </p:cNvPr>
@@ -7953,7 +7953,7 @@
           <p:cNvPr id="15" name="surface">
             <a:extLst xmlns:a="http://schemas.openxmlformats.org/drawingml/2006/main">
               <a:ext uri="{FF2B5EF4-FFF2-40B4-BE49-F238E27FC236}">
-                <a16:creationId xmlns:a16="http://schemas.microsoft.com/office/drawing/2014/main" id="{406F56A5-7A43-4E73-9A9D-107373783D7D}"/>
+                <a16:creationId xmlns:a16="http://schemas.microsoft.com/office/drawing/2014/main" id="{A4F6BD90-9FA8-4FD2-A14E-F452A4A2F0D5}"/>
               </a:ext>
             </a:extLst>
           </p:cNvPr>
@@ -7988,7 +7988,7 @@
           <p:cNvPr id="16" name="surface">
             <a:extLst xmlns:a="http://schemas.openxmlformats.org/drawingml/2006/main">
               <a:ext uri="{FF2B5EF4-FFF2-40B4-BE49-F238E27FC236}">
-                <a16:creationId xmlns:a16="http://schemas.microsoft.com/office/drawing/2014/main" id="{2F531308-32A0-433A-9EAF-6E30FACB9CEC}"/>
+                <a16:creationId xmlns:a16="http://schemas.microsoft.com/office/drawing/2014/main" id="{144045F0-7573-4CF6-BF66-EDF666A637A7}"/>
               </a:ext>
             </a:extLst>
           </p:cNvPr>
@@ -8025,7 +8025,7 @@
           <p:cNvPr id="17" name="text">
             <a:extLst xmlns:a="http://schemas.openxmlformats.org/drawingml/2006/main">
               <a:ext uri="{FF2B5EF4-FFF2-40B4-BE49-F238E27FC236}">
-                <a16:creationId xmlns:a16="http://schemas.microsoft.com/office/drawing/2014/main" id="{DC7FF3D0-6039-4ED8-B721-837A95645F7E}"/>
+                <a16:creationId xmlns:a16="http://schemas.microsoft.com/office/drawing/2014/main" id="{6D4A80AF-B478-4DA6-9191-B83C2D5FD01B}"/>
               </a:ext>
             </a:extLst>
           </p:cNvPr>
@@ -8093,7 +8093,7 @@
           <p:cNvPr id="18" name="text">
             <a:extLst xmlns:a="http://schemas.openxmlformats.org/drawingml/2006/main">
               <a:ext uri="{FF2B5EF4-FFF2-40B4-BE49-F238E27FC236}">
-                <a16:creationId xmlns:a16="http://schemas.microsoft.com/office/drawing/2014/main" id="{B65022D2-2713-45CB-A84B-BBF71449329F}"/>
+                <a16:creationId xmlns:a16="http://schemas.microsoft.com/office/drawing/2014/main" id="{DDE0DAA9-6F41-427C-9804-C6DA46C21D99}"/>
               </a:ext>
             </a:extLst>
           </p:cNvPr>
@@ -8161,7 +8161,7 @@
           <p:cNvPr id="19" name="surface">
             <a:extLst xmlns:a="http://schemas.openxmlformats.org/drawingml/2006/main">
               <a:ext uri="{FF2B5EF4-FFF2-40B4-BE49-F238E27FC236}">
-                <a16:creationId xmlns:a16="http://schemas.microsoft.com/office/drawing/2014/main" id="{2D2FB0E1-5363-4C85-AFDE-4793E5B7D838}"/>
+                <a16:creationId xmlns:a16="http://schemas.microsoft.com/office/drawing/2014/main" id="{377032B8-42BD-437B-959A-CF2EB0840303}"/>
               </a:ext>
             </a:extLst>
           </p:cNvPr>
@@ -8196,7 +8196,7 @@
           <p:cNvPr id="20" name="surface">
             <a:extLst xmlns:a="http://schemas.openxmlformats.org/drawingml/2006/main">
               <a:ext uri="{FF2B5EF4-FFF2-40B4-BE49-F238E27FC236}">
-                <a16:creationId xmlns:a16="http://schemas.microsoft.com/office/drawing/2014/main" id="{D3F65B5B-319C-4F1B-ADC6-BBF6ADC5AAF1}"/>
+                <a16:creationId xmlns:a16="http://schemas.microsoft.com/office/drawing/2014/main" id="{8E2F5365-43B5-4985-8B4F-578785A45828}"/>
               </a:ext>
             </a:extLst>
           </p:cNvPr>
@@ -8233,7 +8233,7 @@
           <p:cNvPr id="21" name="text">
             <a:extLst xmlns:a="http://schemas.openxmlformats.org/drawingml/2006/main">
               <a:ext uri="{FF2B5EF4-FFF2-40B4-BE49-F238E27FC236}">
-                <a16:creationId xmlns:a16="http://schemas.microsoft.com/office/drawing/2014/main" id="{56669062-D8C8-43B9-918E-8F792DCD1A69}"/>
+                <a16:creationId xmlns:a16="http://schemas.microsoft.com/office/drawing/2014/main" id="{C3EFE0E8-CF25-46D6-918B-3A339152C3AE}"/>
               </a:ext>
             </a:extLst>
           </p:cNvPr>
@@ -8301,7 +8301,7 @@
           <p:cNvPr id="22" name="text">
             <a:extLst xmlns:a="http://schemas.openxmlformats.org/drawingml/2006/main">
               <a:ext uri="{FF2B5EF4-FFF2-40B4-BE49-F238E27FC236}">
-                <a16:creationId xmlns:a16="http://schemas.microsoft.com/office/drawing/2014/main" id="{C92E2C6B-108C-4077-AF8D-299B79E12463}"/>
+                <a16:creationId xmlns:a16="http://schemas.microsoft.com/office/drawing/2014/main" id="{2FA4CAAF-E97B-40BA-9E12-391FD2618576}"/>
               </a:ext>
             </a:extLst>
           </p:cNvPr>
@@ -8369,7 +8369,7 @@
           <p:cNvPr id="23" name="surface">
             <a:extLst xmlns:a="http://schemas.openxmlformats.org/drawingml/2006/main">
               <a:ext uri="{FF2B5EF4-FFF2-40B4-BE49-F238E27FC236}">
-                <a16:creationId xmlns:a16="http://schemas.microsoft.com/office/drawing/2014/main" id="{617DD9FA-B85E-4BA6-B867-D634797D6372}"/>
+                <a16:creationId xmlns:a16="http://schemas.microsoft.com/office/drawing/2014/main" id="{92F7CB19-9AA8-490F-BE67-1C72FA4F17E2}"/>
               </a:ext>
             </a:extLst>
           </p:cNvPr>
@@ -8404,7 +8404,7 @@
           <p:cNvPr id="24" name="text">
             <a:extLst xmlns:a="http://schemas.openxmlformats.org/drawingml/2006/main">
               <a:ext uri="{FF2B5EF4-FFF2-40B4-BE49-F238E27FC236}">
-                <a16:creationId xmlns:a16="http://schemas.microsoft.com/office/drawing/2014/main" id="{0F91A779-AA4C-4E5B-B829-FA7B2CE2470B}"/>
+                <a16:creationId xmlns:a16="http://schemas.microsoft.com/office/drawing/2014/main" id="{F2C057C6-89FF-457D-A026-CE98FC4DB036}"/>
               </a:ext>
             </a:extLst>
           </p:cNvPr>
@@ -8472,7 +8472,7 @@
           <p:cNvPr id="25" name="text">
             <a:extLst xmlns:a="http://schemas.openxmlformats.org/drawingml/2006/main">
               <a:ext uri="{FF2B5EF4-FFF2-40B4-BE49-F238E27FC236}">
-                <a16:creationId xmlns:a16="http://schemas.microsoft.com/office/drawing/2014/main" id="{6A4AE2B3-88D5-4CBC-901B-094F57EB0B48}"/>
+                <a16:creationId xmlns:a16="http://schemas.microsoft.com/office/drawing/2014/main" id="{FB038620-C9BB-4E77-B9B8-256D98A9905E}"/>
               </a:ext>
             </a:extLst>
           </p:cNvPr>
@@ -8540,7 +8540,7 @@
           <p:cNvPr id="26" name="surface">
             <a:extLst xmlns:a="http://schemas.openxmlformats.org/drawingml/2006/main">
               <a:ext uri="{FF2B5EF4-FFF2-40B4-BE49-F238E27FC236}">
-                <a16:creationId xmlns:a16="http://schemas.microsoft.com/office/drawing/2014/main" id="{600A87D1-9AF4-4351-A231-495383AE9C13}"/>
+                <a16:creationId xmlns:a16="http://schemas.microsoft.com/office/drawing/2014/main" id="{8982F0DC-C176-4A67-BF28-A8B8C5FF522D}"/>
               </a:ext>
             </a:extLst>
           </p:cNvPr>
@@ -8575,7 +8575,7 @@
           <p:cNvPr id="27" name="text">
             <a:extLst xmlns:a="http://schemas.openxmlformats.org/drawingml/2006/main">
               <a:ext uri="{FF2B5EF4-FFF2-40B4-BE49-F238E27FC236}">
-                <a16:creationId xmlns:a16="http://schemas.microsoft.com/office/drawing/2014/main" id="{6D47E1D9-687C-4A24-A078-8DCCADE2F5B7}"/>
+                <a16:creationId xmlns:a16="http://schemas.microsoft.com/office/drawing/2014/main" id="{D3342E72-084F-4D06-AFEF-6A58EE2840B4}"/>
               </a:ext>
             </a:extLst>
           </p:cNvPr>
@@ -8643,7 +8643,7 @@
           <p:cNvPr id="28" name="text">
             <a:extLst xmlns:a="http://schemas.openxmlformats.org/drawingml/2006/main">
               <a:ext uri="{FF2B5EF4-FFF2-40B4-BE49-F238E27FC236}">
-                <a16:creationId xmlns:a16="http://schemas.microsoft.com/office/drawing/2014/main" id="{ACD9B171-DF4B-4370-9DA5-CBFCACEAE606}"/>
+                <a16:creationId xmlns:a16="http://schemas.microsoft.com/office/drawing/2014/main" id="{5CA0A907-5CC8-46E2-A946-D8A5730EE179}"/>
               </a:ext>
             </a:extLst>
           </p:cNvPr>
@@ -8711,7 +8711,7 @@
           <p:cNvPr id="29" name="surface">
             <a:extLst xmlns:a="http://schemas.openxmlformats.org/drawingml/2006/main">
               <a:ext uri="{FF2B5EF4-FFF2-40B4-BE49-F238E27FC236}">
-                <a16:creationId xmlns:a16="http://schemas.microsoft.com/office/drawing/2014/main" id="{81055CEB-2318-4862-AF58-1DB388BBEB5B}"/>
+                <a16:creationId xmlns:a16="http://schemas.microsoft.com/office/drawing/2014/main" id="{4207664C-A40D-4472-B403-FCF16A181F2C}"/>
               </a:ext>
             </a:extLst>
           </p:cNvPr>
@@ -8746,7 +8746,7 @@
           <p:cNvPr id="30" name="text">
             <a:extLst xmlns:a="http://schemas.openxmlformats.org/drawingml/2006/main">
               <a:ext uri="{FF2B5EF4-FFF2-40B4-BE49-F238E27FC236}">
-                <a16:creationId xmlns:a16="http://schemas.microsoft.com/office/drawing/2014/main" id="{EE14DCED-20A8-4515-AE1B-C0666A77EE3A}"/>
+                <a16:creationId xmlns:a16="http://schemas.microsoft.com/office/drawing/2014/main" id="{99755D35-2070-446E-962B-5F4CF1295840}"/>
               </a:ext>
             </a:extLst>
           </p:cNvPr>
@@ -8814,7 +8814,7 @@
           <p:cNvPr id="31" name="text">
             <a:extLst xmlns:a="http://schemas.openxmlformats.org/drawingml/2006/main">
               <a:ext uri="{FF2B5EF4-FFF2-40B4-BE49-F238E27FC236}">
-                <a16:creationId xmlns:a16="http://schemas.microsoft.com/office/drawing/2014/main" id="{9AD03D63-4691-4CBD-8740-8FDAA3A75223}"/>
+                <a16:creationId xmlns:a16="http://schemas.microsoft.com/office/drawing/2014/main" id="{54B5B3D1-80F8-4528-9296-EDAC048D5F58}"/>
               </a:ext>
             </a:extLst>
           </p:cNvPr>
@@ -8882,7 +8882,7 @@
           <p:cNvPr id="32" name="surface">
             <a:extLst xmlns:a="http://schemas.openxmlformats.org/drawingml/2006/main">
               <a:ext uri="{FF2B5EF4-FFF2-40B4-BE49-F238E27FC236}">
-                <a16:creationId xmlns:a16="http://schemas.microsoft.com/office/drawing/2014/main" id="{58E3F034-8A0A-469B-AE9C-ECBBF8CE6669}"/>
+                <a16:creationId xmlns:a16="http://schemas.microsoft.com/office/drawing/2014/main" id="{DC772538-6B64-47E4-AFC0-8B8E086608C2}"/>
               </a:ext>
             </a:extLst>
           </p:cNvPr>
@@ -8917,7 +8917,7 @@
           <p:cNvPr id="33" name="text">
             <a:extLst xmlns:a="http://schemas.openxmlformats.org/drawingml/2006/main">
               <a:ext uri="{FF2B5EF4-FFF2-40B4-BE49-F238E27FC236}">
-                <a16:creationId xmlns:a16="http://schemas.microsoft.com/office/drawing/2014/main" id="{228F5871-29CA-41A6-AADC-57BD85138C0A}"/>
+                <a16:creationId xmlns:a16="http://schemas.microsoft.com/office/drawing/2014/main" id="{5269065A-0E8C-4157-AB90-0C6348A96073}"/>
               </a:ext>
             </a:extLst>
           </p:cNvPr>
@@ -8985,7 +8985,7 @@
           <p:cNvPr id="34" name="text">
             <a:extLst xmlns:a="http://schemas.openxmlformats.org/drawingml/2006/main">
               <a:ext uri="{FF2B5EF4-FFF2-40B4-BE49-F238E27FC236}">
-                <a16:creationId xmlns:a16="http://schemas.microsoft.com/office/drawing/2014/main" id="{37CE2153-C8C1-46C7-8E93-E8F3B7E35D5F}"/>
+                <a16:creationId xmlns:a16="http://schemas.microsoft.com/office/drawing/2014/main" id="{070DE3FF-CA15-4980-A8F5-05CA0B5ED7FC}"/>
               </a:ext>
             </a:extLst>
           </p:cNvPr>
@@ -9051,7 +9051,7 @@
     </p:spTree>
     <p:extLst>
       <p:ext uri="{BB962C8B-B14F-4D97-AF65-F5344CB8AC3E}">
-        <p14:creationId xmlns:p14="http://schemas.microsoft.com/office/powerpoint/2010/main" val="1890527826"/>
+        <p14:creationId xmlns:p14="http://schemas.microsoft.com/office/powerpoint/2010/main" val="1320149239"/>
       </p:ext>
     </p:extLst>
   </p:cSld>
@@ -9082,7 +9082,7 @@
           <p:cNvPr id="1" name="top-accent">
             <a:extLst xmlns:a="http://schemas.openxmlformats.org/drawingml/2006/main">
               <a:ext uri="{FF2B5EF4-FFF2-40B4-BE49-F238E27FC236}">
-                <a16:creationId xmlns:a16="http://schemas.microsoft.com/office/drawing/2014/main" id="{13008F44-BD5F-4F98-936C-DB14480F4439}"/>
+                <a16:creationId xmlns:a16="http://schemas.microsoft.com/office/drawing/2014/main" id="{49D31007-017C-44F2-9A05-F001DD749102}"/>
               </a:ext>
             </a:extLst>
           </p:cNvPr>
@@ -9117,7 +9117,7 @@
           <p:cNvPr id="2" name="bottom-line">
             <a:extLst xmlns:a="http://schemas.openxmlformats.org/drawingml/2006/main">
               <a:ext uri="{FF2B5EF4-FFF2-40B4-BE49-F238E27FC236}">
-                <a16:creationId xmlns:a16="http://schemas.microsoft.com/office/drawing/2014/main" id="{516EE297-78F3-43C8-A1FC-42D595990DC2}"/>
+                <a16:creationId xmlns:a16="http://schemas.microsoft.com/office/drawing/2014/main" id="{8D9CBD4F-AAB1-4DC1-ACEC-7F447B3E989B}"/>
               </a:ext>
             </a:extLst>
           </p:cNvPr>
@@ -9152,7 +9152,7 @@
           <p:cNvPr id="3" name="surface">
             <a:extLst xmlns:a="http://schemas.openxmlformats.org/drawingml/2006/main">
               <a:ext uri="{FF2B5EF4-FFF2-40B4-BE49-F238E27FC236}">
-                <a16:creationId xmlns:a16="http://schemas.microsoft.com/office/drawing/2014/main" id="{11606D01-2964-436C-9EFA-EB6BAB291D76}"/>
+                <a16:creationId xmlns:a16="http://schemas.microsoft.com/office/drawing/2014/main" id="{4A360E28-4618-4250-A481-DBE7399A3161}"/>
               </a:ext>
             </a:extLst>
           </p:cNvPr>
@@ -9214,7 +9214,7 @@
           <p:cNvPr id="4" name="text">
             <a:extLst xmlns:a="http://schemas.openxmlformats.org/drawingml/2006/main">
               <a:ext uri="{FF2B5EF4-FFF2-40B4-BE49-F238E27FC236}">
-                <a16:creationId xmlns:a16="http://schemas.microsoft.com/office/drawing/2014/main" id="{495CD0BF-E302-49F7-BFF9-2C40F41B8C17}"/>
+                <a16:creationId xmlns:a16="http://schemas.microsoft.com/office/drawing/2014/main" id="{877BBC2D-3ACA-49A7-A315-39A4F70A1773}"/>
               </a:ext>
             </a:extLst>
           </p:cNvPr>
@@ -9282,7 +9282,7 @@
           <p:cNvPr id="5" name="text">
             <a:extLst xmlns:a="http://schemas.openxmlformats.org/drawingml/2006/main">
               <a:ext uri="{FF2B5EF4-FFF2-40B4-BE49-F238E27FC236}">
-                <a16:creationId xmlns:a16="http://schemas.microsoft.com/office/drawing/2014/main" id="{F8DB8361-976C-48CF-B002-74CF2DC0EAF7}"/>
+                <a16:creationId xmlns:a16="http://schemas.microsoft.com/office/drawing/2014/main" id="{7A005920-6C72-4DFD-AC58-AAC93EBB671B}"/>
               </a:ext>
             </a:extLst>
           </p:cNvPr>
@@ -9350,7 +9350,7 @@
           <p:cNvPr id="6" name="text">
             <a:extLst xmlns:a="http://schemas.openxmlformats.org/drawingml/2006/main">
               <a:ext uri="{FF2B5EF4-FFF2-40B4-BE49-F238E27FC236}">
-                <a16:creationId xmlns:a16="http://schemas.microsoft.com/office/drawing/2014/main" id="{73F7422C-4DDC-448D-B59D-C06DB3B85FC2}"/>
+                <a16:creationId xmlns:a16="http://schemas.microsoft.com/office/drawing/2014/main" id="{C35DCC5E-ACEB-4BDE-91D2-535BA8723460}"/>
               </a:ext>
             </a:extLst>
           </p:cNvPr>
@@ -9418,7 +9418,7 @@
           <p:cNvPr id="7" name="surface">
             <a:extLst xmlns:a="http://schemas.openxmlformats.org/drawingml/2006/main">
               <a:ext uri="{FF2B5EF4-FFF2-40B4-BE49-F238E27FC236}">
-                <a16:creationId xmlns:a16="http://schemas.microsoft.com/office/drawing/2014/main" id="{0FD12866-3BB6-40EB-88F7-02194E4364DF}"/>
+                <a16:creationId xmlns:a16="http://schemas.microsoft.com/office/drawing/2014/main" id="{32F55FC4-21F9-4731-BAC0-1A08936E401D}"/>
               </a:ext>
             </a:extLst>
           </p:cNvPr>
@@ -9453,7 +9453,7 @@
           <p:cNvPr id="8" name="surface">
             <a:extLst xmlns:a="http://schemas.openxmlformats.org/drawingml/2006/main">
               <a:ext uri="{FF2B5EF4-FFF2-40B4-BE49-F238E27FC236}">
-                <a16:creationId xmlns:a16="http://schemas.microsoft.com/office/drawing/2014/main" id="{ADD76AEE-1E55-4C4D-8DCD-2900C26EA4BA}"/>
+                <a16:creationId xmlns:a16="http://schemas.microsoft.com/office/drawing/2014/main" id="{9C80D07C-B488-4DB1-B554-0A248126B773}"/>
               </a:ext>
             </a:extLst>
           </p:cNvPr>
@@ -9490,7 +9490,7 @@
           <p:cNvPr id="9" name="text">
             <a:extLst xmlns:a="http://schemas.openxmlformats.org/drawingml/2006/main">
               <a:ext uri="{FF2B5EF4-FFF2-40B4-BE49-F238E27FC236}">
-                <a16:creationId xmlns:a16="http://schemas.microsoft.com/office/drawing/2014/main" id="{1D372804-0726-4913-BBFF-A0DB5769313A}"/>
+                <a16:creationId xmlns:a16="http://schemas.microsoft.com/office/drawing/2014/main" id="{6CD9B46F-C60C-4509-8395-E9B05566697F}"/>
               </a:ext>
             </a:extLst>
           </p:cNvPr>
@@ -9558,7 +9558,7 @@
           <p:cNvPr id="10" name="text">
             <a:extLst xmlns:a="http://schemas.openxmlformats.org/drawingml/2006/main">
               <a:ext uri="{FF2B5EF4-FFF2-40B4-BE49-F238E27FC236}">
-                <a16:creationId xmlns:a16="http://schemas.microsoft.com/office/drawing/2014/main" id="{36352FEC-BB37-4C53-A511-D8EC0E841841}"/>
+                <a16:creationId xmlns:a16="http://schemas.microsoft.com/office/drawing/2014/main" id="{95DCF72F-1196-4E80-9EEE-4BC643BBA301}"/>
               </a:ext>
             </a:extLst>
           </p:cNvPr>
@@ -9626,7 +9626,7 @@
           <p:cNvPr id="11" name="surface">
             <a:extLst xmlns:a="http://schemas.openxmlformats.org/drawingml/2006/main">
               <a:ext uri="{FF2B5EF4-FFF2-40B4-BE49-F238E27FC236}">
-                <a16:creationId xmlns:a16="http://schemas.microsoft.com/office/drawing/2014/main" id="{A30C7AA5-337F-4B3F-9735-42659B553A2A}"/>
+                <a16:creationId xmlns:a16="http://schemas.microsoft.com/office/drawing/2014/main" id="{892516AA-C33E-4182-BCC8-809F88354103}"/>
               </a:ext>
             </a:extLst>
           </p:cNvPr>
@@ -9661,7 +9661,7 @@
           <p:cNvPr id="12" name="surface">
             <a:extLst xmlns:a="http://schemas.openxmlformats.org/drawingml/2006/main">
               <a:ext uri="{FF2B5EF4-FFF2-40B4-BE49-F238E27FC236}">
-                <a16:creationId xmlns:a16="http://schemas.microsoft.com/office/drawing/2014/main" id="{364D8A91-6FC1-4517-9CE7-BA1F7BDD032D}"/>
+                <a16:creationId xmlns:a16="http://schemas.microsoft.com/office/drawing/2014/main" id="{21812E8B-DB28-4581-8ED4-CE7E0F3F1F69}"/>
               </a:ext>
             </a:extLst>
           </p:cNvPr>
@@ -9698,7 +9698,7 @@
           <p:cNvPr id="13" name="text">
             <a:extLst xmlns:a="http://schemas.openxmlformats.org/drawingml/2006/main">
               <a:ext uri="{FF2B5EF4-FFF2-40B4-BE49-F238E27FC236}">
-                <a16:creationId xmlns:a16="http://schemas.microsoft.com/office/drawing/2014/main" id="{CB91BD14-4B35-4569-B8B0-022482F9ABD5}"/>
+                <a16:creationId xmlns:a16="http://schemas.microsoft.com/office/drawing/2014/main" id="{FD31A436-7DF6-4EF5-A6F4-B7FE7C2E6186}"/>
               </a:ext>
             </a:extLst>
           </p:cNvPr>
@@ -9766,7 +9766,7 @@
           <p:cNvPr id="14" name="text">
             <a:extLst xmlns:a="http://schemas.openxmlformats.org/drawingml/2006/main">
               <a:ext uri="{FF2B5EF4-FFF2-40B4-BE49-F238E27FC236}">
-                <a16:creationId xmlns:a16="http://schemas.microsoft.com/office/drawing/2014/main" id="{B218ACA4-275C-49EE-B5D9-181A14F75F86}"/>
+                <a16:creationId xmlns:a16="http://schemas.microsoft.com/office/drawing/2014/main" id="{B685C670-6116-4E1A-917D-155F0030F1C9}"/>
               </a:ext>
             </a:extLst>
           </p:cNvPr>
@@ -9834,7 +9834,7 @@
           <p:cNvPr id="15" name="surface">
             <a:extLst xmlns:a="http://schemas.openxmlformats.org/drawingml/2006/main">
               <a:ext uri="{FF2B5EF4-FFF2-40B4-BE49-F238E27FC236}">
-                <a16:creationId xmlns:a16="http://schemas.microsoft.com/office/drawing/2014/main" id="{6D8B7B41-831B-41D4-9247-7EED19BC7D55}"/>
+                <a16:creationId xmlns:a16="http://schemas.microsoft.com/office/drawing/2014/main" id="{A620174E-C399-4ABF-912B-5D6725FE102D}"/>
               </a:ext>
             </a:extLst>
           </p:cNvPr>
@@ -9869,7 +9869,7 @@
           <p:cNvPr id="16" name="surface">
             <a:extLst xmlns:a="http://schemas.openxmlformats.org/drawingml/2006/main">
               <a:ext uri="{FF2B5EF4-FFF2-40B4-BE49-F238E27FC236}">
-                <a16:creationId xmlns:a16="http://schemas.microsoft.com/office/drawing/2014/main" id="{1B74D6E8-3E1F-4C15-839F-3726091DE52C}"/>
+                <a16:creationId xmlns:a16="http://schemas.microsoft.com/office/drawing/2014/main" id="{44F69981-DCC2-4BE8-837F-85EF3A7A86AA}"/>
               </a:ext>
             </a:extLst>
           </p:cNvPr>
@@ -9906,7 +9906,7 @@
           <p:cNvPr id="17" name="text">
             <a:extLst xmlns:a="http://schemas.openxmlformats.org/drawingml/2006/main">
               <a:ext uri="{FF2B5EF4-FFF2-40B4-BE49-F238E27FC236}">
-                <a16:creationId xmlns:a16="http://schemas.microsoft.com/office/drawing/2014/main" id="{785959AA-B49F-47BB-9251-A59B76E253BA}"/>
+                <a16:creationId xmlns:a16="http://schemas.microsoft.com/office/drawing/2014/main" id="{97ED4A77-4D58-4C87-922D-5674CFC3628F}"/>
               </a:ext>
             </a:extLst>
           </p:cNvPr>
@@ -9974,7 +9974,7 @@
           <p:cNvPr id="18" name="text">
             <a:extLst xmlns:a="http://schemas.openxmlformats.org/drawingml/2006/main">
               <a:ext uri="{FF2B5EF4-FFF2-40B4-BE49-F238E27FC236}">
-                <a16:creationId xmlns:a16="http://schemas.microsoft.com/office/drawing/2014/main" id="{DCFC4EF9-CF3F-4D29-9A04-31132B3D561F}"/>
+                <a16:creationId xmlns:a16="http://schemas.microsoft.com/office/drawing/2014/main" id="{83442587-7B8B-4827-952A-A59A15301077}"/>
               </a:ext>
             </a:extLst>
           </p:cNvPr>
@@ -10042,7 +10042,7 @@
           <p:cNvPr id="19" name="surface">
             <a:extLst xmlns:a="http://schemas.openxmlformats.org/drawingml/2006/main">
               <a:ext uri="{FF2B5EF4-FFF2-40B4-BE49-F238E27FC236}">
-                <a16:creationId xmlns:a16="http://schemas.microsoft.com/office/drawing/2014/main" id="{C880BDBE-69B5-454D-85E2-21E55DE2C86C}"/>
+                <a16:creationId xmlns:a16="http://schemas.microsoft.com/office/drawing/2014/main" id="{9D636517-980D-4F5B-B03F-D06D29622478}"/>
               </a:ext>
             </a:extLst>
           </p:cNvPr>
@@ -10077,7 +10077,7 @@
           <p:cNvPr id="20" name="surface">
             <a:extLst xmlns:a="http://schemas.openxmlformats.org/drawingml/2006/main">
               <a:ext uri="{FF2B5EF4-FFF2-40B4-BE49-F238E27FC236}">
-                <a16:creationId xmlns:a16="http://schemas.microsoft.com/office/drawing/2014/main" id="{33F938DD-9F2E-4605-A103-0173A0353752}"/>
+                <a16:creationId xmlns:a16="http://schemas.microsoft.com/office/drawing/2014/main" id="{8351F191-EF5F-4DAE-93F0-3B3EB733B698}"/>
               </a:ext>
             </a:extLst>
           </p:cNvPr>
@@ -10114,7 +10114,7 @@
           <p:cNvPr id="21" name="text">
             <a:extLst xmlns:a="http://schemas.openxmlformats.org/drawingml/2006/main">
               <a:ext uri="{FF2B5EF4-FFF2-40B4-BE49-F238E27FC236}">
-                <a16:creationId xmlns:a16="http://schemas.microsoft.com/office/drawing/2014/main" id="{BC1537E4-7AB4-47CD-91C3-3D3583814133}"/>
+                <a16:creationId xmlns:a16="http://schemas.microsoft.com/office/drawing/2014/main" id="{12766CFF-4065-444C-A32F-E100F051FCC2}"/>
               </a:ext>
             </a:extLst>
           </p:cNvPr>
@@ -10182,7 +10182,7 @@
           <p:cNvPr id="22" name="text">
             <a:extLst xmlns:a="http://schemas.openxmlformats.org/drawingml/2006/main">
               <a:ext uri="{FF2B5EF4-FFF2-40B4-BE49-F238E27FC236}">
-                <a16:creationId xmlns:a16="http://schemas.microsoft.com/office/drawing/2014/main" id="{9A2C46A1-1E9C-4885-9D00-FF3AFA20B63A}"/>
+                <a16:creationId xmlns:a16="http://schemas.microsoft.com/office/drawing/2014/main" id="{3B938EB8-FEB8-47D5-A926-3462133872A6}"/>
               </a:ext>
             </a:extLst>
           </p:cNvPr>
@@ -10250,7 +10250,7 @@
           <p:cNvPr id="23" name="surface">
             <a:extLst xmlns:a="http://schemas.openxmlformats.org/drawingml/2006/main">
               <a:ext uri="{FF2B5EF4-FFF2-40B4-BE49-F238E27FC236}">
-                <a16:creationId xmlns:a16="http://schemas.microsoft.com/office/drawing/2014/main" id="{D77EB0F2-B969-4AFA-B23D-53BCF175EBB1}"/>
+                <a16:creationId xmlns:a16="http://schemas.microsoft.com/office/drawing/2014/main" id="{D626DF5F-086A-4E4B-AF1C-B168A0F47146}"/>
               </a:ext>
             </a:extLst>
           </p:cNvPr>
@@ -10285,7 +10285,7 @@
           <p:cNvPr id="24" name="text">
             <a:extLst xmlns:a="http://schemas.openxmlformats.org/drawingml/2006/main">
               <a:ext uri="{FF2B5EF4-FFF2-40B4-BE49-F238E27FC236}">
-                <a16:creationId xmlns:a16="http://schemas.microsoft.com/office/drawing/2014/main" id="{5781A4FB-ABFD-4587-B7D4-B024314F3792}"/>
+                <a16:creationId xmlns:a16="http://schemas.microsoft.com/office/drawing/2014/main" id="{3C940A8E-04E0-49D4-B538-F55BD4B4C44E}"/>
               </a:ext>
             </a:extLst>
           </p:cNvPr>
@@ -10353,7 +10353,7 @@
           <p:cNvPr id="25" name="text">
             <a:extLst xmlns:a="http://schemas.openxmlformats.org/drawingml/2006/main">
               <a:ext uri="{FF2B5EF4-FFF2-40B4-BE49-F238E27FC236}">
-                <a16:creationId xmlns:a16="http://schemas.microsoft.com/office/drawing/2014/main" id="{21CF9520-1C77-4119-A1C9-2153FB6012F7}"/>
+                <a16:creationId xmlns:a16="http://schemas.microsoft.com/office/drawing/2014/main" id="{D46B4FB4-76FB-4F63-AD13-1FB3E1FD098E}"/>
               </a:ext>
             </a:extLst>
           </p:cNvPr>
@@ -10421,7 +10421,7 @@
           <p:cNvPr id="26" name="surface">
             <a:extLst xmlns:a="http://schemas.openxmlformats.org/drawingml/2006/main">
               <a:ext uri="{FF2B5EF4-FFF2-40B4-BE49-F238E27FC236}">
-                <a16:creationId xmlns:a16="http://schemas.microsoft.com/office/drawing/2014/main" id="{48303767-F7F8-4505-9BB1-8952E9B3E4A6}"/>
+                <a16:creationId xmlns:a16="http://schemas.microsoft.com/office/drawing/2014/main" id="{9C7F2A17-C113-42EE-BA2D-3169169494C1}"/>
               </a:ext>
             </a:extLst>
           </p:cNvPr>
@@ -10456,7 +10456,7 @@
           <p:cNvPr id="27" name="text">
             <a:extLst xmlns:a="http://schemas.openxmlformats.org/drawingml/2006/main">
               <a:ext uri="{FF2B5EF4-FFF2-40B4-BE49-F238E27FC236}">
-                <a16:creationId xmlns:a16="http://schemas.microsoft.com/office/drawing/2014/main" id="{FA572D43-D4F0-4032-B7D2-1E12D7A592FF}"/>
+                <a16:creationId xmlns:a16="http://schemas.microsoft.com/office/drawing/2014/main" id="{C95C6933-C0CE-44B9-8B80-75071C012366}"/>
               </a:ext>
             </a:extLst>
           </p:cNvPr>
@@ -10524,7 +10524,7 @@
           <p:cNvPr id="28" name="text">
             <a:extLst xmlns:a="http://schemas.openxmlformats.org/drawingml/2006/main">
               <a:ext uri="{FF2B5EF4-FFF2-40B4-BE49-F238E27FC236}">
-                <a16:creationId xmlns:a16="http://schemas.microsoft.com/office/drawing/2014/main" id="{45FA5CAC-0316-40EE-A5BB-C2B6D7280D59}"/>
+                <a16:creationId xmlns:a16="http://schemas.microsoft.com/office/drawing/2014/main" id="{050D41A4-9122-4307-A775-D5B5968884A4}"/>
               </a:ext>
             </a:extLst>
           </p:cNvPr>
@@ -10592,7 +10592,7 @@
           <p:cNvPr id="29" name="surface">
             <a:extLst xmlns:a="http://schemas.openxmlformats.org/drawingml/2006/main">
               <a:ext uri="{FF2B5EF4-FFF2-40B4-BE49-F238E27FC236}">
-                <a16:creationId xmlns:a16="http://schemas.microsoft.com/office/drawing/2014/main" id="{CAB4B690-61E9-4BAA-B1DE-E077607EDB67}"/>
+                <a16:creationId xmlns:a16="http://schemas.microsoft.com/office/drawing/2014/main" id="{068F0CFE-0D29-4880-859D-99FB14AEE46F}"/>
               </a:ext>
             </a:extLst>
           </p:cNvPr>
@@ -10627,7 +10627,7 @@
           <p:cNvPr id="30" name="text">
             <a:extLst xmlns:a="http://schemas.openxmlformats.org/drawingml/2006/main">
               <a:ext uri="{FF2B5EF4-FFF2-40B4-BE49-F238E27FC236}">
-                <a16:creationId xmlns:a16="http://schemas.microsoft.com/office/drawing/2014/main" id="{9DD5DE23-D3C7-4512-89FC-9E334A00E65D}"/>
+                <a16:creationId xmlns:a16="http://schemas.microsoft.com/office/drawing/2014/main" id="{E0FA681A-0B5A-4037-97BB-76C5AEAD6597}"/>
               </a:ext>
             </a:extLst>
           </p:cNvPr>
@@ -10695,7 +10695,7 @@
           <p:cNvPr id="31" name="text">
             <a:extLst xmlns:a="http://schemas.openxmlformats.org/drawingml/2006/main">
               <a:ext uri="{FF2B5EF4-FFF2-40B4-BE49-F238E27FC236}">
-                <a16:creationId xmlns:a16="http://schemas.microsoft.com/office/drawing/2014/main" id="{AB0C443B-4031-40B0-9DCA-B2E4871D421F}"/>
+                <a16:creationId xmlns:a16="http://schemas.microsoft.com/office/drawing/2014/main" id="{800B37EB-5E2F-4392-A344-14B4FABD970E}"/>
               </a:ext>
             </a:extLst>
           </p:cNvPr>
@@ -10763,7 +10763,7 @@
           <p:cNvPr id="32" name="surface">
             <a:extLst xmlns:a="http://schemas.openxmlformats.org/drawingml/2006/main">
               <a:ext uri="{FF2B5EF4-FFF2-40B4-BE49-F238E27FC236}">
-                <a16:creationId xmlns:a16="http://schemas.microsoft.com/office/drawing/2014/main" id="{444ED72B-BA4F-46F1-835E-AA20EB988B1F}"/>
+                <a16:creationId xmlns:a16="http://schemas.microsoft.com/office/drawing/2014/main" id="{475148F9-56EA-407A-8149-8B87F09F6DFD}"/>
               </a:ext>
             </a:extLst>
           </p:cNvPr>
@@ -10798,7 +10798,7 @@
           <p:cNvPr id="33" name="text">
             <a:extLst xmlns:a="http://schemas.openxmlformats.org/drawingml/2006/main">
               <a:ext uri="{FF2B5EF4-FFF2-40B4-BE49-F238E27FC236}">
-                <a16:creationId xmlns:a16="http://schemas.microsoft.com/office/drawing/2014/main" id="{2F399F85-9443-43D9-8658-57A84E13B93C}"/>
+                <a16:creationId xmlns:a16="http://schemas.microsoft.com/office/drawing/2014/main" id="{0F0A68C2-A737-4C80-BD37-67DF8BA3CE29}"/>
               </a:ext>
             </a:extLst>
           </p:cNvPr>
@@ -10866,7 +10866,7 @@
           <p:cNvPr id="34" name="text">
             <a:extLst xmlns:a="http://schemas.openxmlformats.org/drawingml/2006/main">
               <a:ext uri="{FF2B5EF4-FFF2-40B4-BE49-F238E27FC236}">
-                <a16:creationId xmlns:a16="http://schemas.microsoft.com/office/drawing/2014/main" id="{2B42CED8-9BEF-49F0-B5F8-76F898CB970E}"/>
+                <a16:creationId xmlns:a16="http://schemas.microsoft.com/office/drawing/2014/main" id="{7C5D8C3D-9153-4CCC-8028-74D1D64B442C}"/>
               </a:ext>
             </a:extLst>
           </p:cNvPr>
@@ -10932,7 +10932,7 @@
     </p:spTree>
     <p:extLst>
       <p:ext uri="{BB962C8B-B14F-4D97-AF65-F5344CB8AC3E}">
-        <p14:creationId xmlns:p14="http://schemas.microsoft.com/office/powerpoint/2010/main" val="861730546"/>
+        <p14:creationId xmlns:p14="http://schemas.microsoft.com/office/powerpoint/2010/main" val="762783754"/>
       </p:ext>
     </p:extLst>
   </p:cSld>
@@ -10963,7 +10963,7 @@
           <p:cNvPr id="1" name="top-accent">
             <a:extLst xmlns:a="http://schemas.openxmlformats.org/drawingml/2006/main">
               <a:ext uri="{FF2B5EF4-FFF2-40B4-BE49-F238E27FC236}">
-                <a16:creationId xmlns:a16="http://schemas.microsoft.com/office/drawing/2014/main" id="{FCC2C19A-43BB-431C-94C7-0AA32683A771}"/>
+                <a16:creationId xmlns:a16="http://schemas.microsoft.com/office/drawing/2014/main" id="{AE083AB9-BE89-4F4C-A7DE-7C36727D26B5}"/>
               </a:ext>
             </a:extLst>
           </p:cNvPr>
@@ -10998,7 +10998,7 @@
           <p:cNvPr id="2" name="bottom-line">
             <a:extLst xmlns:a="http://schemas.openxmlformats.org/drawingml/2006/main">
               <a:ext uri="{FF2B5EF4-FFF2-40B4-BE49-F238E27FC236}">
-                <a16:creationId xmlns:a16="http://schemas.microsoft.com/office/drawing/2014/main" id="{0414F277-5ACA-4711-9DC0-E8CBCAA2E811}"/>
+                <a16:creationId xmlns:a16="http://schemas.microsoft.com/office/drawing/2014/main" id="{6873C15E-A90C-4426-AAE9-D62F5A401761}"/>
               </a:ext>
             </a:extLst>
           </p:cNvPr>
@@ -11033,7 +11033,7 @@
           <p:cNvPr id="3" name="surface">
             <a:extLst xmlns:a="http://schemas.openxmlformats.org/drawingml/2006/main">
               <a:ext uri="{FF2B5EF4-FFF2-40B4-BE49-F238E27FC236}">
-                <a16:creationId xmlns:a16="http://schemas.microsoft.com/office/drawing/2014/main" id="{5A044B14-0392-4296-AA67-1E28C8ABACC0}"/>
+                <a16:creationId xmlns:a16="http://schemas.microsoft.com/office/drawing/2014/main" id="{3BBBD14B-0E41-4474-B9C0-6D4CA56E2489}"/>
               </a:ext>
             </a:extLst>
           </p:cNvPr>
@@ -11095,7 +11095,7 @@
           <p:cNvPr id="4" name="text">
             <a:extLst xmlns:a="http://schemas.openxmlformats.org/drawingml/2006/main">
               <a:ext uri="{FF2B5EF4-FFF2-40B4-BE49-F238E27FC236}">
-                <a16:creationId xmlns:a16="http://schemas.microsoft.com/office/drawing/2014/main" id="{D29916E2-5F73-42F4-95F6-1040F5DB82B6}"/>
+                <a16:creationId xmlns:a16="http://schemas.microsoft.com/office/drawing/2014/main" id="{5C3D93E8-B26C-4FD3-AC5C-C36AAE308B6C}"/>
               </a:ext>
             </a:extLst>
           </p:cNvPr>
@@ -11163,7 +11163,7 @@
           <p:cNvPr id="5" name="text">
             <a:extLst xmlns:a="http://schemas.openxmlformats.org/drawingml/2006/main">
               <a:ext uri="{FF2B5EF4-FFF2-40B4-BE49-F238E27FC236}">
-                <a16:creationId xmlns:a16="http://schemas.microsoft.com/office/drawing/2014/main" id="{D26461D2-EB53-4A78-ACF8-DD55731AD8B7}"/>
+                <a16:creationId xmlns:a16="http://schemas.microsoft.com/office/drawing/2014/main" id="{F0E372DB-0DDF-47E8-BF25-9C81461988B9}"/>
               </a:ext>
             </a:extLst>
           </p:cNvPr>
@@ -11231,7 +11231,7 @@
           <p:cNvPr id="6" name="text">
             <a:extLst xmlns:a="http://schemas.openxmlformats.org/drawingml/2006/main">
               <a:ext uri="{FF2B5EF4-FFF2-40B4-BE49-F238E27FC236}">
-                <a16:creationId xmlns:a16="http://schemas.microsoft.com/office/drawing/2014/main" id="{BAD98047-D5DC-48CA-ABBE-DFC84AE85C94}"/>
+                <a16:creationId xmlns:a16="http://schemas.microsoft.com/office/drawing/2014/main" id="{54192961-2262-43BB-AAC1-1837EA0DA721}"/>
               </a:ext>
             </a:extLst>
           </p:cNvPr>
@@ -11299,7 +11299,7 @@
           <p:cNvPr id="7" name="surface">
             <a:extLst xmlns:a="http://schemas.openxmlformats.org/drawingml/2006/main">
               <a:ext uri="{FF2B5EF4-FFF2-40B4-BE49-F238E27FC236}">
-                <a16:creationId xmlns:a16="http://schemas.microsoft.com/office/drawing/2014/main" id="{4B624885-0A90-4E56-8C5F-774E30F25614}"/>
+                <a16:creationId xmlns:a16="http://schemas.microsoft.com/office/drawing/2014/main" id="{F4B20F29-0047-4BE7-8334-A7F2A29FC118}"/>
               </a:ext>
             </a:extLst>
           </p:cNvPr>
@@ -11334,7 +11334,7 @@
           <p:cNvPr id="8" name="surface">
             <a:extLst xmlns:a="http://schemas.openxmlformats.org/drawingml/2006/main">
               <a:ext uri="{FF2B5EF4-FFF2-40B4-BE49-F238E27FC236}">
-                <a16:creationId xmlns:a16="http://schemas.microsoft.com/office/drawing/2014/main" id="{554FC4FC-4663-4B5B-9862-75A077A0EA5F}"/>
+                <a16:creationId xmlns:a16="http://schemas.microsoft.com/office/drawing/2014/main" id="{5FD8C023-F32E-431B-8C46-C9EB46F36AE6}"/>
               </a:ext>
             </a:extLst>
           </p:cNvPr>
@@ -11371,7 +11371,7 @@
           <p:cNvPr id="9" name="text">
             <a:extLst xmlns:a="http://schemas.openxmlformats.org/drawingml/2006/main">
               <a:ext uri="{FF2B5EF4-FFF2-40B4-BE49-F238E27FC236}">
-                <a16:creationId xmlns:a16="http://schemas.microsoft.com/office/drawing/2014/main" id="{A6BE92EF-2B60-4A52-A6BA-B5FBB46ACACC}"/>
+                <a16:creationId xmlns:a16="http://schemas.microsoft.com/office/drawing/2014/main" id="{C3122583-7984-4F96-B203-69459A14D2B7}"/>
               </a:ext>
             </a:extLst>
           </p:cNvPr>
@@ -11439,7 +11439,7 @@
           <p:cNvPr id="10" name="text">
             <a:extLst xmlns:a="http://schemas.openxmlformats.org/drawingml/2006/main">
               <a:ext uri="{FF2B5EF4-FFF2-40B4-BE49-F238E27FC236}">
-                <a16:creationId xmlns:a16="http://schemas.microsoft.com/office/drawing/2014/main" id="{ED4ECA33-CD9C-45DA-804E-6B157F9A2FE4}"/>
+                <a16:creationId xmlns:a16="http://schemas.microsoft.com/office/drawing/2014/main" id="{0F8A5C92-7A2F-4304-9261-40FD4C05AD73}"/>
               </a:ext>
             </a:extLst>
           </p:cNvPr>
@@ -11507,7 +11507,7 @@
           <p:cNvPr id="11" name="surface">
             <a:extLst xmlns:a="http://schemas.openxmlformats.org/drawingml/2006/main">
               <a:ext uri="{FF2B5EF4-FFF2-40B4-BE49-F238E27FC236}">
-                <a16:creationId xmlns:a16="http://schemas.microsoft.com/office/drawing/2014/main" id="{37291D78-EC81-49CC-8EB3-22C78E2946E4}"/>
+                <a16:creationId xmlns:a16="http://schemas.microsoft.com/office/drawing/2014/main" id="{F6F80284-61A5-4994-A5ED-633E39B477CA}"/>
               </a:ext>
             </a:extLst>
           </p:cNvPr>
@@ -11542,7 +11542,7 @@
           <p:cNvPr id="12" name="surface">
             <a:extLst xmlns:a="http://schemas.openxmlformats.org/drawingml/2006/main">
               <a:ext uri="{FF2B5EF4-FFF2-40B4-BE49-F238E27FC236}">
-                <a16:creationId xmlns:a16="http://schemas.microsoft.com/office/drawing/2014/main" id="{3DFD2764-A5C5-4AD9-9EA7-AFC7708E4590}"/>
+                <a16:creationId xmlns:a16="http://schemas.microsoft.com/office/drawing/2014/main" id="{3700C468-F6A9-4EF6-8437-0A4F191D35F9}"/>
               </a:ext>
             </a:extLst>
           </p:cNvPr>
@@ -11579,7 +11579,7 @@
           <p:cNvPr id="13" name="text">
             <a:extLst xmlns:a="http://schemas.openxmlformats.org/drawingml/2006/main">
               <a:ext uri="{FF2B5EF4-FFF2-40B4-BE49-F238E27FC236}">
-                <a16:creationId xmlns:a16="http://schemas.microsoft.com/office/drawing/2014/main" id="{285F5A9A-EEB4-4879-A1F4-84627F887BFF}"/>
+                <a16:creationId xmlns:a16="http://schemas.microsoft.com/office/drawing/2014/main" id="{2401CC13-BAC6-4484-B744-FB47A9A1FB48}"/>
               </a:ext>
             </a:extLst>
           </p:cNvPr>
@@ -11647,7 +11647,7 @@
           <p:cNvPr id="14" name="text">
             <a:extLst xmlns:a="http://schemas.openxmlformats.org/drawingml/2006/main">
               <a:ext uri="{FF2B5EF4-FFF2-40B4-BE49-F238E27FC236}">
-                <a16:creationId xmlns:a16="http://schemas.microsoft.com/office/drawing/2014/main" id="{5E2BE4C1-3D65-4C83-AA81-2FCDFC918399}"/>
+                <a16:creationId xmlns:a16="http://schemas.microsoft.com/office/drawing/2014/main" id="{D853EB77-C6E4-44CF-BC20-2A96DB04261B}"/>
               </a:ext>
             </a:extLst>
           </p:cNvPr>
@@ -11715,7 +11715,7 @@
           <p:cNvPr id="15" name="surface">
             <a:extLst xmlns:a="http://schemas.openxmlformats.org/drawingml/2006/main">
               <a:ext uri="{FF2B5EF4-FFF2-40B4-BE49-F238E27FC236}">
-                <a16:creationId xmlns:a16="http://schemas.microsoft.com/office/drawing/2014/main" id="{F05BDDF5-1AD6-43E4-8626-1323B6F99B89}"/>
+                <a16:creationId xmlns:a16="http://schemas.microsoft.com/office/drawing/2014/main" id="{067ED50D-7D3B-4F70-AFB5-AB217C65AD5B}"/>
               </a:ext>
             </a:extLst>
           </p:cNvPr>
@@ -11750,7 +11750,7 @@
           <p:cNvPr id="16" name="surface">
             <a:extLst xmlns:a="http://schemas.openxmlformats.org/drawingml/2006/main">
               <a:ext uri="{FF2B5EF4-FFF2-40B4-BE49-F238E27FC236}">
-                <a16:creationId xmlns:a16="http://schemas.microsoft.com/office/drawing/2014/main" id="{69E4456E-0829-43B5-951A-739ED13F8484}"/>
+                <a16:creationId xmlns:a16="http://schemas.microsoft.com/office/drawing/2014/main" id="{28D59500-A058-42D0-9364-E8E0A6BA154F}"/>
               </a:ext>
             </a:extLst>
           </p:cNvPr>
@@ -11787,7 +11787,7 @@
           <p:cNvPr id="17" name="text">
             <a:extLst xmlns:a="http://schemas.openxmlformats.org/drawingml/2006/main">
               <a:ext uri="{FF2B5EF4-FFF2-40B4-BE49-F238E27FC236}">
-                <a16:creationId xmlns:a16="http://schemas.microsoft.com/office/drawing/2014/main" id="{32DD0095-8B9F-4B98-A555-A22FC5C696E1}"/>
+                <a16:creationId xmlns:a16="http://schemas.microsoft.com/office/drawing/2014/main" id="{E6EB217E-1EB6-4B1C-A566-0B76D03EB0CC}"/>
               </a:ext>
             </a:extLst>
           </p:cNvPr>
@@ -11855,7 +11855,7 @@
           <p:cNvPr id="18" name="text">
             <a:extLst xmlns:a="http://schemas.openxmlformats.org/drawingml/2006/main">
               <a:ext uri="{FF2B5EF4-FFF2-40B4-BE49-F238E27FC236}">
-                <a16:creationId xmlns:a16="http://schemas.microsoft.com/office/drawing/2014/main" id="{57913C0C-7F7D-4D83-93A1-BD8851A43DE4}"/>
+                <a16:creationId xmlns:a16="http://schemas.microsoft.com/office/drawing/2014/main" id="{3C33677E-A481-4637-A927-9A32B3FAFEB7}"/>
               </a:ext>
             </a:extLst>
           </p:cNvPr>
@@ -11923,7 +11923,7 @@
           <p:cNvPr id="19" name="surface">
             <a:extLst xmlns:a="http://schemas.openxmlformats.org/drawingml/2006/main">
               <a:ext uri="{FF2B5EF4-FFF2-40B4-BE49-F238E27FC236}">
-                <a16:creationId xmlns:a16="http://schemas.microsoft.com/office/drawing/2014/main" id="{3DC57C19-DB99-4ADF-B37B-E48950B08EFA}"/>
+                <a16:creationId xmlns:a16="http://schemas.microsoft.com/office/drawing/2014/main" id="{CA201623-EECE-41A1-B262-70AC330F94ED}"/>
               </a:ext>
             </a:extLst>
           </p:cNvPr>
@@ -11958,7 +11958,7 @@
           <p:cNvPr id="20" name="surface">
             <a:extLst xmlns:a="http://schemas.openxmlformats.org/drawingml/2006/main">
               <a:ext uri="{FF2B5EF4-FFF2-40B4-BE49-F238E27FC236}">
-                <a16:creationId xmlns:a16="http://schemas.microsoft.com/office/drawing/2014/main" id="{991E7CA9-9655-40C0-BDBE-8F97109D95EC}"/>
+                <a16:creationId xmlns:a16="http://schemas.microsoft.com/office/drawing/2014/main" id="{7232D24B-EAC4-4A2A-85C8-023E63173127}"/>
               </a:ext>
             </a:extLst>
           </p:cNvPr>
@@ -11995,7 +11995,7 @@
           <p:cNvPr id="21" name="text">
             <a:extLst xmlns:a="http://schemas.openxmlformats.org/drawingml/2006/main">
               <a:ext uri="{FF2B5EF4-FFF2-40B4-BE49-F238E27FC236}">
-                <a16:creationId xmlns:a16="http://schemas.microsoft.com/office/drawing/2014/main" id="{BBDD544D-1C80-424B-B6D4-FED8D39B9838}"/>
+                <a16:creationId xmlns:a16="http://schemas.microsoft.com/office/drawing/2014/main" id="{17402C50-5BC7-4E9B-B361-2509C1133993}"/>
               </a:ext>
             </a:extLst>
           </p:cNvPr>
@@ -12063,7 +12063,7 @@
           <p:cNvPr id="22" name="text">
             <a:extLst xmlns:a="http://schemas.openxmlformats.org/drawingml/2006/main">
               <a:ext uri="{FF2B5EF4-FFF2-40B4-BE49-F238E27FC236}">
-                <a16:creationId xmlns:a16="http://schemas.microsoft.com/office/drawing/2014/main" id="{2432B5CB-C614-4AF1-BF67-F4B19CFFEB0A}"/>
+                <a16:creationId xmlns:a16="http://schemas.microsoft.com/office/drawing/2014/main" id="{79591B11-2690-466F-A77B-ADA818503213}"/>
               </a:ext>
             </a:extLst>
           </p:cNvPr>
@@ -12131,7 +12131,7 @@
           <p:cNvPr id="23" name="surface">
             <a:extLst xmlns:a="http://schemas.openxmlformats.org/drawingml/2006/main">
               <a:ext uri="{FF2B5EF4-FFF2-40B4-BE49-F238E27FC236}">
-                <a16:creationId xmlns:a16="http://schemas.microsoft.com/office/drawing/2014/main" id="{3E6ACDD8-AEC4-426B-8DA8-A7912EA8869F}"/>
+                <a16:creationId xmlns:a16="http://schemas.microsoft.com/office/drawing/2014/main" id="{CE69DF46-E506-41FE-9E4A-875A8F379DCB}"/>
               </a:ext>
             </a:extLst>
           </p:cNvPr>
@@ -12166,7 +12166,7 @@
           <p:cNvPr id="24" name="text">
             <a:extLst xmlns:a="http://schemas.openxmlformats.org/drawingml/2006/main">
               <a:ext uri="{FF2B5EF4-FFF2-40B4-BE49-F238E27FC236}">
-                <a16:creationId xmlns:a16="http://schemas.microsoft.com/office/drawing/2014/main" id="{94980407-C1A6-4F7A-8645-6D9FBA13BB81}"/>
+                <a16:creationId xmlns:a16="http://schemas.microsoft.com/office/drawing/2014/main" id="{86601F6C-8A25-49BB-8F1A-EE93556896A7}"/>
               </a:ext>
             </a:extLst>
           </p:cNvPr>
@@ -12234,7 +12234,7 @@
           <p:cNvPr id="25" name="text">
             <a:extLst xmlns:a="http://schemas.openxmlformats.org/drawingml/2006/main">
               <a:ext uri="{FF2B5EF4-FFF2-40B4-BE49-F238E27FC236}">
-                <a16:creationId xmlns:a16="http://schemas.microsoft.com/office/drawing/2014/main" id="{0333916A-E1B1-4213-9609-E70B39951258}"/>
+                <a16:creationId xmlns:a16="http://schemas.microsoft.com/office/drawing/2014/main" id="{7D6F0717-B174-406E-B7DB-0E1C4F4985A5}"/>
               </a:ext>
             </a:extLst>
           </p:cNvPr>
@@ -12302,7 +12302,7 @@
           <p:cNvPr id="26" name="surface">
             <a:extLst xmlns:a="http://schemas.openxmlformats.org/drawingml/2006/main">
               <a:ext uri="{FF2B5EF4-FFF2-40B4-BE49-F238E27FC236}">
-                <a16:creationId xmlns:a16="http://schemas.microsoft.com/office/drawing/2014/main" id="{A2E7AF3C-AB01-4529-8DCF-5C0987146038}"/>
+                <a16:creationId xmlns:a16="http://schemas.microsoft.com/office/drawing/2014/main" id="{0E164230-D324-45B2-ADF0-112FEFFABE6F}"/>
               </a:ext>
             </a:extLst>
           </p:cNvPr>
@@ -12337,7 +12337,7 @@
           <p:cNvPr id="27" name="text">
             <a:extLst xmlns:a="http://schemas.openxmlformats.org/drawingml/2006/main">
               <a:ext uri="{FF2B5EF4-FFF2-40B4-BE49-F238E27FC236}">
-                <a16:creationId xmlns:a16="http://schemas.microsoft.com/office/drawing/2014/main" id="{890BF277-7C99-4095-909F-9417BFFE8597}"/>
+                <a16:creationId xmlns:a16="http://schemas.microsoft.com/office/drawing/2014/main" id="{C5DD236E-7BDA-4B2B-ACC6-413F186215E4}"/>
               </a:ext>
             </a:extLst>
           </p:cNvPr>
@@ -12405,7 +12405,7 @@
           <p:cNvPr id="28" name="text">
             <a:extLst xmlns:a="http://schemas.openxmlformats.org/drawingml/2006/main">
               <a:ext uri="{FF2B5EF4-FFF2-40B4-BE49-F238E27FC236}">
-                <a16:creationId xmlns:a16="http://schemas.microsoft.com/office/drawing/2014/main" id="{07236D48-F0B9-4155-8CC5-BD1400CF22F3}"/>
+                <a16:creationId xmlns:a16="http://schemas.microsoft.com/office/drawing/2014/main" id="{8B01B6B2-A2A0-485C-B0C4-89975A3A631B}"/>
               </a:ext>
             </a:extLst>
           </p:cNvPr>
@@ -12473,7 +12473,7 @@
           <p:cNvPr id="29" name="surface">
             <a:extLst xmlns:a="http://schemas.openxmlformats.org/drawingml/2006/main">
               <a:ext uri="{FF2B5EF4-FFF2-40B4-BE49-F238E27FC236}">
-                <a16:creationId xmlns:a16="http://schemas.microsoft.com/office/drawing/2014/main" id="{E0A46C1F-5E93-431B-B2FD-5992CF335D1D}"/>
+                <a16:creationId xmlns:a16="http://schemas.microsoft.com/office/drawing/2014/main" id="{209A6FE4-98B3-4007-A169-65AD78CCEDAC}"/>
               </a:ext>
             </a:extLst>
           </p:cNvPr>
@@ -12508,7 +12508,7 @@
           <p:cNvPr id="30" name="text">
             <a:extLst xmlns:a="http://schemas.openxmlformats.org/drawingml/2006/main">
               <a:ext uri="{FF2B5EF4-FFF2-40B4-BE49-F238E27FC236}">
-                <a16:creationId xmlns:a16="http://schemas.microsoft.com/office/drawing/2014/main" id="{6434AD9A-1D48-47E5-B650-34CA904379FE}"/>
+                <a16:creationId xmlns:a16="http://schemas.microsoft.com/office/drawing/2014/main" id="{7B0A7AEF-967B-4F81-A7B7-26B2042566F3}"/>
               </a:ext>
             </a:extLst>
           </p:cNvPr>
@@ -12576,7 +12576,7 @@
           <p:cNvPr id="31" name="text">
             <a:extLst xmlns:a="http://schemas.openxmlformats.org/drawingml/2006/main">
               <a:ext uri="{FF2B5EF4-FFF2-40B4-BE49-F238E27FC236}">
-                <a16:creationId xmlns:a16="http://schemas.microsoft.com/office/drawing/2014/main" id="{DC1F2439-CFB8-4C3A-9E8F-1DBD50CD87E3}"/>
+                <a16:creationId xmlns:a16="http://schemas.microsoft.com/office/drawing/2014/main" id="{A9A20D71-57AA-41BB-BD3E-7ABD977A802A}"/>
               </a:ext>
             </a:extLst>
           </p:cNvPr>
@@ -12644,7 +12644,7 @@
           <p:cNvPr id="32" name="surface">
             <a:extLst xmlns:a="http://schemas.openxmlformats.org/drawingml/2006/main">
               <a:ext uri="{FF2B5EF4-FFF2-40B4-BE49-F238E27FC236}">
-                <a16:creationId xmlns:a16="http://schemas.microsoft.com/office/drawing/2014/main" id="{740907A2-CF64-4202-9678-D67F04198A68}"/>
+                <a16:creationId xmlns:a16="http://schemas.microsoft.com/office/drawing/2014/main" id="{8A1FDBD3-8B72-45E2-AAF6-94646244E7D1}"/>
               </a:ext>
             </a:extLst>
           </p:cNvPr>
@@ -12679,7 +12679,7 @@
           <p:cNvPr id="33" name="text">
             <a:extLst xmlns:a="http://schemas.openxmlformats.org/drawingml/2006/main">
               <a:ext uri="{FF2B5EF4-FFF2-40B4-BE49-F238E27FC236}">
-                <a16:creationId xmlns:a16="http://schemas.microsoft.com/office/drawing/2014/main" id="{362D3666-9938-4892-896D-CB106692CFA8}"/>
+                <a16:creationId xmlns:a16="http://schemas.microsoft.com/office/drawing/2014/main" id="{29648DFA-7F67-439F-A745-D2849B319BAD}"/>
               </a:ext>
             </a:extLst>
           </p:cNvPr>
@@ -12747,7 +12747,7 @@
           <p:cNvPr id="34" name="text">
             <a:extLst xmlns:a="http://schemas.openxmlformats.org/drawingml/2006/main">
               <a:ext uri="{FF2B5EF4-FFF2-40B4-BE49-F238E27FC236}">
-                <a16:creationId xmlns:a16="http://schemas.microsoft.com/office/drawing/2014/main" id="{584AA445-A0CC-4263-8DB3-3B96C9D44735}"/>
+                <a16:creationId xmlns:a16="http://schemas.microsoft.com/office/drawing/2014/main" id="{2E96A00F-4E9E-4481-912D-F1B78B0D726A}"/>
               </a:ext>
             </a:extLst>
           </p:cNvPr>
@@ -12813,7 +12813,7 @@
     </p:spTree>
     <p:extLst>
       <p:ext uri="{BB962C8B-B14F-4D97-AF65-F5344CB8AC3E}">
-        <p14:creationId xmlns:p14="http://schemas.microsoft.com/office/powerpoint/2010/main" val="207627167"/>
+        <p14:creationId xmlns:p14="http://schemas.microsoft.com/office/powerpoint/2010/main" val="2030407732"/>
       </p:ext>
     </p:extLst>
   </p:cSld>
@@ -12844,7 +12844,7 @@
           <p:cNvPr id="1" name="top-accent">
             <a:extLst xmlns:a="http://schemas.openxmlformats.org/drawingml/2006/main">
               <a:ext uri="{FF2B5EF4-FFF2-40B4-BE49-F238E27FC236}">
-                <a16:creationId xmlns:a16="http://schemas.microsoft.com/office/drawing/2014/main" id="{B11D8DE6-C0B1-4CE0-8D88-9C514AC02340}"/>
+                <a16:creationId xmlns:a16="http://schemas.microsoft.com/office/drawing/2014/main" id="{7DB26780-5878-4655-B381-0C11DF179030}"/>
               </a:ext>
             </a:extLst>
           </p:cNvPr>
@@ -12879,7 +12879,7 @@
           <p:cNvPr id="2" name="bottom-line">
             <a:extLst xmlns:a="http://schemas.openxmlformats.org/drawingml/2006/main">
               <a:ext uri="{FF2B5EF4-FFF2-40B4-BE49-F238E27FC236}">
-                <a16:creationId xmlns:a16="http://schemas.microsoft.com/office/drawing/2014/main" id="{ADA0DD3C-9ECC-4A21-A8CF-9188157AEB0B}"/>
+                <a16:creationId xmlns:a16="http://schemas.microsoft.com/office/drawing/2014/main" id="{D7F28921-C5FA-4127-89EB-9C5333B09FDF}"/>
               </a:ext>
             </a:extLst>
           </p:cNvPr>
@@ -12914,7 +12914,7 @@
           <p:cNvPr id="3" name="surface">
             <a:extLst xmlns:a="http://schemas.openxmlformats.org/drawingml/2006/main">
               <a:ext uri="{FF2B5EF4-FFF2-40B4-BE49-F238E27FC236}">
-                <a16:creationId xmlns:a16="http://schemas.microsoft.com/office/drawing/2014/main" id="{CD15DB12-07C5-4E18-A08B-2631B237CF07}"/>
+                <a16:creationId xmlns:a16="http://schemas.microsoft.com/office/drawing/2014/main" id="{28EB4001-A6E9-430C-9376-F9F36733D158}"/>
               </a:ext>
             </a:extLst>
           </p:cNvPr>
@@ -12976,7 +12976,7 @@
           <p:cNvPr id="4" name="text">
             <a:extLst xmlns:a="http://schemas.openxmlformats.org/drawingml/2006/main">
               <a:ext uri="{FF2B5EF4-FFF2-40B4-BE49-F238E27FC236}">
-                <a16:creationId xmlns:a16="http://schemas.microsoft.com/office/drawing/2014/main" id="{BA0C4013-6997-4BCB-96AC-361010706D12}"/>
+                <a16:creationId xmlns:a16="http://schemas.microsoft.com/office/drawing/2014/main" id="{A4FB8FCB-ABE3-4201-BA5E-37A1F5234A5B}"/>
               </a:ext>
             </a:extLst>
           </p:cNvPr>
@@ -13044,7 +13044,7 @@
           <p:cNvPr id="5" name="text">
             <a:extLst xmlns:a="http://schemas.openxmlformats.org/drawingml/2006/main">
               <a:ext uri="{FF2B5EF4-FFF2-40B4-BE49-F238E27FC236}">
-                <a16:creationId xmlns:a16="http://schemas.microsoft.com/office/drawing/2014/main" id="{54DDE2F3-8393-4931-91E2-84FFA0D96B6F}"/>
+                <a16:creationId xmlns:a16="http://schemas.microsoft.com/office/drawing/2014/main" id="{7684AB09-3650-416E-A2B7-8E14E15F4F9B}"/>
               </a:ext>
             </a:extLst>
           </p:cNvPr>
@@ -13112,7 +13112,7 @@
           <p:cNvPr id="6" name="text">
             <a:extLst xmlns:a="http://schemas.openxmlformats.org/drawingml/2006/main">
               <a:ext uri="{FF2B5EF4-FFF2-40B4-BE49-F238E27FC236}">
-                <a16:creationId xmlns:a16="http://schemas.microsoft.com/office/drawing/2014/main" id="{8CA4CFBD-3868-44C0-9C9B-E8F543163E03}"/>
+                <a16:creationId xmlns:a16="http://schemas.microsoft.com/office/drawing/2014/main" id="{873AB3F6-9C3D-44BE-877F-15CD0C57659D}"/>
               </a:ext>
             </a:extLst>
           </p:cNvPr>
@@ -13180,7 +13180,7 @@
           <p:cNvPr id="7" name="surface">
             <a:extLst xmlns:a="http://schemas.openxmlformats.org/drawingml/2006/main">
               <a:ext uri="{FF2B5EF4-FFF2-40B4-BE49-F238E27FC236}">
-                <a16:creationId xmlns:a16="http://schemas.microsoft.com/office/drawing/2014/main" id="{1CD8FFE8-636C-46E3-87DA-C06FD06F2668}"/>
+                <a16:creationId xmlns:a16="http://schemas.microsoft.com/office/drawing/2014/main" id="{6A6A76DA-6F05-4B79-835C-1E7BE2773E28}"/>
               </a:ext>
             </a:extLst>
           </p:cNvPr>
@@ -13215,7 +13215,7 @@
           <p:cNvPr id="8" name="surface">
             <a:extLst xmlns:a="http://schemas.openxmlformats.org/drawingml/2006/main">
               <a:ext uri="{FF2B5EF4-FFF2-40B4-BE49-F238E27FC236}">
-                <a16:creationId xmlns:a16="http://schemas.microsoft.com/office/drawing/2014/main" id="{BC3D4C92-C139-4545-9785-77547DFF487B}"/>
+                <a16:creationId xmlns:a16="http://schemas.microsoft.com/office/drawing/2014/main" id="{B8082793-30D3-48AF-B59E-FA18A6ACDACF}"/>
               </a:ext>
             </a:extLst>
           </p:cNvPr>
@@ -13252,7 +13252,7 @@
           <p:cNvPr id="9" name="text">
             <a:extLst xmlns:a="http://schemas.openxmlformats.org/drawingml/2006/main">
               <a:ext uri="{FF2B5EF4-FFF2-40B4-BE49-F238E27FC236}">
-                <a16:creationId xmlns:a16="http://schemas.microsoft.com/office/drawing/2014/main" id="{6ACADC1F-FDCA-4938-9505-AB04195360DD}"/>
+                <a16:creationId xmlns:a16="http://schemas.microsoft.com/office/drawing/2014/main" id="{FCDE5D36-B87B-4CF0-86CF-30DCAA481B71}"/>
               </a:ext>
             </a:extLst>
           </p:cNvPr>
@@ -13320,7 +13320,7 @@
           <p:cNvPr id="10" name="text">
             <a:extLst xmlns:a="http://schemas.openxmlformats.org/drawingml/2006/main">
               <a:ext uri="{FF2B5EF4-FFF2-40B4-BE49-F238E27FC236}">
-                <a16:creationId xmlns:a16="http://schemas.microsoft.com/office/drawing/2014/main" id="{1A876EAC-9071-4061-A62C-46FC07A66C0B}"/>
+                <a16:creationId xmlns:a16="http://schemas.microsoft.com/office/drawing/2014/main" id="{9CE502E7-B943-4345-BFB2-DC0640C495FC}"/>
               </a:ext>
             </a:extLst>
           </p:cNvPr>
@@ -13388,7 +13388,7 @@
           <p:cNvPr id="11" name="surface">
             <a:extLst xmlns:a="http://schemas.openxmlformats.org/drawingml/2006/main">
               <a:ext uri="{FF2B5EF4-FFF2-40B4-BE49-F238E27FC236}">
-                <a16:creationId xmlns:a16="http://schemas.microsoft.com/office/drawing/2014/main" id="{A2B07C0D-C954-4EBF-BA33-FFFF690C11DB}"/>
+                <a16:creationId xmlns:a16="http://schemas.microsoft.com/office/drawing/2014/main" id="{1F221C36-404A-4E6D-B456-6CAA5BC551D8}"/>
               </a:ext>
             </a:extLst>
           </p:cNvPr>
@@ -13423,7 +13423,7 @@
           <p:cNvPr id="12" name="surface">
             <a:extLst xmlns:a="http://schemas.openxmlformats.org/drawingml/2006/main">
               <a:ext uri="{FF2B5EF4-FFF2-40B4-BE49-F238E27FC236}">
-                <a16:creationId xmlns:a16="http://schemas.microsoft.com/office/drawing/2014/main" id="{786A3003-33A5-4620-A93F-FB931D92BFCC}"/>
+                <a16:creationId xmlns:a16="http://schemas.microsoft.com/office/drawing/2014/main" id="{C4A5C7C2-DA2F-49F0-9565-3E9859860BB6}"/>
               </a:ext>
             </a:extLst>
           </p:cNvPr>
@@ -13460,7 +13460,7 @@
           <p:cNvPr id="13" name="text">
             <a:extLst xmlns:a="http://schemas.openxmlformats.org/drawingml/2006/main">
               <a:ext uri="{FF2B5EF4-FFF2-40B4-BE49-F238E27FC236}">
-                <a16:creationId xmlns:a16="http://schemas.microsoft.com/office/drawing/2014/main" id="{0FA327A3-6DE1-4CB3-BC7D-D8DF1EAF1DD5}"/>
+                <a16:creationId xmlns:a16="http://schemas.microsoft.com/office/drawing/2014/main" id="{C3ECB6B3-FFE7-4DF1-9C4C-41DD6C2B218A}"/>
               </a:ext>
             </a:extLst>
           </p:cNvPr>
@@ -13528,7 +13528,7 @@
           <p:cNvPr id="14" name="text">
             <a:extLst xmlns:a="http://schemas.openxmlformats.org/drawingml/2006/main">
               <a:ext uri="{FF2B5EF4-FFF2-40B4-BE49-F238E27FC236}">
-                <a16:creationId xmlns:a16="http://schemas.microsoft.com/office/drawing/2014/main" id="{FC5D6FB4-8151-4C06-81DC-75CCD676C460}"/>
+                <a16:creationId xmlns:a16="http://schemas.microsoft.com/office/drawing/2014/main" id="{0F08AECB-2F32-4009-AFC1-242FFBB293CF}"/>
               </a:ext>
             </a:extLst>
           </p:cNvPr>
@@ -13596,7 +13596,7 @@
           <p:cNvPr id="15" name="surface">
             <a:extLst xmlns:a="http://schemas.openxmlformats.org/drawingml/2006/main">
               <a:ext uri="{FF2B5EF4-FFF2-40B4-BE49-F238E27FC236}">
-                <a16:creationId xmlns:a16="http://schemas.microsoft.com/office/drawing/2014/main" id="{4E2665B0-69F7-4177-96D5-FADD0A10A51B}"/>
+                <a16:creationId xmlns:a16="http://schemas.microsoft.com/office/drawing/2014/main" id="{4DF80DEF-8250-4EFE-A204-A9E7C85AAF8F}"/>
               </a:ext>
             </a:extLst>
           </p:cNvPr>
@@ -13631,7 +13631,7 @@
           <p:cNvPr id="16" name="surface">
             <a:extLst xmlns:a="http://schemas.openxmlformats.org/drawingml/2006/main">
               <a:ext uri="{FF2B5EF4-FFF2-40B4-BE49-F238E27FC236}">
-                <a16:creationId xmlns:a16="http://schemas.microsoft.com/office/drawing/2014/main" id="{D4F302C8-D5CF-4383-BB0C-AE65AD4F3DFB}"/>
+                <a16:creationId xmlns:a16="http://schemas.microsoft.com/office/drawing/2014/main" id="{09FF5A03-F68A-4655-8169-D1D98A7D7630}"/>
               </a:ext>
             </a:extLst>
           </p:cNvPr>
@@ -13668,7 +13668,7 @@
           <p:cNvPr id="17" name="text">
             <a:extLst xmlns:a="http://schemas.openxmlformats.org/drawingml/2006/main">
               <a:ext uri="{FF2B5EF4-FFF2-40B4-BE49-F238E27FC236}">
-                <a16:creationId xmlns:a16="http://schemas.microsoft.com/office/drawing/2014/main" id="{ACADD906-0133-4451-9A8F-BCB18553251F}"/>
+                <a16:creationId xmlns:a16="http://schemas.microsoft.com/office/drawing/2014/main" id="{C2B719C1-5FFD-406B-8CB6-B09345299005}"/>
               </a:ext>
             </a:extLst>
           </p:cNvPr>
@@ -13736,7 +13736,7 @@
           <p:cNvPr id="18" name="text">
             <a:extLst xmlns:a="http://schemas.openxmlformats.org/drawingml/2006/main">
               <a:ext uri="{FF2B5EF4-FFF2-40B4-BE49-F238E27FC236}">
-                <a16:creationId xmlns:a16="http://schemas.microsoft.com/office/drawing/2014/main" id="{B9E3CD84-223F-420D-BBA4-9C1101E90991}"/>
+                <a16:creationId xmlns:a16="http://schemas.microsoft.com/office/drawing/2014/main" id="{21ED6930-25A1-4E1A-8A3E-F6190E7927C0}"/>
               </a:ext>
             </a:extLst>
           </p:cNvPr>
@@ -13804,7 +13804,7 @@
           <p:cNvPr id="19" name="surface">
             <a:extLst xmlns:a="http://schemas.openxmlformats.org/drawingml/2006/main">
               <a:ext uri="{FF2B5EF4-FFF2-40B4-BE49-F238E27FC236}">
-                <a16:creationId xmlns:a16="http://schemas.microsoft.com/office/drawing/2014/main" id="{3B27F2EF-F05C-4C0A-BBCB-BEDC54930A07}"/>
+                <a16:creationId xmlns:a16="http://schemas.microsoft.com/office/drawing/2014/main" id="{A8703435-2044-4963-AB4E-604014D0D2EE}"/>
               </a:ext>
             </a:extLst>
           </p:cNvPr>
@@ -13839,7 +13839,7 @@
           <p:cNvPr id="20" name="surface">
             <a:extLst xmlns:a="http://schemas.openxmlformats.org/drawingml/2006/main">
               <a:ext uri="{FF2B5EF4-FFF2-40B4-BE49-F238E27FC236}">
-                <a16:creationId xmlns:a16="http://schemas.microsoft.com/office/drawing/2014/main" id="{20D7A5C5-4120-4765-A035-BA180E5BABB0}"/>
+                <a16:creationId xmlns:a16="http://schemas.microsoft.com/office/drawing/2014/main" id="{230943DF-3B1B-4484-8B8F-3D04E5CAB119}"/>
               </a:ext>
             </a:extLst>
           </p:cNvPr>
@@ -13876,7 +13876,7 @@
           <p:cNvPr id="21" name="text">
             <a:extLst xmlns:a="http://schemas.openxmlformats.org/drawingml/2006/main">
               <a:ext uri="{FF2B5EF4-FFF2-40B4-BE49-F238E27FC236}">
-                <a16:creationId xmlns:a16="http://schemas.microsoft.com/office/drawing/2014/main" id="{584B804D-AAC4-4A88-AF2D-D910A9E3CF20}"/>
+                <a16:creationId xmlns:a16="http://schemas.microsoft.com/office/drawing/2014/main" id="{61A9B0AB-F7E5-41E5-B976-3110A6FEF557}"/>
               </a:ext>
             </a:extLst>
           </p:cNvPr>
@@ -13944,7 +13944,7 @@
           <p:cNvPr id="22" name="text">
             <a:extLst xmlns:a="http://schemas.openxmlformats.org/drawingml/2006/main">
               <a:ext uri="{FF2B5EF4-FFF2-40B4-BE49-F238E27FC236}">
-                <a16:creationId xmlns:a16="http://schemas.microsoft.com/office/drawing/2014/main" id="{129598B9-1E73-42DA-B11E-1325009B85B9}"/>
+                <a16:creationId xmlns:a16="http://schemas.microsoft.com/office/drawing/2014/main" id="{484604A9-6B61-455F-AD9E-164C5FF1D007}"/>
               </a:ext>
             </a:extLst>
           </p:cNvPr>
@@ -14012,7 +14012,7 @@
           <p:cNvPr id="23" name="surface">
             <a:extLst xmlns:a="http://schemas.openxmlformats.org/drawingml/2006/main">
               <a:ext uri="{FF2B5EF4-FFF2-40B4-BE49-F238E27FC236}">
-                <a16:creationId xmlns:a16="http://schemas.microsoft.com/office/drawing/2014/main" id="{FA101886-3FD5-4352-8051-93BC61C9B401}"/>
+                <a16:creationId xmlns:a16="http://schemas.microsoft.com/office/drawing/2014/main" id="{8F0B05D9-9CD5-4034-A603-7ED4EAA25124}"/>
               </a:ext>
             </a:extLst>
           </p:cNvPr>
@@ -14047,7 +14047,7 @@
           <p:cNvPr id="24" name="text">
             <a:extLst xmlns:a="http://schemas.openxmlformats.org/drawingml/2006/main">
               <a:ext uri="{FF2B5EF4-FFF2-40B4-BE49-F238E27FC236}">
-                <a16:creationId xmlns:a16="http://schemas.microsoft.com/office/drawing/2014/main" id="{84956DFE-7BE4-4321-A8FB-A3A6BEE55B46}"/>
+                <a16:creationId xmlns:a16="http://schemas.microsoft.com/office/drawing/2014/main" id="{2B42CED4-3513-47CA-AD6B-C19703537E84}"/>
               </a:ext>
             </a:extLst>
           </p:cNvPr>
@@ -14115,7 +14115,7 @@
           <p:cNvPr id="25" name="text">
             <a:extLst xmlns:a="http://schemas.openxmlformats.org/drawingml/2006/main">
               <a:ext uri="{FF2B5EF4-FFF2-40B4-BE49-F238E27FC236}">
-                <a16:creationId xmlns:a16="http://schemas.microsoft.com/office/drawing/2014/main" id="{E6586FE8-BDE3-4288-9F39-642A69A2BFAB}"/>
+                <a16:creationId xmlns:a16="http://schemas.microsoft.com/office/drawing/2014/main" id="{84043664-2BCD-46A3-A5B8-D87CEC25059A}"/>
               </a:ext>
             </a:extLst>
           </p:cNvPr>
@@ -14183,7 +14183,7 @@
           <p:cNvPr id="26" name="surface">
             <a:extLst xmlns:a="http://schemas.openxmlformats.org/drawingml/2006/main">
               <a:ext uri="{FF2B5EF4-FFF2-40B4-BE49-F238E27FC236}">
-                <a16:creationId xmlns:a16="http://schemas.microsoft.com/office/drawing/2014/main" id="{DFD17B33-AAC2-4BB7-A5D7-3E508C9C642A}"/>
+                <a16:creationId xmlns:a16="http://schemas.microsoft.com/office/drawing/2014/main" id="{211B5E33-B942-4194-8AF8-0CAC23212C4D}"/>
               </a:ext>
             </a:extLst>
           </p:cNvPr>
@@ -14218,7 +14218,7 @@
           <p:cNvPr id="27" name="text">
             <a:extLst xmlns:a="http://schemas.openxmlformats.org/drawingml/2006/main">
               <a:ext uri="{FF2B5EF4-FFF2-40B4-BE49-F238E27FC236}">
-                <a16:creationId xmlns:a16="http://schemas.microsoft.com/office/drawing/2014/main" id="{BD5EF350-B440-4372-B015-4675F1A2CD3D}"/>
+                <a16:creationId xmlns:a16="http://schemas.microsoft.com/office/drawing/2014/main" id="{6204D1F8-9089-4F05-8F4C-9EEAD624CD51}"/>
               </a:ext>
             </a:extLst>
           </p:cNvPr>
@@ -14286,7 +14286,7 @@
           <p:cNvPr id="28" name="text">
             <a:extLst xmlns:a="http://schemas.openxmlformats.org/drawingml/2006/main">
               <a:ext uri="{FF2B5EF4-FFF2-40B4-BE49-F238E27FC236}">
-                <a16:creationId xmlns:a16="http://schemas.microsoft.com/office/drawing/2014/main" id="{8B98F0DB-B954-4FFE-AFE4-70030ACAAE3B}"/>
+                <a16:creationId xmlns:a16="http://schemas.microsoft.com/office/drawing/2014/main" id="{86A97DAF-A54B-4719-8438-03B2EA006168}"/>
               </a:ext>
             </a:extLst>
           </p:cNvPr>
@@ -14354,7 +14354,7 @@
           <p:cNvPr id="29" name="surface">
             <a:extLst xmlns:a="http://schemas.openxmlformats.org/drawingml/2006/main">
               <a:ext uri="{FF2B5EF4-FFF2-40B4-BE49-F238E27FC236}">
-                <a16:creationId xmlns:a16="http://schemas.microsoft.com/office/drawing/2014/main" id="{13FE557C-F35D-4EE9-A87A-50A9C2E4E2B2}"/>
+                <a16:creationId xmlns:a16="http://schemas.microsoft.com/office/drawing/2014/main" id="{C97496BD-4FA6-4EF9-9EA4-BF2DF02926E2}"/>
               </a:ext>
             </a:extLst>
           </p:cNvPr>
@@ -14389,7 +14389,7 @@
           <p:cNvPr id="30" name="text">
             <a:extLst xmlns:a="http://schemas.openxmlformats.org/drawingml/2006/main">
               <a:ext uri="{FF2B5EF4-FFF2-40B4-BE49-F238E27FC236}">
-                <a16:creationId xmlns:a16="http://schemas.microsoft.com/office/drawing/2014/main" id="{6B161CA4-7C16-4378-BF44-AEDB483784C2}"/>
+                <a16:creationId xmlns:a16="http://schemas.microsoft.com/office/drawing/2014/main" id="{5EB23F70-F7F1-42CC-91E0-12ECAC0428E5}"/>
               </a:ext>
             </a:extLst>
           </p:cNvPr>
@@ -14457,7 +14457,7 @@
           <p:cNvPr id="31" name="text">
             <a:extLst xmlns:a="http://schemas.openxmlformats.org/drawingml/2006/main">
               <a:ext uri="{FF2B5EF4-FFF2-40B4-BE49-F238E27FC236}">
-                <a16:creationId xmlns:a16="http://schemas.microsoft.com/office/drawing/2014/main" id="{50E8C50C-7528-4CDE-8C53-8E90E27BFA9F}"/>
+                <a16:creationId xmlns:a16="http://schemas.microsoft.com/office/drawing/2014/main" id="{27DF724D-63A5-4525-9194-4C2C2D6E4FE4}"/>
               </a:ext>
             </a:extLst>
           </p:cNvPr>
@@ -14525,7 +14525,7 @@
           <p:cNvPr id="32" name="surface">
             <a:extLst xmlns:a="http://schemas.openxmlformats.org/drawingml/2006/main">
               <a:ext uri="{FF2B5EF4-FFF2-40B4-BE49-F238E27FC236}">
-                <a16:creationId xmlns:a16="http://schemas.microsoft.com/office/drawing/2014/main" id="{A723B907-8DF7-459D-87F0-48E19C861A3E}"/>
+                <a16:creationId xmlns:a16="http://schemas.microsoft.com/office/drawing/2014/main" id="{FF0F9008-7822-4F58-8191-79A4EACF3C51}"/>
               </a:ext>
             </a:extLst>
           </p:cNvPr>
@@ -14560,7 +14560,7 @@
           <p:cNvPr id="33" name="text">
             <a:extLst xmlns:a="http://schemas.openxmlformats.org/drawingml/2006/main">
               <a:ext uri="{FF2B5EF4-FFF2-40B4-BE49-F238E27FC236}">
-                <a16:creationId xmlns:a16="http://schemas.microsoft.com/office/drawing/2014/main" id="{A1E3E619-534C-482C-9B02-FEC67A753CF5}"/>
+                <a16:creationId xmlns:a16="http://schemas.microsoft.com/office/drawing/2014/main" id="{BF159E43-3BF3-40F6-BF83-C0E8E35222A1}"/>
               </a:ext>
             </a:extLst>
           </p:cNvPr>
@@ -14628,7 +14628,7 @@
           <p:cNvPr id="34" name="text">
             <a:extLst xmlns:a="http://schemas.openxmlformats.org/drawingml/2006/main">
               <a:ext uri="{FF2B5EF4-FFF2-40B4-BE49-F238E27FC236}">
-                <a16:creationId xmlns:a16="http://schemas.microsoft.com/office/drawing/2014/main" id="{48568578-BB9A-4A10-A70C-AE5116FE6C4F}"/>
+                <a16:creationId xmlns:a16="http://schemas.microsoft.com/office/drawing/2014/main" id="{B89C4499-9C4D-45F7-8D30-96B812E35FB3}"/>
               </a:ext>
             </a:extLst>
           </p:cNvPr>
@@ -14694,7 +14694,7 @@
     </p:spTree>
     <p:extLst>
       <p:ext uri="{BB962C8B-B14F-4D97-AF65-F5344CB8AC3E}">
-        <p14:creationId xmlns:p14="http://schemas.microsoft.com/office/powerpoint/2010/main" val="943336205"/>
+        <p14:creationId xmlns:p14="http://schemas.microsoft.com/office/powerpoint/2010/main" val="1317743925"/>
       </p:ext>
     </p:extLst>
   </p:cSld>
@@ -14725,7 +14725,7 @@
           <p:cNvPr id="1" name="top-accent">
             <a:extLst xmlns:a="http://schemas.openxmlformats.org/drawingml/2006/main">
               <a:ext uri="{FF2B5EF4-FFF2-40B4-BE49-F238E27FC236}">
-                <a16:creationId xmlns:a16="http://schemas.microsoft.com/office/drawing/2014/main" id="{8E4B3CFC-57A3-48C4-9191-8B7C110E2851}"/>
+                <a16:creationId xmlns:a16="http://schemas.microsoft.com/office/drawing/2014/main" id="{91A8F719-FE9E-4F4B-B81F-5544364E1D7E}"/>
               </a:ext>
             </a:extLst>
           </p:cNvPr>
@@ -14760,7 +14760,7 @@
           <p:cNvPr id="2" name="bottom-line">
             <a:extLst xmlns:a="http://schemas.openxmlformats.org/drawingml/2006/main">
               <a:ext uri="{FF2B5EF4-FFF2-40B4-BE49-F238E27FC236}">
-                <a16:creationId xmlns:a16="http://schemas.microsoft.com/office/drawing/2014/main" id="{BD2DAC3D-C7EC-4FD0-B2D3-7E245AA7001A}"/>
+                <a16:creationId xmlns:a16="http://schemas.microsoft.com/office/drawing/2014/main" id="{12DED714-2449-4092-B7FB-0F3E896CAD2B}"/>
               </a:ext>
             </a:extLst>
           </p:cNvPr>
@@ -14795,7 +14795,7 @@
           <p:cNvPr id="3" name="surface">
             <a:extLst xmlns:a="http://schemas.openxmlformats.org/drawingml/2006/main">
               <a:ext uri="{FF2B5EF4-FFF2-40B4-BE49-F238E27FC236}">
-                <a16:creationId xmlns:a16="http://schemas.microsoft.com/office/drawing/2014/main" id="{D3BD1DFE-D22F-4AAF-B6D4-FA16F3113AD2}"/>
+                <a16:creationId xmlns:a16="http://schemas.microsoft.com/office/drawing/2014/main" id="{1AD0952A-152F-47D8-AE85-60DCD5CFDAAC}"/>
               </a:ext>
             </a:extLst>
           </p:cNvPr>
@@ -14857,7 +14857,7 @@
           <p:cNvPr id="4" name="text">
             <a:extLst xmlns:a="http://schemas.openxmlformats.org/drawingml/2006/main">
               <a:ext uri="{FF2B5EF4-FFF2-40B4-BE49-F238E27FC236}">
-                <a16:creationId xmlns:a16="http://schemas.microsoft.com/office/drawing/2014/main" id="{14F336AE-35D1-4C34-8E6F-FA5E67EE4B8F}"/>
+                <a16:creationId xmlns:a16="http://schemas.microsoft.com/office/drawing/2014/main" id="{56601E69-029D-43E8-81F9-249247FD0580}"/>
               </a:ext>
             </a:extLst>
           </p:cNvPr>
@@ -14925,7 +14925,7 @@
           <p:cNvPr id="5" name="text">
             <a:extLst xmlns:a="http://schemas.openxmlformats.org/drawingml/2006/main">
               <a:ext uri="{FF2B5EF4-FFF2-40B4-BE49-F238E27FC236}">
-                <a16:creationId xmlns:a16="http://schemas.microsoft.com/office/drawing/2014/main" id="{793383A8-A59F-4C1B-A6ED-1F449F8620CB}"/>
+                <a16:creationId xmlns:a16="http://schemas.microsoft.com/office/drawing/2014/main" id="{153D3F27-04A0-4427-BC5E-ADACD34B6048}"/>
               </a:ext>
             </a:extLst>
           </p:cNvPr>
@@ -14993,7 +14993,7 @@
           <p:cNvPr id="6" name="text">
             <a:extLst xmlns:a="http://schemas.openxmlformats.org/drawingml/2006/main">
               <a:ext uri="{FF2B5EF4-FFF2-40B4-BE49-F238E27FC236}">
-                <a16:creationId xmlns:a16="http://schemas.microsoft.com/office/drawing/2014/main" id="{2234C65B-B250-4224-960F-3A78A47E7346}"/>
+                <a16:creationId xmlns:a16="http://schemas.microsoft.com/office/drawing/2014/main" id="{3C3E6DF4-FEEA-4BA0-BEF1-458F97E6CEED}"/>
               </a:ext>
             </a:extLst>
           </p:cNvPr>
@@ -15061,7 +15061,7 @@
           <p:cNvPr id="7" name="surface">
             <a:extLst xmlns:a="http://schemas.openxmlformats.org/drawingml/2006/main">
               <a:ext uri="{FF2B5EF4-FFF2-40B4-BE49-F238E27FC236}">
-                <a16:creationId xmlns:a16="http://schemas.microsoft.com/office/drawing/2014/main" id="{E29B3489-8061-4048-B8D6-4835AD145798}"/>
+                <a16:creationId xmlns:a16="http://schemas.microsoft.com/office/drawing/2014/main" id="{AE5E948A-0E42-49D6-9AE6-6D2F8B1918A7}"/>
               </a:ext>
             </a:extLst>
           </p:cNvPr>
@@ -15100,7 +15100,7 @@
           <p:nvPr/>
         </p:nvPicPr>
         <p:blipFill>
-          <a:blip xmlns:r="http://schemas.openxmlformats.org/officeDocument/2006/relationships" xmlns:a="http://schemas.openxmlformats.org/drawingml/2006/main" r:embed="R4a9c7a0daefd4f0b"/>
+          <a:blip xmlns:r="http://schemas.openxmlformats.org/officeDocument/2006/relationships" xmlns:a="http://schemas.openxmlformats.org/drawingml/2006/main" r:embed="Rcdc865e0e7504206"/>
           <a:srcRect xmlns:a="http://schemas.openxmlformats.org/drawingml/2006/main" l="13643" t="0" r="13643" b="0"/>
           <a:stretch xmlns:a="http://schemas.openxmlformats.org/drawingml/2006/main">
             <a:fillRect l="0" t="0" r="0" b="0"/>
@@ -15127,7 +15127,7 @@
           <p:nvPr/>
         </p:nvPicPr>
         <p:blipFill>
-          <a:blip xmlns:r="http://schemas.openxmlformats.org/officeDocument/2006/relationships" xmlns:a="http://schemas.openxmlformats.org/drawingml/2006/main" r:embed="R5f1d989252504c6f"/>
+          <a:blip xmlns:r="http://schemas.openxmlformats.org/officeDocument/2006/relationships" xmlns:a="http://schemas.openxmlformats.org/drawingml/2006/main" r:embed="Ra96dccaedf1f4972"/>
           <a:srcRect xmlns:a="http://schemas.openxmlformats.org/drawingml/2006/main" l="13643" t="0" r="13643" b="0"/>
           <a:stretch xmlns:a="http://schemas.openxmlformats.org/drawingml/2006/main">
             <a:fillRect l="0" t="0" r="0" b="0"/>
@@ -15150,7 +15150,7 @@
           <p:cNvPr id="10" name="surface">
             <a:extLst xmlns:a="http://schemas.openxmlformats.org/drawingml/2006/main">
               <a:ext uri="{FF2B5EF4-FFF2-40B4-BE49-F238E27FC236}">
-                <a16:creationId xmlns:a16="http://schemas.microsoft.com/office/drawing/2014/main" id="{0DEA5912-59B5-4923-B1B6-B0E78A22753F}"/>
+                <a16:creationId xmlns:a16="http://schemas.microsoft.com/office/drawing/2014/main" id="{9B473378-129B-420B-8D2B-7FA79647827E}"/>
               </a:ext>
             </a:extLst>
           </p:cNvPr>
@@ -15185,7 +15185,7 @@
           <p:cNvPr id="11" name="text">
             <a:extLst xmlns:a="http://schemas.openxmlformats.org/drawingml/2006/main">
               <a:ext uri="{FF2B5EF4-FFF2-40B4-BE49-F238E27FC236}">
-                <a16:creationId xmlns:a16="http://schemas.microsoft.com/office/drawing/2014/main" id="{0E920FF1-7F35-4AF4-9B7C-3CFE325BF980}"/>
+                <a16:creationId xmlns:a16="http://schemas.microsoft.com/office/drawing/2014/main" id="{23A7B297-826A-4CC4-B9C8-136EFD1B980C}"/>
               </a:ext>
             </a:extLst>
           </p:cNvPr>
@@ -15253,7 +15253,7 @@
           <p:cNvPr id="12" name="surface">
             <a:extLst xmlns:a="http://schemas.openxmlformats.org/drawingml/2006/main">
               <a:ext uri="{FF2B5EF4-FFF2-40B4-BE49-F238E27FC236}">
-                <a16:creationId xmlns:a16="http://schemas.microsoft.com/office/drawing/2014/main" id="{0A49D517-06F4-4D1D-8B8E-8552F60B7029}"/>
+                <a16:creationId xmlns:a16="http://schemas.microsoft.com/office/drawing/2014/main" id="{E8E8635F-9568-4A49-9812-9EC4DE0F9192}"/>
               </a:ext>
             </a:extLst>
           </p:cNvPr>
@@ -15319,7 +15319,7 @@
           <p:cNvPr id="13" name="surface">
             <a:extLst xmlns:a="http://schemas.openxmlformats.org/drawingml/2006/main">
               <a:ext uri="{FF2B5EF4-FFF2-40B4-BE49-F238E27FC236}">
-                <a16:creationId xmlns:a16="http://schemas.microsoft.com/office/drawing/2014/main" id="{ECF24129-1250-4452-96FF-EA0D37937C10}"/>
+                <a16:creationId xmlns:a16="http://schemas.microsoft.com/office/drawing/2014/main" id="{E27F03FF-A951-4FC7-B643-5B28BD362194}"/>
               </a:ext>
             </a:extLst>
           </p:cNvPr>
@@ -15385,7 +15385,7 @@
           <p:cNvPr id="14" name="surface">
             <a:extLst xmlns:a="http://schemas.openxmlformats.org/drawingml/2006/main">
               <a:ext uri="{FF2B5EF4-FFF2-40B4-BE49-F238E27FC236}">
-                <a16:creationId xmlns:a16="http://schemas.microsoft.com/office/drawing/2014/main" id="{8440A394-51F8-41D3-A13A-7605E5D367AC}"/>
+                <a16:creationId xmlns:a16="http://schemas.microsoft.com/office/drawing/2014/main" id="{95C373B8-4ECC-4CB5-8AF4-71C46668AF1A}"/>
               </a:ext>
             </a:extLst>
           </p:cNvPr>
@@ -15451,7 +15451,7 @@
           <p:cNvPr id="15" name="surface">
             <a:extLst xmlns:a="http://schemas.openxmlformats.org/drawingml/2006/main">
               <a:ext uri="{FF2B5EF4-FFF2-40B4-BE49-F238E27FC236}">
-                <a16:creationId xmlns:a16="http://schemas.microsoft.com/office/drawing/2014/main" id="{0B83C6E7-5AED-4545-92DF-2E3678F78EB3}"/>
+                <a16:creationId xmlns:a16="http://schemas.microsoft.com/office/drawing/2014/main" id="{049B02C2-5157-41AF-9EA9-13853C766563}"/>
               </a:ext>
             </a:extLst>
           </p:cNvPr>
@@ -15517,7 +15517,7 @@
           <p:cNvPr id="16" name="surface">
             <a:extLst xmlns:a="http://schemas.openxmlformats.org/drawingml/2006/main">
               <a:ext uri="{FF2B5EF4-FFF2-40B4-BE49-F238E27FC236}">
-                <a16:creationId xmlns:a16="http://schemas.microsoft.com/office/drawing/2014/main" id="{B6FCE663-D80C-4761-8380-5560603902F6}"/>
+                <a16:creationId xmlns:a16="http://schemas.microsoft.com/office/drawing/2014/main" id="{E8D4B228-34CB-4BA8-9202-678E1D740613}"/>
               </a:ext>
             </a:extLst>
           </p:cNvPr>
@@ -15552,7 +15552,7 @@
           <p:cNvPr id="17" name="text">
             <a:extLst xmlns:a="http://schemas.openxmlformats.org/drawingml/2006/main">
               <a:ext uri="{FF2B5EF4-FFF2-40B4-BE49-F238E27FC236}">
-                <a16:creationId xmlns:a16="http://schemas.microsoft.com/office/drawing/2014/main" id="{A95794E6-B61E-4134-935F-D26111A7DEB3}"/>
+                <a16:creationId xmlns:a16="http://schemas.microsoft.com/office/drawing/2014/main" id="{5D11A79E-C4DF-4DB3-8B6E-880ACB98B8C6}"/>
               </a:ext>
             </a:extLst>
           </p:cNvPr>
@@ -15620,7 +15620,7 @@
           <p:cNvPr id="18" name="text">
             <a:extLst xmlns:a="http://schemas.openxmlformats.org/drawingml/2006/main">
               <a:ext uri="{FF2B5EF4-FFF2-40B4-BE49-F238E27FC236}">
-                <a16:creationId xmlns:a16="http://schemas.microsoft.com/office/drawing/2014/main" id="{97EC3311-F48E-4A21-ACE5-6BBB5B1B8DFD}"/>
+                <a16:creationId xmlns:a16="http://schemas.microsoft.com/office/drawing/2014/main" id="{77B9B3F2-A948-4823-9BE7-B127A3CB8D24}"/>
               </a:ext>
             </a:extLst>
           </p:cNvPr>
@@ -15686,7 +15686,7 @@
     </p:spTree>
     <p:extLst>
       <p:ext uri="{BB962C8B-B14F-4D97-AF65-F5344CB8AC3E}">
-        <p14:creationId xmlns:p14="http://schemas.microsoft.com/office/powerpoint/2010/main" val="724433964"/>
+        <p14:creationId xmlns:p14="http://schemas.microsoft.com/office/powerpoint/2010/main" val="282815684"/>
       </p:ext>
     </p:extLst>
   </p:cSld>
@@ -15717,7 +15717,7 @@
           <p:cNvPr id="1" name="top-accent">
             <a:extLst xmlns:a="http://schemas.openxmlformats.org/drawingml/2006/main">
               <a:ext uri="{FF2B5EF4-FFF2-40B4-BE49-F238E27FC236}">
-                <a16:creationId xmlns:a16="http://schemas.microsoft.com/office/drawing/2014/main" id="{7FC41B2E-CAB5-4972-BF3A-DC31A3F52A76}"/>
+                <a16:creationId xmlns:a16="http://schemas.microsoft.com/office/drawing/2014/main" id="{13A64260-FABF-4BC5-8D43-C66CBBE99E8C}"/>
               </a:ext>
             </a:extLst>
           </p:cNvPr>
@@ -15752,7 +15752,7 @@
           <p:cNvPr id="2" name="bottom-line">
             <a:extLst xmlns:a="http://schemas.openxmlformats.org/drawingml/2006/main">
               <a:ext uri="{FF2B5EF4-FFF2-40B4-BE49-F238E27FC236}">
-                <a16:creationId xmlns:a16="http://schemas.microsoft.com/office/drawing/2014/main" id="{BB32E97F-142A-4708-B92D-BDF13755E42D}"/>
+                <a16:creationId xmlns:a16="http://schemas.microsoft.com/office/drawing/2014/main" id="{9EFF670E-C236-4233-BA72-E8D1114D6B9E}"/>
               </a:ext>
             </a:extLst>
           </p:cNvPr>
@@ -15787,7 +15787,7 @@
           <p:cNvPr id="3" name="surface">
             <a:extLst xmlns:a="http://schemas.openxmlformats.org/drawingml/2006/main">
               <a:ext uri="{FF2B5EF4-FFF2-40B4-BE49-F238E27FC236}">
-                <a16:creationId xmlns:a16="http://schemas.microsoft.com/office/drawing/2014/main" id="{6CC5A943-5472-4642-A1F1-1B76098A4801}"/>
+                <a16:creationId xmlns:a16="http://schemas.microsoft.com/office/drawing/2014/main" id="{1224F069-1BA1-4CA6-A728-6E540D0A78AF}"/>
               </a:ext>
             </a:extLst>
           </p:cNvPr>
@@ -15849,7 +15849,7 @@
           <p:cNvPr id="4" name="text">
             <a:extLst xmlns:a="http://schemas.openxmlformats.org/drawingml/2006/main">
               <a:ext uri="{FF2B5EF4-FFF2-40B4-BE49-F238E27FC236}">
-                <a16:creationId xmlns:a16="http://schemas.microsoft.com/office/drawing/2014/main" id="{FAD49F68-C910-49D2-9BB0-F6094189D799}"/>
+                <a16:creationId xmlns:a16="http://schemas.microsoft.com/office/drawing/2014/main" id="{77A5132B-506B-4A2F-8CAD-9DA750187FC6}"/>
               </a:ext>
             </a:extLst>
           </p:cNvPr>
@@ -15917,7 +15917,7 @@
           <p:cNvPr id="5" name="text">
             <a:extLst xmlns:a="http://schemas.openxmlformats.org/drawingml/2006/main">
               <a:ext uri="{FF2B5EF4-FFF2-40B4-BE49-F238E27FC236}">
-                <a16:creationId xmlns:a16="http://schemas.microsoft.com/office/drawing/2014/main" id="{BECD4B90-CBDE-4084-A546-8CE96FDA3E54}"/>
+                <a16:creationId xmlns:a16="http://schemas.microsoft.com/office/drawing/2014/main" id="{1406A8C3-C2E3-4FB8-B33B-ABD278B229A7}"/>
               </a:ext>
             </a:extLst>
           </p:cNvPr>
@@ -15985,7 +15985,7 @@
           <p:cNvPr id="6" name="text">
             <a:extLst xmlns:a="http://schemas.openxmlformats.org/drawingml/2006/main">
               <a:ext uri="{FF2B5EF4-FFF2-40B4-BE49-F238E27FC236}">
-                <a16:creationId xmlns:a16="http://schemas.microsoft.com/office/drawing/2014/main" id="{D9C51C42-1EA8-414E-9FE6-E2BBCDC021A4}"/>
+                <a16:creationId xmlns:a16="http://schemas.microsoft.com/office/drawing/2014/main" id="{BAEC1AAE-6B60-4E57-974F-6AB85D32445C}"/>
               </a:ext>
             </a:extLst>
           </p:cNvPr>
@@ -16053,7 +16053,7 @@
           <p:cNvPr id="7" name="surface">
             <a:extLst xmlns:a="http://schemas.openxmlformats.org/drawingml/2006/main">
               <a:ext uri="{FF2B5EF4-FFF2-40B4-BE49-F238E27FC236}">
-                <a16:creationId xmlns:a16="http://schemas.microsoft.com/office/drawing/2014/main" id="{FE7D3543-01D5-4240-86B2-7E40F0AE35CA}"/>
+                <a16:creationId xmlns:a16="http://schemas.microsoft.com/office/drawing/2014/main" id="{27006887-6E40-4B1C-AFB8-6F7BFA8AF2C8}"/>
               </a:ext>
             </a:extLst>
           </p:cNvPr>
@@ -16088,7 +16088,7 @@
           <p:cNvPr id="8" name="surface">
             <a:extLst xmlns:a="http://schemas.openxmlformats.org/drawingml/2006/main">
               <a:ext uri="{FF2B5EF4-FFF2-40B4-BE49-F238E27FC236}">
-                <a16:creationId xmlns:a16="http://schemas.microsoft.com/office/drawing/2014/main" id="{9DE60AB3-A223-4414-B1C8-9E91DBFE4256}"/>
+                <a16:creationId xmlns:a16="http://schemas.microsoft.com/office/drawing/2014/main" id="{E6185D13-47E4-4E7C-A8A8-42D147E98AE8}"/>
               </a:ext>
             </a:extLst>
           </p:cNvPr>
@@ -16125,7 +16125,7 @@
           <p:cNvPr id="9" name="text">
             <a:extLst xmlns:a="http://schemas.openxmlformats.org/drawingml/2006/main">
               <a:ext uri="{FF2B5EF4-FFF2-40B4-BE49-F238E27FC236}">
-                <a16:creationId xmlns:a16="http://schemas.microsoft.com/office/drawing/2014/main" id="{AF11BC8B-946A-4C81-A13C-4624CC4F6AF8}"/>
+                <a16:creationId xmlns:a16="http://schemas.microsoft.com/office/drawing/2014/main" id="{5B1D4F3E-3F34-43F4-8ED7-0890D8FFB391}"/>
               </a:ext>
             </a:extLst>
           </p:cNvPr>
@@ -16193,7 +16193,7 @@
           <p:cNvPr id="10" name="text">
             <a:extLst xmlns:a="http://schemas.openxmlformats.org/drawingml/2006/main">
               <a:ext uri="{FF2B5EF4-FFF2-40B4-BE49-F238E27FC236}">
-                <a16:creationId xmlns:a16="http://schemas.microsoft.com/office/drawing/2014/main" id="{2CC9419D-DC1C-40F5-8C24-BAC39DE58145}"/>
+                <a16:creationId xmlns:a16="http://schemas.microsoft.com/office/drawing/2014/main" id="{01C077F2-41D1-4BBC-AF0B-378F9C32AE1D}"/>
               </a:ext>
             </a:extLst>
           </p:cNvPr>
@@ -16261,7 +16261,7 @@
           <p:cNvPr id="11" name="surface">
             <a:extLst xmlns:a="http://schemas.openxmlformats.org/drawingml/2006/main">
               <a:ext uri="{FF2B5EF4-FFF2-40B4-BE49-F238E27FC236}">
-                <a16:creationId xmlns:a16="http://schemas.microsoft.com/office/drawing/2014/main" id="{4B6B67DD-A11E-4F59-951C-C162001B8409}"/>
+                <a16:creationId xmlns:a16="http://schemas.microsoft.com/office/drawing/2014/main" id="{1264C4C8-530A-49E8-B988-2842EC4E5F89}"/>
               </a:ext>
             </a:extLst>
           </p:cNvPr>
@@ -16296,7 +16296,7 @@
           <p:cNvPr id="12" name="surface">
             <a:extLst xmlns:a="http://schemas.openxmlformats.org/drawingml/2006/main">
               <a:ext uri="{FF2B5EF4-FFF2-40B4-BE49-F238E27FC236}">
-                <a16:creationId xmlns:a16="http://schemas.microsoft.com/office/drawing/2014/main" id="{0A3EA2C9-9EB9-4889-A5D8-4539D5B38B0C}"/>
+                <a16:creationId xmlns:a16="http://schemas.microsoft.com/office/drawing/2014/main" id="{D77C15D1-73D4-4D2A-A8C7-49E0DED028B4}"/>
               </a:ext>
             </a:extLst>
           </p:cNvPr>
@@ -16333,7 +16333,7 @@
           <p:cNvPr id="13" name="text">
             <a:extLst xmlns:a="http://schemas.openxmlformats.org/drawingml/2006/main">
               <a:ext uri="{FF2B5EF4-FFF2-40B4-BE49-F238E27FC236}">
-                <a16:creationId xmlns:a16="http://schemas.microsoft.com/office/drawing/2014/main" id="{6CDA1E7C-99BD-4CF5-94C8-F43623F920B0}"/>
+                <a16:creationId xmlns:a16="http://schemas.microsoft.com/office/drawing/2014/main" id="{F6D9A51D-3F33-476C-AEF3-9A5B29E9A739}"/>
               </a:ext>
             </a:extLst>
           </p:cNvPr>
@@ -16401,7 +16401,7 @@
           <p:cNvPr id="14" name="text">
             <a:extLst xmlns:a="http://schemas.openxmlformats.org/drawingml/2006/main">
               <a:ext uri="{FF2B5EF4-FFF2-40B4-BE49-F238E27FC236}">
-                <a16:creationId xmlns:a16="http://schemas.microsoft.com/office/drawing/2014/main" id="{040B5326-B1A5-43C1-AEC1-55E801DBAA34}"/>
+                <a16:creationId xmlns:a16="http://schemas.microsoft.com/office/drawing/2014/main" id="{205EBE61-6C52-4C01-B766-2EC7CB79329F}"/>
               </a:ext>
             </a:extLst>
           </p:cNvPr>
@@ -16469,7 +16469,7 @@
           <p:cNvPr id="15" name="surface">
             <a:extLst xmlns:a="http://schemas.openxmlformats.org/drawingml/2006/main">
               <a:ext uri="{FF2B5EF4-FFF2-40B4-BE49-F238E27FC236}">
-                <a16:creationId xmlns:a16="http://schemas.microsoft.com/office/drawing/2014/main" id="{C7DA31E3-CC7B-48C8-8554-FAAA9FB9B7A0}"/>
+                <a16:creationId xmlns:a16="http://schemas.microsoft.com/office/drawing/2014/main" id="{29EDA18F-1198-445F-A72C-6E2C4BE891AA}"/>
               </a:ext>
             </a:extLst>
           </p:cNvPr>
@@ -16504,7 +16504,7 @@
           <p:cNvPr id="16" name="surface">
             <a:extLst xmlns:a="http://schemas.openxmlformats.org/drawingml/2006/main">
               <a:ext uri="{FF2B5EF4-FFF2-40B4-BE49-F238E27FC236}">
-                <a16:creationId xmlns:a16="http://schemas.microsoft.com/office/drawing/2014/main" id="{F5236A95-C12C-478A-85AF-F076163B9E09}"/>
+                <a16:creationId xmlns:a16="http://schemas.microsoft.com/office/drawing/2014/main" id="{66AA9C39-0177-4AF3-B576-3B9CC809967C}"/>
               </a:ext>
             </a:extLst>
           </p:cNvPr>
@@ -16541,7 +16541,7 @@
           <p:cNvPr id="17" name="text">
             <a:extLst xmlns:a="http://schemas.openxmlformats.org/drawingml/2006/main">
               <a:ext uri="{FF2B5EF4-FFF2-40B4-BE49-F238E27FC236}">
-                <a16:creationId xmlns:a16="http://schemas.microsoft.com/office/drawing/2014/main" id="{2A6BEA7C-252B-4FC2-8B1D-2A0A1506011E}"/>
+                <a16:creationId xmlns:a16="http://schemas.microsoft.com/office/drawing/2014/main" id="{5E65B47D-E179-472C-8030-9EB69D855087}"/>
               </a:ext>
             </a:extLst>
           </p:cNvPr>
@@ -16609,7 +16609,7 @@
           <p:cNvPr id="18" name="text">
             <a:extLst xmlns:a="http://schemas.openxmlformats.org/drawingml/2006/main">
               <a:ext uri="{FF2B5EF4-FFF2-40B4-BE49-F238E27FC236}">
-                <a16:creationId xmlns:a16="http://schemas.microsoft.com/office/drawing/2014/main" id="{31BF6103-E493-44B9-8806-08D815F8C397}"/>
+                <a16:creationId xmlns:a16="http://schemas.microsoft.com/office/drawing/2014/main" id="{024673CF-C8E3-4DD6-B9D9-AB82BF8992C4}"/>
               </a:ext>
             </a:extLst>
           </p:cNvPr>
@@ -16677,7 +16677,7 @@
           <p:cNvPr id="19" name="surface">
             <a:extLst xmlns:a="http://schemas.openxmlformats.org/drawingml/2006/main">
               <a:ext uri="{FF2B5EF4-FFF2-40B4-BE49-F238E27FC236}">
-                <a16:creationId xmlns:a16="http://schemas.microsoft.com/office/drawing/2014/main" id="{9534B2AD-884D-4202-B1B2-996F01B8D09F}"/>
+                <a16:creationId xmlns:a16="http://schemas.microsoft.com/office/drawing/2014/main" id="{82AAF210-8734-4E19-8BD2-6B18D6D80575}"/>
               </a:ext>
             </a:extLst>
           </p:cNvPr>
@@ -16712,7 +16712,7 @@
           <p:cNvPr id="20" name="surface">
             <a:extLst xmlns:a="http://schemas.openxmlformats.org/drawingml/2006/main">
               <a:ext uri="{FF2B5EF4-FFF2-40B4-BE49-F238E27FC236}">
-                <a16:creationId xmlns:a16="http://schemas.microsoft.com/office/drawing/2014/main" id="{A6944438-9181-4A28-ADE2-AF33C0AB976B}"/>
+                <a16:creationId xmlns:a16="http://schemas.microsoft.com/office/drawing/2014/main" id="{40851824-5D6F-43B6-B81C-47FA9B0CAE7A}"/>
               </a:ext>
             </a:extLst>
           </p:cNvPr>
@@ -16749,7 +16749,7 @@
           <p:cNvPr id="21" name="text">
             <a:extLst xmlns:a="http://schemas.openxmlformats.org/drawingml/2006/main">
               <a:ext uri="{FF2B5EF4-FFF2-40B4-BE49-F238E27FC236}">
-                <a16:creationId xmlns:a16="http://schemas.microsoft.com/office/drawing/2014/main" id="{A498785A-77AA-41CB-B77F-D92D8520F363}"/>
+                <a16:creationId xmlns:a16="http://schemas.microsoft.com/office/drawing/2014/main" id="{9B58EF5A-D0E8-45A0-90EE-987297A04538}"/>
               </a:ext>
             </a:extLst>
           </p:cNvPr>
@@ -16817,7 +16817,7 @@
           <p:cNvPr id="22" name="text">
             <a:extLst xmlns:a="http://schemas.openxmlformats.org/drawingml/2006/main">
               <a:ext uri="{FF2B5EF4-FFF2-40B4-BE49-F238E27FC236}">
-                <a16:creationId xmlns:a16="http://schemas.microsoft.com/office/drawing/2014/main" id="{A7957480-E823-4C5C-A84A-01A0050D8B36}"/>
+                <a16:creationId xmlns:a16="http://schemas.microsoft.com/office/drawing/2014/main" id="{0FB2F4C3-966A-4EE4-836E-5C9DCCFD31F4}"/>
               </a:ext>
             </a:extLst>
           </p:cNvPr>
@@ -16885,7 +16885,7 @@
           <p:cNvPr id="23" name="surface">
             <a:extLst xmlns:a="http://schemas.openxmlformats.org/drawingml/2006/main">
               <a:ext uri="{FF2B5EF4-FFF2-40B4-BE49-F238E27FC236}">
-                <a16:creationId xmlns:a16="http://schemas.microsoft.com/office/drawing/2014/main" id="{940DF5C1-9492-4AB3-816F-63E569247738}"/>
+                <a16:creationId xmlns:a16="http://schemas.microsoft.com/office/drawing/2014/main" id="{05CF6133-4DCF-4ADA-8E89-99AE0EA0702C}"/>
               </a:ext>
             </a:extLst>
           </p:cNvPr>
@@ -16920,7 +16920,7 @@
           <p:cNvPr id="24" name="surface">
             <a:extLst xmlns:a="http://schemas.openxmlformats.org/drawingml/2006/main">
               <a:ext uri="{FF2B5EF4-FFF2-40B4-BE49-F238E27FC236}">
-                <a16:creationId xmlns:a16="http://schemas.microsoft.com/office/drawing/2014/main" id="{ACCA96DE-F4EA-4C53-B7A6-1271BD8DB9A1}"/>
+                <a16:creationId xmlns:a16="http://schemas.microsoft.com/office/drawing/2014/main" id="{1DCEE586-B595-410D-8620-07D17005ACDC}"/>
               </a:ext>
             </a:extLst>
           </p:cNvPr>
@@ -16957,7 +16957,7 @@
           <p:cNvPr id="25" name="text">
             <a:extLst xmlns:a="http://schemas.openxmlformats.org/drawingml/2006/main">
               <a:ext uri="{FF2B5EF4-FFF2-40B4-BE49-F238E27FC236}">
-                <a16:creationId xmlns:a16="http://schemas.microsoft.com/office/drawing/2014/main" id="{3FEDB517-AA2A-464D-9633-21E4FFEC3657}"/>
+                <a16:creationId xmlns:a16="http://schemas.microsoft.com/office/drawing/2014/main" id="{934FDB76-63C4-47C9-925C-947498A91552}"/>
               </a:ext>
             </a:extLst>
           </p:cNvPr>
@@ -17025,7 +17025,7 @@
           <p:cNvPr id="26" name="text">
             <a:extLst xmlns:a="http://schemas.openxmlformats.org/drawingml/2006/main">
               <a:ext uri="{FF2B5EF4-FFF2-40B4-BE49-F238E27FC236}">
-                <a16:creationId xmlns:a16="http://schemas.microsoft.com/office/drawing/2014/main" id="{5B0A78B3-19E1-419E-85E1-C3DDF5773A94}"/>
+                <a16:creationId xmlns:a16="http://schemas.microsoft.com/office/drawing/2014/main" id="{2C30BA3F-419C-4353-8215-5F0645B314A9}"/>
               </a:ext>
             </a:extLst>
           </p:cNvPr>
@@ -17093,7 +17093,7 @@
           <p:cNvPr id="27" name="surface">
             <a:extLst xmlns:a="http://schemas.openxmlformats.org/drawingml/2006/main">
               <a:ext uri="{FF2B5EF4-FFF2-40B4-BE49-F238E27FC236}">
-                <a16:creationId xmlns:a16="http://schemas.microsoft.com/office/drawing/2014/main" id="{DAEBD8C0-A153-49FB-91E7-B094ED0B94FC}"/>
+                <a16:creationId xmlns:a16="http://schemas.microsoft.com/office/drawing/2014/main" id="{4ACF816C-1245-424D-BBBA-C21AB32A5527}"/>
               </a:ext>
             </a:extLst>
           </p:cNvPr>
@@ -17128,7 +17128,7 @@
           <p:cNvPr id="28" name="text">
             <a:extLst xmlns:a="http://schemas.openxmlformats.org/drawingml/2006/main">
               <a:ext uri="{FF2B5EF4-FFF2-40B4-BE49-F238E27FC236}">
-                <a16:creationId xmlns:a16="http://schemas.microsoft.com/office/drawing/2014/main" id="{3A7A1FDC-7D64-4D71-8727-BCAD97F5A821}"/>
+                <a16:creationId xmlns:a16="http://schemas.microsoft.com/office/drawing/2014/main" id="{B005306F-78B8-4C2F-A651-230DB69CE8C2}"/>
               </a:ext>
             </a:extLst>
           </p:cNvPr>
@@ -17196,7 +17196,7 @@
           <p:cNvPr id="29" name="text">
             <a:extLst xmlns:a="http://schemas.openxmlformats.org/drawingml/2006/main">
               <a:ext uri="{FF2B5EF4-FFF2-40B4-BE49-F238E27FC236}">
-                <a16:creationId xmlns:a16="http://schemas.microsoft.com/office/drawing/2014/main" id="{7F4C1518-FB6A-4AC6-AB99-41C3B44FA8DA}"/>
+                <a16:creationId xmlns:a16="http://schemas.microsoft.com/office/drawing/2014/main" id="{D6496373-5407-4D96-848E-ABE73579A001}"/>
               </a:ext>
             </a:extLst>
           </p:cNvPr>
@@ -17262,7 +17262,7 @@
     </p:spTree>
     <p:extLst>
       <p:ext uri="{BB962C8B-B14F-4D97-AF65-F5344CB8AC3E}">
-        <p14:creationId xmlns:p14="http://schemas.microsoft.com/office/powerpoint/2010/main" val="1750249942"/>
+        <p14:creationId xmlns:p14="http://schemas.microsoft.com/office/powerpoint/2010/main" val="223158892"/>
       </p:ext>
     </p:extLst>
   </p:cSld>
@@ -17293,7 +17293,7 @@
           <p:cNvPr id="1" name="top-accent">
             <a:extLst xmlns:a="http://schemas.openxmlformats.org/drawingml/2006/main">
               <a:ext uri="{FF2B5EF4-FFF2-40B4-BE49-F238E27FC236}">
-                <a16:creationId xmlns:a16="http://schemas.microsoft.com/office/drawing/2014/main" id="{E59F5E94-36F1-47BC-BA22-188AE6A3EEA2}"/>
+                <a16:creationId xmlns:a16="http://schemas.microsoft.com/office/drawing/2014/main" id="{117DBFE4-6D79-44FB-99F5-9FC3BC75E4D4}"/>
               </a:ext>
             </a:extLst>
           </p:cNvPr>
@@ -17328,7 +17328,7 @@
           <p:cNvPr id="2" name="bottom-line">
             <a:extLst xmlns:a="http://schemas.openxmlformats.org/drawingml/2006/main">
               <a:ext uri="{FF2B5EF4-FFF2-40B4-BE49-F238E27FC236}">
-                <a16:creationId xmlns:a16="http://schemas.microsoft.com/office/drawing/2014/main" id="{405BA77F-9CF9-4DF8-9DED-9ACEFFB6071A}"/>
+                <a16:creationId xmlns:a16="http://schemas.microsoft.com/office/drawing/2014/main" id="{75A6CDFB-C7C5-4388-861B-06F355D7416C}"/>
               </a:ext>
             </a:extLst>
           </p:cNvPr>
@@ -17363,7 +17363,7 @@
           <p:cNvPr id="3" name="surface">
             <a:extLst xmlns:a="http://schemas.openxmlformats.org/drawingml/2006/main">
               <a:ext uri="{FF2B5EF4-FFF2-40B4-BE49-F238E27FC236}">
-                <a16:creationId xmlns:a16="http://schemas.microsoft.com/office/drawing/2014/main" id="{F8B58F5C-396F-4237-961F-58C327FEEEB0}"/>
+                <a16:creationId xmlns:a16="http://schemas.microsoft.com/office/drawing/2014/main" id="{328DF925-9823-4A48-A2E9-CE5225D2D7E5}"/>
               </a:ext>
             </a:extLst>
           </p:cNvPr>
@@ -17425,7 +17425,7 @@
           <p:cNvPr id="4" name="text">
             <a:extLst xmlns:a="http://schemas.openxmlformats.org/drawingml/2006/main">
               <a:ext uri="{FF2B5EF4-FFF2-40B4-BE49-F238E27FC236}">
-                <a16:creationId xmlns:a16="http://schemas.microsoft.com/office/drawing/2014/main" id="{29E2043F-58CD-49B8-965C-CBD6D90D5B41}"/>
+                <a16:creationId xmlns:a16="http://schemas.microsoft.com/office/drawing/2014/main" id="{5264563F-C682-4D34-8013-14CFEECC394B}"/>
               </a:ext>
             </a:extLst>
           </p:cNvPr>
@@ -17493,7 +17493,7 @@
           <p:cNvPr id="5" name="text">
             <a:extLst xmlns:a="http://schemas.openxmlformats.org/drawingml/2006/main">
               <a:ext uri="{FF2B5EF4-FFF2-40B4-BE49-F238E27FC236}">
-                <a16:creationId xmlns:a16="http://schemas.microsoft.com/office/drawing/2014/main" id="{80442A26-CBB6-4A0C-BC50-A604F1EB9C73}"/>
+                <a16:creationId xmlns:a16="http://schemas.microsoft.com/office/drawing/2014/main" id="{5420EA0D-2FD4-48A5-84F3-8AC6F3B903FB}"/>
               </a:ext>
             </a:extLst>
           </p:cNvPr>
@@ -17561,7 +17561,7 @@
           <p:cNvPr id="6" name="text">
             <a:extLst xmlns:a="http://schemas.openxmlformats.org/drawingml/2006/main">
               <a:ext uri="{FF2B5EF4-FFF2-40B4-BE49-F238E27FC236}">
-                <a16:creationId xmlns:a16="http://schemas.microsoft.com/office/drawing/2014/main" id="{F28E2D66-EAF7-4DAE-A0F9-B8389F4DD6CC}"/>
+                <a16:creationId xmlns:a16="http://schemas.microsoft.com/office/drawing/2014/main" id="{8C9B1886-FB1D-4137-95AF-E2C4E2FFC415}"/>
               </a:ext>
             </a:extLst>
           </p:cNvPr>
@@ -17629,7 +17629,7 @@
           <p:cNvPr id="7" name="surface">
             <a:extLst xmlns:a="http://schemas.openxmlformats.org/drawingml/2006/main">
               <a:ext uri="{FF2B5EF4-FFF2-40B4-BE49-F238E27FC236}">
-                <a16:creationId xmlns:a16="http://schemas.microsoft.com/office/drawing/2014/main" id="{A7A261B0-96C1-47D2-974F-8FE02150AD49}"/>
+                <a16:creationId xmlns:a16="http://schemas.microsoft.com/office/drawing/2014/main" id="{EB4F6EAC-EDA7-4EB3-9A19-8F781DF266A0}"/>
               </a:ext>
             </a:extLst>
           </p:cNvPr>
@@ -17664,7 +17664,7 @@
           <p:cNvPr id="8" name="surface">
             <a:extLst xmlns:a="http://schemas.openxmlformats.org/drawingml/2006/main">
               <a:ext uri="{FF2B5EF4-FFF2-40B4-BE49-F238E27FC236}">
-                <a16:creationId xmlns:a16="http://schemas.microsoft.com/office/drawing/2014/main" id="{BACFE6F5-5A75-439A-A67A-8FBF6AC9F576}"/>
+                <a16:creationId xmlns:a16="http://schemas.microsoft.com/office/drawing/2014/main" id="{CD0B9617-31FD-481B-BC29-B7C57CAB1B00}"/>
               </a:ext>
             </a:extLst>
           </p:cNvPr>
@@ -17701,7 +17701,7 @@
           <p:cNvPr id="9" name="text">
             <a:extLst xmlns:a="http://schemas.openxmlformats.org/drawingml/2006/main">
               <a:ext uri="{FF2B5EF4-FFF2-40B4-BE49-F238E27FC236}">
-                <a16:creationId xmlns:a16="http://schemas.microsoft.com/office/drawing/2014/main" id="{55383813-60D3-4D83-B1F3-8A1A293EB2FD}"/>
+                <a16:creationId xmlns:a16="http://schemas.microsoft.com/office/drawing/2014/main" id="{F92248AB-03B8-4422-9ED4-D1C9F8C23016}"/>
               </a:ext>
             </a:extLst>
           </p:cNvPr>
@@ -17769,7 +17769,7 @@
           <p:cNvPr id="10" name="text">
             <a:extLst xmlns:a="http://schemas.openxmlformats.org/drawingml/2006/main">
               <a:ext uri="{FF2B5EF4-FFF2-40B4-BE49-F238E27FC236}">
-                <a16:creationId xmlns:a16="http://schemas.microsoft.com/office/drawing/2014/main" id="{52B0F9F3-E129-4AF6-BDD8-BDBBCF2FCC44}"/>
+                <a16:creationId xmlns:a16="http://schemas.microsoft.com/office/drawing/2014/main" id="{E2B15335-1CEC-4742-938F-7A3F1CF984A0}"/>
               </a:ext>
             </a:extLst>
           </p:cNvPr>
@@ -17837,7 +17837,7 @@
           <p:cNvPr id="11" name="surface">
             <a:extLst xmlns:a="http://schemas.openxmlformats.org/drawingml/2006/main">
               <a:ext uri="{FF2B5EF4-FFF2-40B4-BE49-F238E27FC236}">
-                <a16:creationId xmlns:a16="http://schemas.microsoft.com/office/drawing/2014/main" id="{99D7F970-D96D-463D-BDB7-7A5C1AC3A32F}"/>
+                <a16:creationId xmlns:a16="http://schemas.microsoft.com/office/drawing/2014/main" id="{2BA6BFBF-8FA3-48C5-A80B-929FBC9CE522}"/>
               </a:ext>
             </a:extLst>
           </p:cNvPr>
@@ -17872,7 +17872,7 @@
           <p:cNvPr id="12" name="surface">
             <a:extLst xmlns:a="http://schemas.openxmlformats.org/drawingml/2006/main">
               <a:ext uri="{FF2B5EF4-FFF2-40B4-BE49-F238E27FC236}">
-                <a16:creationId xmlns:a16="http://schemas.microsoft.com/office/drawing/2014/main" id="{E4376F4D-382F-4500-8BCE-ABBC7C662253}"/>
+                <a16:creationId xmlns:a16="http://schemas.microsoft.com/office/drawing/2014/main" id="{2442A8EC-05B2-40A1-ADEC-1E6CFF73454E}"/>
               </a:ext>
             </a:extLst>
           </p:cNvPr>
@@ -17909,7 +17909,7 @@
           <p:cNvPr id="13" name="text">
             <a:extLst xmlns:a="http://schemas.openxmlformats.org/drawingml/2006/main">
               <a:ext uri="{FF2B5EF4-FFF2-40B4-BE49-F238E27FC236}">
-                <a16:creationId xmlns:a16="http://schemas.microsoft.com/office/drawing/2014/main" id="{66696D03-6BE2-48A4-B049-68330C683F8E}"/>
+                <a16:creationId xmlns:a16="http://schemas.microsoft.com/office/drawing/2014/main" id="{E939BECE-6795-4FD5-B486-E47DDE0B5DBB}"/>
               </a:ext>
             </a:extLst>
           </p:cNvPr>
@@ -17977,7 +17977,7 @@
           <p:cNvPr id="14" name="text">
             <a:extLst xmlns:a="http://schemas.openxmlformats.org/drawingml/2006/main">
               <a:ext uri="{FF2B5EF4-FFF2-40B4-BE49-F238E27FC236}">
-                <a16:creationId xmlns:a16="http://schemas.microsoft.com/office/drawing/2014/main" id="{D0870125-9866-4575-B15C-2C09E8F69BF9}"/>
+                <a16:creationId xmlns:a16="http://schemas.microsoft.com/office/drawing/2014/main" id="{5E7B086F-140C-4449-8AA4-2F4EF8ACB76A}"/>
               </a:ext>
             </a:extLst>
           </p:cNvPr>
@@ -18045,7 +18045,7 @@
           <p:cNvPr id="15" name="surface">
             <a:extLst xmlns:a="http://schemas.openxmlformats.org/drawingml/2006/main">
               <a:ext uri="{FF2B5EF4-FFF2-40B4-BE49-F238E27FC236}">
-                <a16:creationId xmlns:a16="http://schemas.microsoft.com/office/drawing/2014/main" id="{CD9573B0-AE5D-45E6-8479-31BFC97F4001}"/>
+                <a16:creationId xmlns:a16="http://schemas.microsoft.com/office/drawing/2014/main" id="{681C56BD-B625-40C8-B4F1-11561F62E2C2}"/>
               </a:ext>
             </a:extLst>
           </p:cNvPr>
@@ -18080,7 +18080,7 @@
           <p:cNvPr id="16" name="surface">
             <a:extLst xmlns:a="http://schemas.openxmlformats.org/drawingml/2006/main">
               <a:ext uri="{FF2B5EF4-FFF2-40B4-BE49-F238E27FC236}">
-                <a16:creationId xmlns:a16="http://schemas.microsoft.com/office/drawing/2014/main" id="{3E90F914-F128-4F43-BA34-991C3A5AD80F}"/>
+                <a16:creationId xmlns:a16="http://schemas.microsoft.com/office/drawing/2014/main" id="{67EDB04E-84C7-4D13-A888-7B6A21D17627}"/>
               </a:ext>
             </a:extLst>
           </p:cNvPr>
@@ -18117,7 +18117,7 @@
           <p:cNvPr id="17" name="text">
             <a:extLst xmlns:a="http://schemas.openxmlformats.org/drawingml/2006/main">
               <a:ext uri="{FF2B5EF4-FFF2-40B4-BE49-F238E27FC236}">
-                <a16:creationId xmlns:a16="http://schemas.microsoft.com/office/drawing/2014/main" id="{FDDAF03B-A250-4DAF-BCF8-7F3F5B1EEE07}"/>
+                <a16:creationId xmlns:a16="http://schemas.microsoft.com/office/drawing/2014/main" id="{DC9AF792-6FE0-403A-BC7A-7B5FFD0D97B9}"/>
               </a:ext>
             </a:extLst>
           </p:cNvPr>
@@ -18185,7 +18185,7 @@
           <p:cNvPr id="18" name="text">
             <a:extLst xmlns:a="http://schemas.openxmlformats.org/drawingml/2006/main">
               <a:ext uri="{FF2B5EF4-FFF2-40B4-BE49-F238E27FC236}">
-                <a16:creationId xmlns:a16="http://schemas.microsoft.com/office/drawing/2014/main" id="{7E2B1179-0E4B-47F6-A5FE-9E60E9E71F04}"/>
+                <a16:creationId xmlns:a16="http://schemas.microsoft.com/office/drawing/2014/main" id="{50A3BACA-10DC-4888-95E4-95D58021EC54}"/>
               </a:ext>
             </a:extLst>
           </p:cNvPr>
@@ -18253,7 +18253,7 @@
           <p:cNvPr id="19" name="surface">
             <a:extLst xmlns:a="http://schemas.openxmlformats.org/drawingml/2006/main">
               <a:ext uri="{FF2B5EF4-FFF2-40B4-BE49-F238E27FC236}">
-                <a16:creationId xmlns:a16="http://schemas.microsoft.com/office/drawing/2014/main" id="{770065E6-9F65-436A-8820-57D135B508A9}"/>
+                <a16:creationId xmlns:a16="http://schemas.microsoft.com/office/drawing/2014/main" id="{141BB33A-D64D-4632-BD25-97E07FB37066}"/>
               </a:ext>
             </a:extLst>
           </p:cNvPr>
@@ -18288,7 +18288,7 @@
           <p:cNvPr id="20" name="surface">
             <a:extLst xmlns:a="http://schemas.openxmlformats.org/drawingml/2006/main">
               <a:ext uri="{FF2B5EF4-FFF2-40B4-BE49-F238E27FC236}">
-                <a16:creationId xmlns:a16="http://schemas.microsoft.com/office/drawing/2014/main" id="{F01AAA74-BFBD-4E3A-869D-C61AC741A65C}"/>
+                <a16:creationId xmlns:a16="http://schemas.microsoft.com/office/drawing/2014/main" id="{5A358BE5-7874-452B-81FD-DB1B1C289868}"/>
               </a:ext>
             </a:extLst>
           </p:cNvPr>
@@ -18325,7 +18325,7 @@
           <p:cNvPr id="21" name="text">
             <a:extLst xmlns:a="http://schemas.openxmlformats.org/drawingml/2006/main">
               <a:ext uri="{FF2B5EF4-FFF2-40B4-BE49-F238E27FC236}">
-                <a16:creationId xmlns:a16="http://schemas.microsoft.com/office/drawing/2014/main" id="{53EA028F-4775-4C36-9555-7F5C1A8E2036}"/>
+                <a16:creationId xmlns:a16="http://schemas.microsoft.com/office/drawing/2014/main" id="{F6713724-0810-4A41-846D-A023B705C79A}"/>
               </a:ext>
             </a:extLst>
           </p:cNvPr>
@@ -18393,7 +18393,7 @@
           <p:cNvPr id="22" name="text">
             <a:extLst xmlns:a="http://schemas.openxmlformats.org/drawingml/2006/main">
               <a:ext uri="{FF2B5EF4-FFF2-40B4-BE49-F238E27FC236}">
-                <a16:creationId xmlns:a16="http://schemas.microsoft.com/office/drawing/2014/main" id="{6327B796-56CF-4617-A919-160680FB8680}"/>
+                <a16:creationId xmlns:a16="http://schemas.microsoft.com/office/drawing/2014/main" id="{8CB75097-6D86-4CC0-A121-A7E37949B517}"/>
               </a:ext>
             </a:extLst>
           </p:cNvPr>
@@ -18461,7 +18461,7 @@
           <p:cNvPr id="23" name="surface">
             <a:extLst xmlns:a="http://schemas.openxmlformats.org/drawingml/2006/main">
               <a:ext uri="{FF2B5EF4-FFF2-40B4-BE49-F238E27FC236}">
-                <a16:creationId xmlns:a16="http://schemas.microsoft.com/office/drawing/2014/main" id="{BD0B78ED-61A2-407B-991E-0E345C5BD014}"/>
+                <a16:creationId xmlns:a16="http://schemas.microsoft.com/office/drawing/2014/main" id="{F82A89FB-609F-467E-85E4-D15BE10B614F}"/>
               </a:ext>
             </a:extLst>
           </p:cNvPr>
@@ -18496,7 +18496,7 @@
           <p:cNvPr id="24" name="surface">
             <a:extLst xmlns:a="http://schemas.openxmlformats.org/drawingml/2006/main">
               <a:ext uri="{FF2B5EF4-FFF2-40B4-BE49-F238E27FC236}">
-                <a16:creationId xmlns:a16="http://schemas.microsoft.com/office/drawing/2014/main" id="{41CB2E67-4A4C-4D8C-BAE3-066060ECC825}"/>
+                <a16:creationId xmlns:a16="http://schemas.microsoft.com/office/drawing/2014/main" id="{A3108AAD-EE04-4928-B365-A69A8178108B}"/>
               </a:ext>
             </a:extLst>
           </p:cNvPr>
@@ -18533,7 +18533,7 @@
           <p:cNvPr id="25" name="text">
             <a:extLst xmlns:a="http://schemas.openxmlformats.org/drawingml/2006/main">
               <a:ext uri="{FF2B5EF4-FFF2-40B4-BE49-F238E27FC236}">
-                <a16:creationId xmlns:a16="http://schemas.microsoft.com/office/drawing/2014/main" id="{CD50FD69-118F-461B-854D-388BBD759D01}"/>
+                <a16:creationId xmlns:a16="http://schemas.microsoft.com/office/drawing/2014/main" id="{F3A73CB8-0589-4B95-A443-A89BFEF81F6C}"/>
               </a:ext>
             </a:extLst>
           </p:cNvPr>
@@ -18601,7 +18601,7 @@
           <p:cNvPr id="26" name="text">
             <a:extLst xmlns:a="http://schemas.openxmlformats.org/drawingml/2006/main">
               <a:ext uri="{FF2B5EF4-FFF2-40B4-BE49-F238E27FC236}">
-                <a16:creationId xmlns:a16="http://schemas.microsoft.com/office/drawing/2014/main" id="{B9CACC17-A5BF-44F1-8E1E-46771F05CD30}"/>
+                <a16:creationId xmlns:a16="http://schemas.microsoft.com/office/drawing/2014/main" id="{AA918D28-FFA5-4B06-89E6-BEB2EE25BC81}"/>
               </a:ext>
             </a:extLst>
           </p:cNvPr>
@@ -18669,7 +18669,7 @@
           <p:cNvPr id="27" name="surface">
             <a:extLst xmlns:a="http://schemas.openxmlformats.org/drawingml/2006/main">
               <a:ext uri="{FF2B5EF4-FFF2-40B4-BE49-F238E27FC236}">
-                <a16:creationId xmlns:a16="http://schemas.microsoft.com/office/drawing/2014/main" id="{8A1A729F-6E2F-441E-94EA-8929E11332ED}"/>
+                <a16:creationId xmlns:a16="http://schemas.microsoft.com/office/drawing/2014/main" id="{FB4EAB7B-0615-47D3-A214-7667A68A4EC0}"/>
               </a:ext>
             </a:extLst>
           </p:cNvPr>
@@ -18704,7 +18704,7 @@
           <p:cNvPr id="28" name="text">
             <a:extLst xmlns:a="http://schemas.openxmlformats.org/drawingml/2006/main">
               <a:ext uri="{FF2B5EF4-FFF2-40B4-BE49-F238E27FC236}">
-                <a16:creationId xmlns:a16="http://schemas.microsoft.com/office/drawing/2014/main" id="{0D6F624F-FAC6-45F0-AD34-A325F400F4EC}"/>
+                <a16:creationId xmlns:a16="http://schemas.microsoft.com/office/drawing/2014/main" id="{C011A5E1-2F16-4835-9C69-92E601F33E08}"/>
               </a:ext>
             </a:extLst>
           </p:cNvPr>
@@ -18772,7 +18772,7 @@
           <p:cNvPr id="29" name="text">
             <a:extLst xmlns:a="http://schemas.openxmlformats.org/drawingml/2006/main">
               <a:ext uri="{FF2B5EF4-FFF2-40B4-BE49-F238E27FC236}">
-                <a16:creationId xmlns:a16="http://schemas.microsoft.com/office/drawing/2014/main" id="{C6BE3B06-89BB-4137-8AE2-5D3490B93C43}"/>
+                <a16:creationId xmlns:a16="http://schemas.microsoft.com/office/drawing/2014/main" id="{8B181ADD-7BD8-4C68-BAB9-16C9A121114C}"/>
               </a:ext>
             </a:extLst>
           </p:cNvPr>
@@ -18838,7 +18838,7 @@
     </p:spTree>
     <p:extLst>
       <p:ext uri="{BB962C8B-B14F-4D97-AF65-F5344CB8AC3E}">
-        <p14:creationId xmlns:p14="http://schemas.microsoft.com/office/powerpoint/2010/main" val="350340271"/>
+        <p14:creationId xmlns:p14="http://schemas.microsoft.com/office/powerpoint/2010/main" val="1349992347"/>
       </p:ext>
     </p:extLst>
   </p:cSld>
@@ -18869,7 +18869,7 @@
           <p:cNvPr id="1" name="top-accent">
             <a:extLst xmlns:a="http://schemas.openxmlformats.org/drawingml/2006/main">
               <a:ext uri="{FF2B5EF4-FFF2-40B4-BE49-F238E27FC236}">
-                <a16:creationId xmlns:a16="http://schemas.microsoft.com/office/drawing/2014/main" id="{0120F4DE-EDEC-42CB-8E5C-018DCE8EE0A1}"/>
+                <a16:creationId xmlns:a16="http://schemas.microsoft.com/office/drawing/2014/main" id="{13E2C6A5-0DD4-420E-A973-5FA0EA969F4A}"/>
               </a:ext>
             </a:extLst>
           </p:cNvPr>
@@ -18904,7 +18904,7 @@
           <p:cNvPr id="2" name="bottom-line">
             <a:extLst xmlns:a="http://schemas.openxmlformats.org/drawingml/2006/main">
               <a:ext uri="{FF2B5EF4-FFF2-40B4-BE49-F238E27FC236}">
-                <a16:creationId xmlns:a16="http://schemas.microsoft.com/office/drawing/2014/main" id="{8A7E9C73-BCF4-4974-B9A9-9A65C277990B}"/>
+                <a16:creationId xmlns:a16="http://schemas.microsoft.com/office/drawing/2014/main" id="{608B4D63-F9D5-4EE9-802F-638075986656}"/>
               </a:ext>
             </a:extLst>
           </p:cNvPr>
@@ -18939,7 +18939,7 @@
           <p:cNvPr id="3" name="surface">
             <a:extLst xmlns:a="http://schemas.openxmlformats.org/drawingml/2006/main">
               <a:ext uri="{FF2B5EF4-FFF2-40B4-BE49-F238E27FC236}">
-                <a16:creationId xmlns:a16="http://schemas.microsoft.com/office/drawing/2014/main" id="{7DE7C95D-52A5-4142-9A96-4A04C184E096}"/>
+                <a16:creationId xmlns:a16="http://schemas.microsoft.com/office/drawing/2014/main" id="{CB4EE314-A901-408A-AB72-B67606777138}"/>
               </a:ext>
             </a:extLst>
           </p:cNvPr>
@@ -19001,7 +19001,7 @@
           <p:cNvPr id="4" name="text">
             <a:extLst xmlns:a="http://schemas.openxmlformats.org/drawingml/2006/main">
               <a:ext uri="{FF2B5EF4-FFF2-40B4-BE49-F238E27FC236}">
-                <a16:creationId xmlns:a16="http://schemas.microsoft.com/office/drawing/2014/main" id="{375177C1-0453-4C74-8177-45AB66BCC623}"/>
+                <a16:creationId xmlns:a16="http://schemas.microsoft.com/office/drawing/2014/main" id="{F27545F7-FE2F-41AF-B74C-AFF91AAE36ED}"/>
               </a:ext>
             </a:extLst>
           </p:cNvPr>
@@ -19069,7 +19069,7 @@
           <p:cNvPr id="5" name="text">
             <a:extLst xmlns:a="http://schemas.openxmlformats.org/drawingml/2006/main">
               <a:ext uri="{FF2B5EF4-FFF2-40B4-BE49-F238E27FC236}">
-                <a16:creationId xmlns:a16="http://schemas.microsoft.com/office/drawing/2014/main" id="{2B1F06F4-1D94-4A7E-B016-1D3CC67CC61B}"/>
+                <a16:creationId xmlns:a16="http://schemas.microsoft.com/office/drawing/2014/main" id="{C3AAABBF-9237-46EB-ABE0-4C28C18271AD}"/>
               </a:ext>
             </a:extLst>
           </p:cNvPr>
@@ -19137,7 +19137,7 @@
           <p:cNvPr id="6" name="text">
             <a:extLst xmlns:a="http://schemas.openxmlformats.org/drawingml/2006/main">
               <a:ext uri="{FF2B5EF4-FFF2-40B4-BE49-F238E27FC236}">
-                <a16:creationId xmlns:a16="http://schemas.microsoft.com/office/drawing/2014/main" id="{EE48C460-3F2F-4B01-BEDF-5EDC720D146C}"/>
+                <a16:creationId xmlns:a16="http://schemas.microsoft.com/office/drawing/2014/main" id="{4E62A86C-2C3B-4CFC-AF7A-8DD400924D21}"/>
               </a:ext>
             </a:extLst>
           </p:cNvPr>
@@ -19205,7 +19205,7 @@
           <p:cNvPr id="7" name="surface">
             <a:extLst xmlns:a="http://schemas.openxmlformats.org/drawingml/2006/main">
               <a:ext uri="{FF2B5EF4-FFF2-40B4-BE49-F238E27FC236}">
-                <a16:creationId xmlns:a16="http://schemas.microsoft.com/office/drawing/2014/main" id="{CF6EDBC2-C61A-4FDB-A65E-C20E53CE660A}"/>
+                <a16:creationId xmlns:a16="http://schemas.microsoft.com/office/drawing/2014/main" id="{3E95CD55-707B-45DD-B667-1EFB4AD94F2F}"/>
               </a:ext>
             </a:extLst>
           </p:cNvPr>
@@ -19240,7 +19240,7 @@
           <p:cNvPr id="8" name="surface">
             <a:extLst xmlns:a="http://schemas.openxmlformats.org/drawingml/2006/main">
               <a:ext uri="{FF2B5EF4-FFF2-40B4-BE49-F238E27FC236}">
-                <a16:creationId xmlns:a16="http://schemas.microsoft.com/office/drawing/2014/main" id="{D9A6537E-45AA-4749-A5A6-FB5D5C8FA49F}"/>
+                <a16:creationId xmlns:a16="http://schemas.microsoft.com/office/drawing/2014/main" id="{E6BB1880-BFE7-4A71-BBE3-3ED51D49B171}"/>
               </a:ext>
             </a:extLst>
           </p:cNvPr>
@@ -19277,7 +19277,7 @@
           <p:cNvPr id="9" name="text">
             <a:extLst xmlns:a="http://schemas.openxmlformats.org/drawingml/2006/main">
               <a:ext uri="{FF2B5EF4-FFF2-40B4-BE49-F238E27FC236}">
-                <a16:creationId xmlns:a16="http://schemas.microsoft.com/office/drawing/2014/main" id="{391DCDCD-ECC9-4D39-B5DC-2C6D13CA5DA4}"/>
+                <a16:creationId xmlns:a16="http://schemas.microsoft.com/office/drawing/2014/main" id="{23DD25EF-D648-4EF7-9076-21531A54DE95}"/>
               </a:ext>
             </a:extLst>
           </p:cNvPr>
@@ -19345,7 +19345,7 @@
           <p:cNvPr id="10" name="text">
             <a:extLst xmlns:a="http://schemas.openxmlformats.org/drawingml/2006/main">
               <a:ext uri="{FF2B5EF4-FFF2-40B4-BE49-F238E27FC236}">
-                <a16:creationId xmlns:a16="http://schemas.microsoft.com/office/drawing/2014/main" id="{760CAE40-95C4-4FF7-A3A5-A66B54675939}"/>
+                <a16:creationId xmlns:a16="http://schemas.microsoft.com/office/drawing/2014/main" id="{B27BB937-6A46-4731-94D2-365214858687}"/>
               </a:ext>
             </a:extLst>
           </p:cNvPr>
@@ -19413,7 +19413,7 @@
           <p:cNvPr id="11" name="surface">
             <a:extLst xmlns:a="http://schemas.openxmlformats.org/drawingml/2006/main">
               <a:ext uri="{FF2B5EF4-FFF2-40B4-BE49-F238E27FC236}">
-                <a16:creationId xmlns:a16="http://schemas.microsoft.com/office/drawing/2014/main" id="{5D703892-5DBF-4178-8C9E-943F013E40DC}"/>
+                <a16:creationId xmlns:a16="http://schemas.microsoft.com/office/drawing/2014/main" id="{F6F47C08-CAC2-448A-8C96-B25CAC352944}"/>
               </a:ext>
             </a:extLst>
           </p:cNvPr>
@@ -19448,7 +19448,7 @@
           <p:cNvPr id="12" name="surface">
             <a:extLst xmlns:a="http://schemas.openxmlformats.org/drawingml/2006/main">
               <a:ext uri="{FF2B5EF4-FFF2-40B4-BE49-F238E27FC236}">
-                <a16:creationId xmlns:a16="http://schemas.microsoft.com/office/drawing/2014/main" id="{C82D688D-A262-4F81-81EB-A102A4F5270F}"/>
+                <a16:creationId xmlns:a16="http://schemas.microsoft.com/office/drawing/2014/main" id="{477EAF31-F592-4FF9-9F74-7DEB720A193B}"/>
               </a:ext>
             </a:extLst>
           </p:cNvPr>
@@ -19485,7 +19485,7 @@
           <p:cNvPr id="13" name="text">
             <a:extLst xmlns:a="http://schemas.openxmlformats.org/drawingml/2006/main">
               <a:ext uri="{FF2B5EF4-FFF2-40B4-BE49-F238E27FC236}">
-                <a16:creationId xmlns:a16="http://schemas.microsoft.com/office/drawing/2014/main" id="{5CA6116C-12B2-4D3C-ADFA-44AD5DA41560}"/>
+                <a16:creationId xmlns:a16="http://schemas.microsoft.com/office/drawing/2014/main" id="{A1B732A8-1318-4339-AB40-9D241FEA02E3}"/>
               </a:ext>
             </a:extLst>
           </p:cNvPr>
@@ -19553,7 +19553,7 @@
           <p:cNvPr id="14" name="text">
             <a:extLst xmlns:a="http://schemas.openxmlformats.org/drawingml/2006/main">
               <a:ext uri="{FF2B5EF4-FFF2-40B4-BE49-F238E27FC236}">
-                <a16:creationId xmlns:a16="http://schemas.microsoft.com/office/drawing/2014/main" id="{0AD39237-8559-4F3E-87A3-D6F40B82AB55}"/>
+                <a16:creationId xmlns:a16="http://schemas.microsoft.com/office/drawing/2014/main" id="{519E83EA-8F2D-47AF-AB46-C7479DD0B705}"/>
               </a:ext>
             </a:extLst>
           </p:cNvPr>
@@ -19621,7 +19621,7 @@
           <p:cNvPr id="15" name="surface">
             <a:extLst xmlns:a="http://schemas.openxmlformats.org/drawingml/2006/main">
               <a:ext uri="{FF2B5EF4-FFF2-40B4-BE49-F238E27FC236}">
-                <a16:creationId xmlns:a16="http://schemas.microsoft.com/office/drawing/2014/main" id="{339C9CFC-9777-4528-9285-789D9B9F6585}"/>
+                <a16:creationId xmlns:a16="http://schemas.microsoft.com/office/drawing/2014/main" id="{5BB47CD4-98E0-4984-950D-839A432B8D0E}"/>
               </a:ext>
             </a:extLst>
           </p:cNvPr>
@@ -19656,7 +19656,7 @@
           <p:cNvPr id="16" name="surface">
             <a:extLst xmlns:a="http://schemas.openxmlformats.org/drawingml/2006/main">
               <a:ext uri="{FF2B5EF4-FFF2-40B4-BE49-F238E27FC236}">
-                <a16:creationId xmlns:a16="http://schemas.microsoft.com/office/drawing/2014/main" id="{1B4D6677-3FC6-4CE2-BEB9-89CF6A598ED1}"/>
+                <a16:creationId xmlns:a16="http://schemas.microsoft.com/office/drawing/2014/main" id="{184F6F38-4092-4E8B-BE09-0BAC24F7842C}"/>
               </a:ext>
             </a:extLst>
           </p:cNvPr>
@@ -19693,7 +19693,7 @@
           <p:cNvPr id="17" name="text">
             <a:extLst xmlns:a="http://schemas.openxmlformats.org/drawingml/2006/main">
               <a:ext uri="{FF2B5EF4-FFF2-40B4-BE49-F238E27FC236}">
-                <a16:creationId xmlns:a16="http://schemas.microsoft.com/office/drawing/2014/main" id="{D0F8D7C3-E703-431F-964B-321981E7A3E3}"/>
+                <a16:creationId xmlns:a16="http://schemas.microsoft.com/office/drawing/2014/main" id="{564E8CD3-1813-4A8A-942C-CD1288182BAB}"/>
               </a:ext>
             </a:extLst>
           </p:cNvPr>
@@ -19761,7 +19761,7 @@
           <p:cNvPr id="18" name="text">
             <a:extLst xmlns:a="http://schemas.openxmlformats.org/drawingml/2006/main">
               <a:ext uri="{FF2B5EF4-FFF2-40B4-BE49-F238E27FC236}">
-                <a16:creationId xmlns:a16="http://schemas.microsoft.com/office/drawing/2014/main" id="{DDD1098C-5164-451E-9786-FBF879BF599E}"/>
+                <a16:creationId xmlns:a16="http://schemas.microsoft.com/office/drawing/2014/main" id="{C016B135-8AC6-4423-8F41-0351057C1975}"/>
               </a:ext>
             </a:extLst>
           </p:cNvPr>
@@ -19829,7 +19829,7 @@
           <p:cNvPr id="19" name="surface">
             <a:extLst xmlns:a="http://schemas.openxmlformats.org/drawingml/2006/main">
               <a:ext uri="{FF2B5EF4-FFF2-40B4-BE49-F238E27FC236}">
-                <a16:creationId xmlns:a16="http://schemas.microsoft.com/office/drawing/2014/main" id="{79B53405-A36B-4D4F-96AC-249C228F6BB9}"/>
+                <a16:creationId xmlns:a16="http://schemas.microsoft.com/office/drawing/2014/main" id="{05660B97-056D-4006-BEF4-273E436003DC}"/>
               </a:ext>
             </a:extLst>
           </p:cNvPr>
@@ -19864,7 +19864,7 @@
           <p:cNvPr id="20" name="surface">
             <a:extLst xmlns:a="http://schemas.openxmlformats.org/drawingml/2006/main">
               <a:ext uri="{FF2B5EF4-FFF2-40B4-BE49-F238E27FC236}">
-                <a16:creationId xmlns:a16="http://schemas.microsoft.com/office/drawing/2014/main" id="{571CC965-F555-4DB9-94B8-6D25D347E687}"/>
+                <a16:creationId xmlns:a16="http://schemas.microsoft.com/office/drawing/2014/main" id="{43CBD00F-0E48-4C23-B133-C500FA52432E}"/>
               </a:ext>
             </a:extLst>
           </p:cNvPr>
@@ -19901,7 +19901,7 @@
           <p:cNvPr id="21" name="text">
             <a:extLst xmlns:a="http://schemas.openxmlformats.org/drawingml/2006/main">
               <a:ext uri="{FF2B5EF4-FFF2-40B4-BE49-F238E27FC236}">
-                <a16:creationId xmlns:a16="http://schemas.microsoft.com/office/drawing/2014/main" id="{843FE3A7-19FF-421D-B07B-D53DDBC136C6}"/>
+                <a16:creationId xmlns:a16="http://schemas.microsoft.com/office/drawing/2014/main" id="{58DE7107-C160-495D-9282-157E40FB49D5}"/>
               </a:ext>
             </a:extLst>
           </p:cNvPr>
@@ -19969,7 +19969,7 @@
           <p:cNvPr id="22" name="text">
             <a:extLst xmlns:a="http://schemas.openxmlformats.org/drawingml/2006/main">
               <a:ext uri="{FF2B5EF4-FFF2-40B4-BE49-F238E27FC236}">
-                <a16:creationId xmlns:a16="http://schemas.microsoft.com/office/drawing/2014/main" id="{153C42C2-0F16-4916-A2BE-25FDDD76CE47}"/>
+                <a16:creationId xmlns:a16="http://schemas.microsoft.com/office/drawing/2014/main" id="{45E6C91A-71D5-47CC-9C18-713ECB04627A}"/>
               </a:ext>
             </a:extLst>
           </p:cNvPr>
@@ -20037,7 +20037,7 @@
           <p:cNvPr id="23" name="surface">
             <a:extLst xmlns:a="http://schemas.openxmlformats.org/drawingml/2006/main">
               <a:ext uri="{FF2B5EF4-FFF2-40B4-BE49-F238E27FC236}">
-                <a16:creationId xmlns:a16="http://schemas.microsoft.com/office/drawing/2014/main" id="{FC36312A-0F20-46CD-B317-8B2BE189672D}"/>
+                <a16:creationId xmlns:a16="http://schemas.microsoft.com/office/drawing/2014/main" id="{FD73B57D-AE91-414C-8B4D-ECF540FFED38}"/>
               </a:ext>
             </a:extLst>
           </p:cNvPr>
@@ -20072,7 +20072,7 @@
           <p:cNvPr id="24" name="text">
             <a:extLst xmlns:a="http://schemas.openxmlformats.org/drawingml/2006/main">
               <a:ext uri="{FF2B5EF4-FFF2-40B4-BE49-F238E27FC236}">
-                <a16:creationId xmlns:a16="http://schemas.microsoft.com/office/drawing/2014/main" id="{902C86A8-9193-403B-AF2B-4D6B5450C024}"/>
+                <a16:creationId xmlns:a16="http://schemas.microsoft.com/office/drawing/2014/main" id="{BA72ECC0-B57F-43F8-A043-CC3A32EC9D4B}"/>
               </a:ext>
             </a:extLst>
           </p:cNvPr>
@@ -20140,7 +20140,7 @@
           <p:cNvPr id="25" name="text">
             <a:extLst xmlns:a="http://schemas.openxmlformats.org/drawingml/2006/main">
               <a:ext uri="{FF2B5EF4-FFF2-40B4-BE49-F238E27FC236}">
-                <a16:creationId xmlns:a16="http://schemas.microsoft.com/office/drawing/2014/main" id="{65252CDD-C91E-4B75-9CB4-3DBB12812C4A}"/>
+                <a16:creationId xmlns:a16="http://schemas.microsoft.com/office/drawing/2014/main" id="{AC76B44E-06A8-4B2C-95CB-777FC9933523}"/>
               </a:ext>
             </a:extLst>
           </p:cNvPr>
@@ -20206,7 +20206,7 @@
     </p:spTree>
     <p:extLst>
       <p:ext uri="{BB962C8B-B14F-4D97-AF65-F5344CB8AC3E}">
-        <p14:creationId xmlns:p14="http://schemas.microsoft.com/office/powerpoint/2010/main" val="1267016301"/>
+        <p14:creationId xmlns:p14="http://schemas.microsoft.com/office/powerpoint/2010/main" val="1900605784"/>
       </p:ext>
     </p:extLst>
   </p:cSld>
@@ -20237,7 +20237,7 @@
           <p:cNvPr id="1" name="top-accent">
             <a:extLst xmlns:a="http://schemas.openxmlformats.org/drawingml/2006/main">
               <a:ext uri="{FF2B5EF4-FFF2-40B4-BE49-F238E27FC236}">
-                <a16:creationId xmlns:a16="http://schemas.microsoft.com/office/drawing/2014/main" id="{56B4297A-3303-48FB-83B1-43B4F9BCD30A}"/>
+                <a16:creationId xmlns:a16="http://schemas.microsoft.com/office/drawing/2014/main" id="{4AF9A0FC-AE55-4C6A-A386-C444DB10E802}"/>
               </a:ext>
             </a:extLst>
           </p:cNvPr>
@@ -20272,7 +20272,7 @@
           <p:cNvPr id="2" name="bottom-line">
             <a:extLst xmlns:a="http://schemas.openxmlformats.org/drawingml/2006/main">
               <a:ext uri="{FF2B5EF4-FFF2-40B4-BE49-F238E27FC236}">
-                <a16:creationId xmlns:a16="http://schemas.microsoft.com/office/drawing/2014/main" id="{7B6233DF-2C7B-47C0-A739-B861B5AFE028}"/>
+                <a16:creationId xmlns:a16="http://schemas.microsoft.com/office/drawing/2014/main" id="{17E10F4F-DE30-45A0-95A4-451CFE708A2B}"/>
               </a:ext>
             </a:extLst>
           </p:cNvPr>
@@ -20307,7 +20307,7 @@
           <p:cNvPr id="3" name="surface">
             <a:extLst xmlns:a="http://schemas.openxmlformats.org/drawingml/2006/main">
               <a:ext uri="{FF2B5EF4-FFF2-40B4-BE49-F238E27FC236}">
-                <a16:creationId xmlns:a16="http://schemas.microsoft.com/office/drawing/2014/main" id="{C7480569-0FCC-4D50-B270-C8701B92EE42}"/>
+                <a16:creationId xmlns:a16="http://schemas.microsoft.com/office/drawing/2014/main" id="{FF238840-9532-418D-B347-72F91375CB87}"/>
               </a:ext>
             </a:extLst>
           </p:cNvPr>
@@ -20369,7 +20369,7 @@
           <p:cNvPr id="4" name="text">
             <a:extLst xmlns:a="http://schemas.openxmlformats.org/drawingml/2006/main">
               <a:ext uri="{FF2B5EF4-FFF2-40B4-BE49-F238E27FC236}">
-                <a16:creationId xmlns:a16="http://schemas.microsoft.com/office/drawing/2014/main" id="{9F81141A-720A-43CD-9016-1B5FAF7689C8}"/>
+                <a16:creationId xmlns:a16="http://schemas.microsoft.com/office/drawing/2014/main" id="{90AA633F-D610-41A4-93FC-4AF993E709D2}"/>
               </a:ext>
             </a:extLst>
           </p:cNvPr>
@@ -20437,7 +20437,7 @@
           <p:cNvPr id="5" name="text">
             <a:extLst xmlns:a="http://schemas.openxmlformats.org/drawingml/2006/main">
               <a:ext uri="{FF2B5EF4-FFF2-40B4-BE49-F238E27FC236}">
-                <a16:creationId xmlns:a16="http://schemas.microsoft.com/office/drawing/2014/main" id="{33AB3FAC-CEB7-49DF-B337-50877923EAC5}"/>
+                <a16:creationId xmlns:a16="http://schemas.microsoft.com/office/drawing/2014/main" id="{3A150543-D65F-401A-B3BE-2EC5B760832B}"/>
               </a:ext>
             </a:extLst>
           </p:cNvPr>
@@ -20505,7 +20505,7 @@
           <p:cNvPr id="6" name="text">
             <a:extLst xmlns:a="http://schemas.openxmlformats.org/drawingml/2006/main">
               <a:ext uri="{FF2B5EF4-FFF2-40B4-BE49-F238E27FC236}">
-                <a16:creationId xmlns:a16="http://schemas.microsoft.com/office/drawing/2014/main" id="{A2F057C4-9004-4D4B-AFB6-015BE5C68472}"/>
+                <a16:creationId xmlns:a16="http://schemas.microsoft.com/office/drawing/2014/main" id="{3194512B-4D52-490F-B231-2707F9BDCD67}"/>
               </a:ext>
             </a:extLst>
           </p:cNvPr>
@@ -20573,7 +20573,7 @@
           <p:cNvPr id="7" name="surface">
             <a:extLst xmlns:a="http://schemas.openxmlformats.org/drawingml/2006/main">
               <a:ext uri="{FF2B5EF4-FFF2-40B4-BE49-F238E27FC236}">
-                <a16:creationId xmlns:a16="http://schemas.microsoft.com/office/drawing/2014/main" id="{8A688DDE-52D3-4B8C-8AF0-6D1704B23F44}"/>
+                <a16:creationId xmlns:a16="http://schemas.microsoft.com/office/drawing/2014/main" id="{C5222695-6A63-40C4-BBF8-2A50C92214DD}"/>
               </a:ext>
             </a:extLst>
           </p:cNvPr>
@@ -20608,7 +20608,7 @@
           <p:cNvPr id="8" name="text">
             <a:extLst xmlns:a="http://schemas.openxmlformats.org/drawingml/2006/main">
               <a:ext uri="{FF2B5EF4-FFF2-40B4-BE49-F238E27FC236}">
-                <a16:creationId xmlns:a16="http://schemas.microsoft.com/office/drawing/2014/main" id="{B80F65AE-95FF-46BA-847E-C21EB0B2FC1A}"/>
+                <a16:creationId xmlns:a16="http://schemas.microsoft.com/office/drawing/2014/main" id="{C174AD0C-5A7F-4AAD-9B36-182CEC84C2D7}"/>
               </a:ext>
             </a:extLst>
           </p:cNvPr>
@@ -20676,7 +20676,7 @@
           <p:cNvPr id="9" name="text">
             <a:extLst xmlns:a="http://schemas.openxmlformats.org/drawingml/2006/main">
               <a:ext uri="{FF2B5EF4-FFF2-40B4-BE49-F238E27FC236}">
-                <a16:creationId xmlns:a16="http://schemas.microsoft.com/office/drawing/2014/main" id="{C64721C9-65D4-436D-A3FA-E25C5C98CED3}"/>
+                <a16:creationId xmlns:a16="http://schemas.microsoft.com/office/drawing/2014/main" id="{C2256BDD-BAA6-4A71-8DFB-D45DEB6D4818}"/>
               </a:ext>
             </a:extLst>
           </p:cNvPr>
@@ -20744,7 +20744,7 @@
           <p:cNvPr id="10" name="surface">
             <a:extLst xmlns:a="http://schemas.openxmlformats.org/drawingml/2006/main">
               <a:ext uri="{FF2B5EF4-FFF2-40B4-BE49-F238E27FC236}">
-                <a16:creationId xmlns:a16="http://schemas.microsoft.com/office/drawing/2014/main" id="{2A57E5BB-48A2-4957-8DF2-CB6567D9100B}"/>
+                <a16:creationId xmlns:a16="http://schemas.microsoft.com/office/drawing/2014/main" id="{E4F1A21F-635D-4887-B0DF-EAF99E00C0FC}"/>
               </a:ext>
             </a:extLst>
           </p:cNvPr>
@@ -20779,7 +20779,7 @@
           <p:cNvPr id="11" name="text">
             <a:extLst xmlns:a="http://schemas.openxmlformats.org/drawingml/2006/main">
               <a:ext uri="{FF2B5EF4-FFF2-40B4-BE49-F238E27FC236}">
-                <a16:creationId xmlns:a16="http://schemas.microsoft.com/office/drawing/2014/main" id="{58DEAB5C-808A-4E45-AD38-0A52DB6285EA}"/>
+                <a16:creationId xmlns:a16="http://schemas.microsoft.com/office/drawing/2014/main" id="{2C0855E9-5812-4DE2-8886-257C36B9DE4B}"/>
               </a:ext>
             </a:extLst>
           </p:cNvPr>
@@ -20847,7 +20847,7 @@
           <p:cNvPr id="12" name="text">
             <a:extLst xmlns:a="http://schemas.openxmlformats.org/drawingml/2006/main">
               <a:ext uri="{FF2B5EF4-FFF2-40B4-BE49-F238E27FC236}">
-                <a16:creationId xmlns:a16="http://schemas.microsoft.com/office/drawing/2014/main" id="{DCFC18CA-8B05-4915-B2D2-DB27C27031B5}"/>
+                <a16:creationId xmlns:a16="http://schemas.microsoft.com/office/drawing/2014/main" id="{E1391855-10AB-4A61-BE2E-4225C442C7D0}"/>
               </a:ext>
             </a:extLst>
           </p:cNvPr>
@@ -20915,7 +20915,7 @@
           <p:cNvPr id="13" name="surface">
             <a:extLst xmlns:a="http://schemas.openxmlformats.org/drawingml/2006/main">
               <a:ext uri="{FF2B5EF4-FFF2-40B4-BE49-F238E27FC236}">
-                <a16:creationId xmlns:a16="http://schemas.microsoft.com/office/drawing/2014/main" id="{22C6D33C-7C7B-46B5-B5EA-596712D60A5A}"/>
+                <a16:creationId xmlns:a16="http://schemas.microsoft.com/office/drawing/2014/main" id="{6D4F08D9-ACEC-4845-B685-04ADDD472741}"/>
               </a:ext>
             </a:extLst>
           </p:cNvPr>
@@ -20950,7 +20950,7 @@
           <p:cNvPr id="14" name="text">
             <a:extLst xmlns:a="http://schemas.openxmlformats.org/drawingml/2006/main">
               <a:ext uri="{FF2B5EF4-FFF2-40B4-BE49-F238E27FC236}">
-                <a16:creationId xmlns:a16="http://schemas.microsoft.com/office/drawing/2014/main" id="{ABFFD877-A06B-40F2-A0BA-A1D7CFA181A0}"/>
+                <a16:creationId xmlns:a16="http://schemas.microsoft.com/office/drawing/2014/main" id="{85DEAB6F-2D98-4EC2-B179-D6917DAABF76}"/>
               </a:ext>
             </a:extLst>
           </p:cNvPr>
@@ -21018,7 +21018,7 @@
           <p:cNvPr id="15" name="text">
             <a:extLst xmlns:a="http://schemas.openxmlformats.org/drawingml/2006/main">
               <a:ext uri="{FF2B5EF4-FFF2-40B4-BE49-F238E27FC236}">
-                <a16:creationId xmlns:a16="http://schemas.microsoft.com/office/drawing/2014/main" id="{827FF5D1-04C0-4C25-8C98-B2FBC58CDB3B}"/>
+                <a16:creationId xmlns:a16="http://schemas.microsoft.com/office/drawing/2014/main" id="{6100A7D3-DD9D-4131-BBE1-A279292B29AE}"/>
               </a:ext>
             </a:extLst>
           </p:cNvPr>
@@ -21086,7 +21086,7 @@
           <p:cNvPr id="16" name="surface">
             <a:extLst xmlns:a="http://schemas.openxmlformats.org/drawingml/2006/main">
               <a:ext uri="{FF2B5EF4-FFF2-40B4-BE49-F238E27FC236}">
-                <a16:creationId xmlns:a16="http://schemas.microsoft.com/office/drawing/2014/main" id="{412A7136-304C-45A8-9D2A-FAF8EC71510A}"/>
+                <a16:creationId xmlns:a16="http://schemas.microsoft.com/office/drawing/2014/main" id="{EF8C704E-4013-4F10-8939-C102B56A4BE2}"/>
               </a:ext>
             </a:extLst>
           </p:cNvPr>
@@ -21121,7 +21121,7 @@
           <p:cNvPr id="17" name="text">
             <a:extLst xmlns:a="http://schemas.openxmlformats.org/drawingml/2006/main">
               <a:ext uri="{FF2B5EF4-FFF2-40B4-BE49-F238E27FC236}">
-                <a16:creationId xmlns:a16="http://schemas.microsoft.com/office/drawing/2014/main" id="{6098B45B-F109-480B-A378-3111650DCC13}"/>
+                <a16:creationId xmlns:a16="http://schemas.microsoft.com/office/drawing/2014/main" id="{816F17A8-B6A2-4316-86D8-820CB5102C90}"/>
               </a:ext>
             </a:extLst>
           </p:cNvPr>
@@ -21189,7 +21189,7 @@
           <p:cNvPr id="18" name="text">
             <a:extLst xmlns:a="http://schemas.openxmlformats.org/drawingml/2006/main">
               <a:ext uri="{FF2B5EF4-FFF2-40B4-BE49-F238E27FC236}">
-                <a16:creationId xmlns:a16="http://schemas.microsoft.com/office/drawing/2014/main" id="{93DC1E8B-71A3-4652-A969-734C899AFF5A}"/>
+                <a16:creationId xmlns:a16="http://schemas.microsoft.com/office/drawing/2014/main" id="{4028ECE7-8A5F-4BC7-B288-E58D8404DA14}"/>
               </a:ext>
             </a:extLst>
           </p:cNvPr>
@@ -21257,7 +21257,7 @@
           <p:cNvPr id="19" name="surface">
             <a:extLst xmlns:a="http://schemas.openxmlformats.org/drawingml/2006/main">
               <a:ext uri="{FF2B5EF4-FFF2-40B4-BE49-F238E27FC236}">
-                <a16:creationId xmlns:a16="http://schemas.microsoft.com/office/drawing/2014/main" id="{7F0B0622-4159-417C-B196-E423CD00874B}"/>
+                <a16:creationId xmlns:a16="http://schemas.microsoft.com/office/drawing/2014/main" id="{00635A24-D287-4DE5-B29B-8A6DA3211BB3}"/>
               </a:ext>
             </a:extLst>
           </p:cNvPr>
@@ -21292,7 +21292,7 @@
           <p:cNvPr id="20" name="text">
             <a:extLst xmlns:a="http://schemas.openxmlformats.org/drawingml/2006/main">
               <a:ext uri="{FF2B5EF4-FFF2-40B4-BE49-F238E27FC236}">
-                <a16:creationId xmlns:a16="http://schemas.microsoft.com/office/drawing/2014/main" id="{D4CDA30B-0F5E-437E-8F1A-24B8A4A631D3}"/>
+                <a16:creationId xmlns:a16="http://schemas.microsoft.com/office/drawing/2014/main" id="{6AB699B0-7355-4981-A0DB-920F05A1FAFF}"/>
               </a:ext>
             </a:extLst>
           </p:cNvPr>
@@ -21360,7 +21360,7 @@
           <p:cNvPr id="21" name="text">
             <a:extLst xmlns:a="http://schemas.openxmlformats.org/drawingml/2006/main">
               <a:ext uri="{FF2B5EF4-FFF2-40B4-BE49-F238E27FC236}">
-                <a16:creationId xmlns:a16="http://schemas.microsoft.com/office/drawing/2014/main" id="{9851F6CC-7959-4C9C-9FA4-F7822A5893CA}"/>
+                <a16:creationId xmlns:a16="http://schemas.microsoft.com/office/drawing/2014/main" id="{2F4C6FCF-3A30-4801-BD8C-175D8D069368}"/>
               </a:ext>
             </a:extLst>
           </p:cNvPr>
@@ -21428,7 +21428,7 @@
           <p:cNvPr id="22" name="surface">
             <a:extLst xmlns:a="http://schemas.openxmlformats.org/drawingml/2006/main">
               <a:ext uri="{FF2B5EF4-FFF2-40B4-BE49-F238E27FC236}">
-                <a16:creationId xmlns:a16="http://schemas.microsoft.com/office/drawing/2014/main" id="{C1DF930A-3791-4193-827F-D05182962DA2}"/>
+                <a16:creationId xmlns:a16="http://schemas.microsoft.com/office/drawing/2014/main" id="{F6F25B83-C9C6-4C02-86FB-C2E46FF53A55}"/>
               </a:ext>
             </a:extLst>
           </p:cNvPr>
@@ -21463,7 +21463,7 @@
           <p:cNvPr id="23" name="text">
             <a:extLst xmlns:a="http://schemas.openxmlformats.org/drawingml/2006/main">
               <a:ext uri="{FF2B5EF4-FFF2-40B4-BE49-F238E27FC236}">
-                <a16:creationId xmlns:a16="http://schemas.microsoft.com/office/drawing/2014/main" id="{72AF3DF3-6D65-459E-BEDE-65149D52DEE3}"/>
+                <a16:creationId xmlns:a16="http://schemas.microsoft.com/office/drawing/2014/main" id="{04BAE470-A479-4CB8-B63B-FFD8D5580F34}"/>
               </a:ext>
             </a:extLst>
           </p:cNvPr>
@@ -21531,7 +21531,7 @@
           <p:cNvPr id="24" name="text">
             <a:extLst xmlns:a="http://schemas.openxmlformats.org/drawingml/2006/main">
               <a:ext uri="{FF2B5EF4-FFF2-40B4-BE49-F238E27FC236}">
-                <a16:creationId xmlns:a16="http://schemas.microsoft.com/office/drawing/2014/main" id="{BE157D3C-41CC-4765-A5C4-DEF33CAC8CCB}"/>
+                <a16:creationId xmlns:a16="http://schemas.microsoft.com/office/drawing/2014/main" id="{07F7A268-FF35-451D-849C-64D06B18F45C}"/>
               </a:ext>
             </a:extLst>
           </p:cNvPr>
@@ -21597,7 +21597,7 @@
     </p:spTree>
     <p:extLst>
       <p:ext uri="{BB962C8B-B14F-4D97-AF65-F5344CB8AC3E}">
-        <p14:creationId xmlns:p14="http://schemas.microsoft.com/office/powerpoint/2010/main" val="672233442"/>
+        <p14:creationId xmlns:p14="http://schemas.microsoft.com/office/powerpoint/2010/main" val="1404078390"/>
       </p:ext>
     </p:extLst>
   </p:cSld>
@@ -21628,7 +21628,7 @@
           <p:cNvPr id="1" name="top-accent">
             <a:extLst xmlns:a="http://schemas.openxmlformats.org/drawingml/2006/main">
               <a:ext uri="{FF2B5EF4-FFF2-40B4-BE49-F238E27FC236}">
-                <a16:creationId xmlns:a16="http://schemas.microsoft.com/office/drawing/2014/main" id="{D2A8062E-4313-48D4-B444-2C9A5FD5B71F}"/>
+                <a16:creationId xmlns:a16="http://schemas.microsoft.com/office/drawing/2014/main" id="{BAA99017-BE0C-440F-B8E7-FDAD2D8BC053}"/>
               </a:ext>
             </a:extLst>
           </p:cNvPr>
@@ -21663,7 +21663,7 @@
           <p:cNvPr id="2" name="bottom-line">
             <a:extLst xmlns:a="http://schemas.openxmlformats.org/drawingml/2006/main">
               <a:ext uri="{FF2B5EF4-FFF2-40B4-BE49-F238E27FC236}">
-                <a16:creationId xmlns:a16="http://schemas.microsoft.com/office/drawing/2014/main" id="{D9851E31-0786-4632-A206-91C4D36CC27E}"/>
+                <a16:creationId xmlns:a16="http://schemas.microsoft.com/office/drawing/2014/main" id="{3BA4EB8B-F116-4E7E-928A-B3E41990CAA8}"/>
               </a:ext>
             </a:extLst>
           </p:cNvPr>
@@ -21698,7 +21698,7 @@
           <p:cNvPr id="3" name="surface">
             <a:extLst xmlns:a="http://schemas.openxmlformats.org/drawingml/2006/main">
               <a:ext uri="{FF2B5EF4-FFF2-40B4-BE49-F238E27FC236}">
-                <a16:creationId xmlns:a16="http://schemas.microsoft.com/office/drawing/2014/main" id="{1DA5792C-53A6-4B4A-ABA4-015983EC6244}"/>
+                <a16:creationId xmlns:a16="http://schemas.microsoft.com/office/drawing/2014/main" id="{04E2A1E4-FF15-48C5-84FF-88E468D0BC2E}"/>
               </a:ext>
             </a:extLst>
           </p:cNvPr>
@@ -21760,7 +21760,7 @@
           <p:cNvPr id="4" name="text">
             <a:extLst xmlns:a="http://schemas.openxmlformats.org/drawingml/2006/main">
               <a:ext uri="{FF2B5EF4-FFF2-40B4-BE49-F238E27FC236}">
-                <a16:creationId xmlns:a16="http://schemas.microsoft.com/office/drawing/2014/main" id="{2B848829-6412-4250-BA28-6152A36F8BC0}"/>
+                <a16:creationId xmlns:a16="http://schemas.microsoft.com/office/drawing/2014/main" id="{531C95B1-297D-4BEF-BE06-37D27593F6D0}"/>
               </a:ext>
             </a:extLst>
           </p:cNvPr>
@@ -21828,7 +21828,7 @@
           <p:cNvPr id="5" name="text">
             <a:extLst xmlns:a="http://schemas.openxmlformats.org/drawingml/2006/main">
               <a:ext uri="{FF2B5EF4-FFF2-40B4-BE49-F238E27FC236}">
-                <a16:creationId xmlns:a16="http://schemas.microsoft.com/office/drawing/2014/main" id="{856E3821-FB02-41A5-A450-25790B3E8DA1}"/>
+                <a16:creationId xmlns:a16="http://schemas.microsoft.com/office/drawing/2014/main" id="{B6CF2009-441F-4264-87A5-261CDFDDC98A}"/>
               </a:ext>
             </a:extLst>
           </p:cNvPr>
@@ -21896,7 +21896,7 @@
           <p:cNvPr id="6" name="text">
             <a:extLst xmlns:a="http://schemas.openxmlformats.org/drawingml/2006/main">
               <a:ext uri="{FF2B5EF4-FFF2-40B4-BE49-F238E27FC236}">
-                <a16:creationId xmlns:a16="http://schemas.microsoft.com/office/drawing/2014/main" id="{E620E5F9-6B9B-4293-AA12-54BB42B19F64}"/>
+                <a16:creationId xmlns:a16="http://schemas.microsoft.com/office/drawing/2014/main" id="{C901A128-55BC-4187-8DF6-8585F6C02648}"/>
               </a:ext>
             </a:extLst>
           </p:cNvPr>
@@ -21964,7 +21964,7 @@
           <p:cNvPr id="7" name="surface">
             <a:extLst xmlns:a="http://schemas.openxmlformats.org/drawingml/2006/main">
               <a:ext uri="{FF2B5EF4-FFF2-40B4-BE49-F238E27FC236}">
-                <a16:creationId xmlns:a16="http://schemas.microsoft.com/office/drawing/2014/main" id="{CC525E9D-D9AF-46A7-88E0-FFCA2791CBE3}"/>
+                <a16:creationId xmlns:a16="http://schemas.microsoft.com/office/drawing/2014/main" id="{AA66CE19-0757-43BA-8DB9-5B2275599CBC}"/>
               </a:ext>
             </a:extLst>
           </p:cNvPr>
@@ -21999,7 +21999,7 @@
           <p:cNvPr id="8" name="metric-accent">
             <a:extLst xmlns:a="http://schemas.openxmlformats.org/drawingml/2006/main">
               <a:ext uri="{FF2B5EF4-FFF2-40B4-BE49-F238E27FC236}">
-                <a16:creationId xmlns:a16="http://schemas.microsoft.com/office/drawing/2014/main" id="{B4F6E300-E9E9-4172-8B1F-070FC71DF581}"/>
+                <a16:creationId xmlns:a16="http://schemas.microsoft.com/office/drawing/2014/main" id="{2D58CD6A-2D04-4C3F-9B20-B71E64659755}"/>
               </a:ext>
             </a:extLst>
           </p:cNvPr>
@@ -22034,7 +22034,7 @@
           <p:cNvPr id="9" name="text">
             <a:extLst xmlns:a="http://schemas.openxmlformats.org/drawingml/2006/main">
               <a:ext uri="{FF2B5EF4-FFF2-40B4-BE49-F238E27FC236}">
-                <a16:creationId xmlns:a16="http://schemas.microsoft.com/office/drawing/2014/main" id="{9E5F859D-A30F-4617-8C1D-8F750F48CAE7}"/>
+                <a16:creationId xmlns:a16="http://schemas.microsoft.com/office/drawing/2014/main" id="{BB2EF938-26CB-4466-9F2F-B7B40E0E6853}"/>
               </a:ext>
             </a:extLst>
           </p:cNvPr>
@@ -22102,7 +22102,7 @@
           <p:cNvPr id="10" name="text">
             <a:extLst xmlns:a="http://schemas.openxmlformats.org/drawingml/2006/main">
               <a:ext uri="{FF2B5EF4-FFF2-40B4-BE49-F238E27FC236}">
-                <a16:creationId xmlns:a16="http://schemas.microsoft.com/office/drawing/2014/main" id="{E0DAA0D0-502F-47B7-B3A0-F9C683B6264D}"/>
+                <a16:creationId xmlns:a16="http://schemas.microsoft.com/office/drawing/2014/main" id="{52235FFB-5CAC-4D4B-9123-5603E45A9D86}"/>
               </a:ext>
             </a:extLst>
           </p:cNvPr>
@@ -22170,7 +22170,7 @@
           <p:cNvPr id="11" name="text">
             <a:extLst xmlns:a="http://schemas.openxmlformats.org/drawingml/2006/main">
               <a:ext uri="{FF2B5EF4-FFF2-40B4-BE49-F238E27FC236}">
-                <a16:creationId xmlns:a16="http://schemas.microsoft.com/office/drawing/2014/main" id="{0143639A-4B33-4551-92CE-6558BEC16543}"/>
+                <a16:creationId xmlns:a16="http://schemas.microsoft.com/office/drawing/2014/main" id="{B9128BF3-439C-4673-A9D1-E919273F6CDC}"/>
               </a:ext>
             </a:extLst>
           </p:cNvPr>
@@ -22238,7 +22238,7 @@
           <p:cNvPr id="12" name="surface">
             <a:extLst xmlns:a="http://schemas.openxmlformats.org/drawingml/2006/main">
               <a:ext uri="{FF2B5EF4-FFF2-40B4-BE49-F238E27FC236}">
-                <a16:creationId xmlns:a16="http://schemas.microsoft.com/office/drawing/2014/main" id="{1EF1644F-E75B-4F3F-984B-0C04EC60C45A}"/>
+                <a16:creationId xmlns:a16="http://schemas.microsoft.com/office/drawing/2014/main" id="{179175AE-4E60-4F2F-8250-74187E8F12F4}"/>
               </a:ext>
             </a:extLst>
           </p:cNvPr>
@@ -22273,7 +22273,7 @@
           <p:cNvPr id="13" name="metric-accent">
             <a:extLst xmlns:a="http://schemas.openxmlformats.org/drawingml/2006/main">
               <a:ext uri="{FF2B5EF4-FFF2-40B4-BE49-F238E27FC236}">
-                <a16:creationId xmlns:a16="http://schemas.microsoft.com/office/drawing/2014/main" id="{BDDA77D3-B621-4CC6-92E3-E9513907E1DB}"/>
+                <a16:creationId xmlns:a16="http://schemas.microsoft.com/office/drawing/2014/main" id="{D44B7DBB-E9D3-4EC1-8A29-1B5A95323A47}"/>
               </a:ext>
             </a:extLst>
           </p:cNvPr>
@@ -22308,7 +22308,7 @@
           <p:cNvPr id="14" name="text">
             <a:extLst xmlns:a="http://schemas.openxmlformats.org/drawingml/2006/main">
               <a:ext uri="{FF2B5EF4-FFF2-40B4-BE49-F238E27FC236}">
-                <a16:creationId xmlns:a16="http://schemas.microsoft.com/office/drawing/2014/main" id="{53D43123-A6A7-4B3E-A196-EC54A11C09C6}"/>
+                <a16:creationId xmlns:a16="http://schemas.microsoft.com/office/drawing/2014/main" id="{4A50296A-4BB6-41CC-9EB8-99B89F558866}"/>
               </a:ext>
             </a:extLst>
           </p:cNvPr>
@@ -22376,7 +22376,7 @@
           <p:cNvPr id="15" name="text">
             <a:extLst xmlns:a="http://schemas.openxmlformats.org/drawingml/2006/main">
               <a:ext uri="{FF2B5EF4-FFF2-40B4-BE49-F238E27FC236}">
-                <a16:creationId xmlns:a16="http://schemas.microsoft.com/office/drawing/2014/main" id="{248AB470-6114-4598-9586-161838E627DE}"/>
+                <a16:creationId xmlns:a16="http://schemas.microsoft.com/office/drawing/2014/main" id="{2C396399-5285-4F38-A962-E384E674A86E}"/>
               </a:ext>
             </a:extLst>
           </p:cNvPr>
@@ -22444,7 +22444,7 @@
           <p:cNvPr id="16" name="text">
             <a:extLst xmlns:a="http://schemas.openxmlformats.org/drawingml/2006/main">
               <a:ext uri="{FF2B5EF4-FFF2-40B4-BE49-F238E27FC236}">
-                <a16:creationId xmlns:a16="http://schemas.microsoft.com/office/drawing/2014/main" id="{23DB6503-375E-4BEA-8975-C29E26618C9E}"/>
+                <a16:creationId xmlns:a16="http://schemas.microsoft.com/office/drawing/2014/main" id="{5D4CB802-E5D3-409E-B170-13F0C7E61A0A}"/>
               </a:ext>
             </a:extLst>
           </p:cNvPr>
@@ -22512,7 +22512,7 @@
           <p:cNvPr id="17" name="surface">
             <a:extLst xmlns:a="http://schemas.openxmlformats.org/drawingml/2006/main">
               <a:ext uri="{FF2B5EF4-FFF2-40B4-BE49-F238E27FC236}">
-                <a16:creationId xmlns:a16="http://schemas.microsoft.com/office/drawing/2014/main" id="{9B69F6AE-5BC3-43FF-9B58-732161DE7642}"/>
+                <a16:creationId xmlns:a16="http://schemas.microsoft.com/office/drawing/2014/main" id="{8683353C-3162-461D-B4B0-81FBC04AE5BA}"/>
               </a:ext>
             </a:extLst>
           </p:cNvPr>
@@ -22547,7 +22547,7 @@
           <p:cNvPr id="18" name="metric-accent">
             <a:extLst xmlns:a="http://schemas.openxmlformats.org/drawingml/2006/main">
               <a:ext uri="{FF2B5EF4-FFF2-40B4-BE49-F238E27FC236}">
-                <a16:creationId xmlns:a16="http://schemas.microsoft.com/office/drawing/2014/main" id="{250F97AA-A6C8-451F-A2B4-36447B777A9A}"/>
+                <a16:creationId xmlns:a16="http://schemas.microsoft.com/office/drawing/2014/main" id="{DA0A0F85-6A73-4F68-933C-DB4C4A37B5D4}"/>
               </a:ext>
             </a:extLst>
           </p:cNvPr>
@@ -22582,7 +22582,7 @@
           <p:cNvPr id="19" name="text">
             <a:extLst xmlns:a="http://schemas.openxmlformats.org/drawingml/2006/main">
               <a:ext uri="{FF2B5EF4-FFF2-40B4-BE49-F238E27FC236}">
-                <a16:creationId xmlns:a16="http://schemas.microsoft.com/office/drawing/2014/main" id="{95401F38-BFBF-4695-AE6E-185F6254B8BD}"/>
+                <a16:creationId xmlns:a16="http://schemas.microsoft.com/office/drawing/2014/main" id="{F723017E-C5EC-40B6-B19B-F06AAD858CA0}"/>
               </a:ext>
             </a:extLst>
           </p:cNvPr>
@@ -22650,7 +22650,7 @@
           <p:cNvPr id="20" name="text">
             <a:extLst xmlns:a="http://schemas.openxmlformats.org/drawingml/2006/main">
               <a:ext uri="{FF2B5EF4-FFF2-40B4-BE49-F238E27FC236}">
-                <a16:creationId xmlns:a16="http://schemas.microsoft.com/office/drawing/2014/main" id="{768DB2A1-E39A-4264-8934-B092EF742BE9}"/>
+                <a16:creationId xmlns:a16="http://schemas.microsoft.com/office/drawing/2014/main" id="{AE5000F6-F150-43FA-A6DC-581D9CF8AE70}"/>
               </a:ext>
             </a:extLst>
           </p:cNvPr>
@@ -22718,7 +22718,7 @@
           <p:cNvPr id="21" name="text">
             <a:extLst xmlns:a="http://schemas.openxmlformats.org/drawingml/2006/main">
               <a:ext uri="{FF2B5EF4-FFF2-40B4-BE49-F238E27FC236}">
-                <a16:creationId xmlns:a16="http://schemas.microsoft.com/office/drawing/2014/main" id="{8BB774DF-006E-406C-A0E4-6E71C74571FD}"/>
+                <a16:creationId xmlns:a16="http://schemas.microsoft.com/office/drawing/2014/main" id="{B3000CEC-6465-4DE7-930A-C769A687D355}"/>
               </a:ext>
             </a:extLst>
           </p:cNvPr>
@@ -22786,7 +22786,7 @@
           <p:cNvPr id="22" name="surface">
             <a:extLst xmlns:a="http://schemas.openxmlformats.org/drawingml/2006/main">
               <a:ext uri="{FF2B5EF4-FFF2-40B4-BE49-F238E27FC236}">
-                <a16:creationId xmlns:a16="http://schemas.microsoft.com/office/drawing/2014/main" id="{5788E2A0-EB56-4E39-9450-72958F1A4501}"/>
+                <a16:creationId xmlns:a16="http://schemas.microsoft.com/office/drawing/2014/main" id="{52EA7D59-5604-4438-9529-101A82E85796}"/>
               </a:ext>
             </a:extLst>
           </p:cNvPr>
@@ -22821,7 +22821,7 @@
           <p:cNvPr id="23" name="text">
             <a:extLst xmlns:a="http://schemas.openxmlformats.org/drawingml/2006/main">
               <a:ext uri="{FF2B5EF4-FFF2-40B4-BE49-F238E27FC236}">
-                <a16:creationId xmlns:a16="http://schemas.microsoft.com/office/drawing/2014/main" id="{7E2D9CC0-1B70-4B3A-AB19-D054825AAE70}"/>
+                <a16:creationId xmlns:a16="http://schemas.microsoft.com/office/drawing/2014/main" id="{31393C77-4861-4535-B68A-B34FE7825CB9}"/>
               </a:ext>
             </a:extLst>
           </p:cNvPr>
@@ -22889,7 +22889,7 @@
           <p:cNvPr id="24" name="text">
             <a:extLst xmlns:a="http://schemas.openxmlformats.org/drawingml/2006/main">
               <a:ext uri="{FF2B5EF4-FFF2-40B4-BE49-F238E27FC236}">
-                <a16:creationId xmlns:a16="http://schemas.microsoft.com/office/drawing/2014/main" id="{128BE82A-C1F1-413F-BF4C-A23A15732AB5}"/>
+                <a16:creationId xmlns:a16="http://schemas.microsoft.com/office/drawing/2014/main" id="{DEF71760-B49C-4004-A1EE-47030E3DC751}"/>
               </a:ext>
             </a:extLst>
           </p:cNvPr>
@@ -22955,7 +22955,7 @@
     </p:spTree>
     <p:extLst>
       <p:ext uri="{BB962C8B-B14F-4D97-AF65-F5344CB8AC3E}">
-        <p14:creationId xmlns:p14="http://schemas.microsoft.com/office/powerpoint/2010/main" val="189394516"/>
+        <p14:creationId xmlns:p14="http://schemas.microsoft.com/office/powerpoint/2010/main" val="1936446461"/>
       </p:ext>
     </p:extLst>
   </p:cSld>
@@ -22986,7 +22986,7 @@
           <p:cNvPr id="1" name="top-accent">
             <a:extLst xmlns:a="http://schemas.openxmlformats.org/drawingml/2006/main">
               <a:ext uri="{FF2B5EF4-FFF2-40B4-BE49-F238E27FC236}">
-                <a16:creationId xmlns:a16="http://schemas.microsoft.com/office/drawing/2014/main" id="{D04C892D-415F-4D13-A82B-88A3628E20D4}"/>
+                <a16:creationId xmlns:a16="http://schemas.microsoft.com/office/drawing/2014/main" id="{99D5D56C-B7EE-4B4D-BAD6-64720DC9A01F}"/>
               </a:ext>
             </a:extLst>
           </p:cNvPr>
@@ -23021,7 +23021,7 @@
           <p:cNvPr id="2" name="bottom-line">
             <a:extLst xmlns:a="http://schemas.openxmlformats.org/drawingml/2006/main">
               <a:ext uri="{FF2B5EF4-FFF2-40B4-BE49-F238E27FC236}">
-                <a16:creationId xmlns:a16="http://schemas.microsoft.com/office/drawing/2014/main" id="{D87DB15B-12A6-4E0F-8F72-A92FD3DD10EC}"/>
+                <a16:creationId xmlns:a16="http://schemas.microsoft.com/office/drawing/2014/main" id="{90BAD35D-1658-4A05-8E3F-824F36D53CFC}"/>
               </a:ext>
             </a:extLst>
           </p:cNvPr>
@@ -23056,7 +23056,7 @@
           <p:cNvPr id="3" name="surface">
             <a:extLst xmlns:a="http://schemas.openxmlformats.org/drawingml/2006/main">
               <a:ext uri="{FF2B5EF4-FFF2-40B4-BE49-F238E27FC236}">
-                <a16:creationId xmlns:a16="http://schemas.microsoft.com/office/drawing/2014/main" id="{7A704291-AEBC-44BE-819F-D7FF6694F418}"/>
+                <a16:creationId xmlns:a16="http://schemas.microsoft.com/office/drawing/2014/main" id="{1EFE19B9-0423-4AF8-8635-AD6801F506EE}"/>
               </a:ext>
             </a:extLst>
           </p:cNvPr>
@@ -23118,7 +23118,7 @@
           <p:cNvPr id="4" name="text">
             <a:extLst xmlns:a="http://schemas.openxmlformats.org/drawingml/2006/main">
               <a:ext uri="{FF2B5EF4-FFF2-40B4-BE49-F238E27FC236}">
-                <a16:creationId xmlns:a16="http://schemas.microsoft.com/office/drawing/2014/main" id="{A2089E0D-B67B-4799-8CD3-19EDEB3E9D8D}"/>
+                <a16:creationId xmlns:a16="http://schemas.microsoft.com/office/drawing/2014/main" id="{0F67EA2B-E2DC-4317-9854-1844D3373D35}"/>
               </a:ext>
             </a:extLst>
           </p:cNvPr>
@@ -23186,7 +23186,7 @@
           <p:cNvPr id="5" name="text">
             <a:extLst xmlns:a="http://schemas.openxmlformats.org/drawingml/2006/main">
               <a:ext uri="{FF2B5EF4-FFF2-40B4-BE49-F238E27FC236}">
-                <a16:creationId xmlns:a16="http://schemas.microsoft.com/office/drawing/2014/main" id="{BB06C731-BC03-41BC-9E06-46CA537050E7}"/>
+                <a16:creationId xmlns:a16="http://schemas.microsoft.com/office/drawing/2014/main" id="{57536554-DBEE-47DA-A208-EC3E7E881D68}"/>
               </a:ext>
             </a:extLst>
           </p:cNvPr>
@@ -23254,7 +23254,7 @@
           <p:cNvPr id="6" name="text">
             <a:extLst xmlns:a="http://schemas.openxmlformats.org/drawingml/2006/main">
               <a:ext uri="{FF2B5EF4-FFF2-40B4-BE49-F238E27FC236}">
-                <a16:creationId xmlns:a16="http://schemas.microsoft.com/office/drawing/2014/main" id="{E5D841A0-2659-4B1A-AD69-084E665A7216}"/>
+                <a16:creationId xmlns:a16="http://schemas.microsoft.com/office/drawing/2014/main" id="{8CB4A1D2-1165-40CD-BE62-24ABAA05C8A0}"/>
               </a:ext>
             </a:extLst>
           </p:cNvPr>
@@ -23322,7 +23322,7 @@
           <p:cNvPr id="7" name="surface">
             <a:extLst xmlns:a="http://schemas.openxmlformats.org/drawingml/2006/main">
               <a:ext uri="{FF2B5EF4-FFF2-40B4-BE49-F238E27FC236}">
-                <a16:creationId xmlns:a16="http://schemas.microsoft.com/office/drawing/2014/main" id="{96BE49F0-E125-412D-A443-FBA33CE58926}"/>
+                <a16:creationId xmlns:a16="http://schemas.microsoft.com/office/drawing/2014/main" id="{A92BC888-C766-4539-9B76-0037F6497B71}"/>
               </a:ext>
             </a:extLst>
           </p:cNvPr>
@@ -23357,7 +23357,7 @@
           <p:cNvPr id="8" name="surface">
             <a:extLst xmlns:a="http://schemas.openxmlformats.org/drawingml/2006/main">
               <a:ext uri="{FF2B5EF4-FFF2-40B4-BE49-F238E27FC236}">
-                <a16:creationId xmlns:a16="http://schemas.microsoft.com/office/drawing/2014/main" id="{DE666E5B-DDD1-4BF8-BAF2-1836DEA8FB41}"/>
+                <a16:creationId xmlns:a16="http://schemas.microsoft.com/office/drawing/2014/main" id="{EE458C24-F1B3-42A2-B469-D8245068EF95}"/>
               </a:ext>
             </a:extLst>
           </p:cNvPr>
@@ -23394,7 +23394,7 @@
           <p:cNvPr id="9" name="text">
             <a:extLst xmlns:a="http://schemas.openxmlformats.org/drawingml/2006/main">
               <a:ext uri="{FF2B5EF4-FFF2-40B4-BE49-F238E27FC236}">
-                <a16:creationId xmlns:a16="http://schemas.microsoft.com/office/drawing/2014/main" id="{A04B2082-18A9-4660-92DD-89D0A0282F9E}"/>
+                <a16:creationId xmlns:a16="http://schemas.microsoft.com/office/drawing/2014/main" id="{C48377C4-9818-4C6E-8E9D-A7A46AC76240}"/>
               </a:ext>
             </a:extLst>
           </p:cNvPr>
@@ -23462,7 +23462,7 @@
           <p:cNvPr id="10" name="text">
             <a:extLst xmlns:a="http://schemas.openxmlformats.org/drawingml/2006/main">
               <a:ext uri="{FF2B5EF4-FFF2-40B4-BE49-F238E27FC236}">
-                <a16:creationId xmlns:a16="http://schemas.microsoft.com/office/drawing/2014/main" id="{232BBD5E-F8DC-4C3E-AE77-8A756FE63B7D}"/>
+                <a16:creationId xmlns:a16="http://schemas.microsoft.com/office/drawing/2014/main" id="{71EA78CE-C0F8-4269-BC2F-D3E64B7E3158}"/>
               </a:ext>
             </a:extLst>
           </p:cNvPr>
@@ -23530,7 +23530,7 @@
           <p:cNvPr id="11" name="surface">
             <a:extLst xmlns:a="http://schemas.openxmlformats.org/drawingml/2006/main">
               <a:ext uri="{FF2B5EF4-FFF2-40B4-BE49-F238E27FC236}">
-                <a16:creationId xmlns:a16="http://schemas.microsoft.com/office/drawing/2014/main" id="{0DB37C94-5D1F-45BE-9751-E0C9C4A2C8FB}"/>
+                <a16:creationId xmlns:a16="http://schemas.microsoft.com/office/drawing/2014/main" id="{B46E3A47-50E5-467A-B33E-EE797F318AF3}"/>
               </a:ext>
             </a:extLst>
           </p:cNvPr>
@@ -23565,7 +23565,7 @@
           <p:cNvPr id="12" name="surface">
             <a:extLst xmlns:a="http://schemas.openxmlformats.org/drawingml/2006/main">
               <a:ext uri="{FF2B5EF4-FFF2-40B4-BE49-F238E27FC236}">
-                <a16:creationId xmlns:a16="http://schemas.microsoft.com/office/drawing/2014/main" id="{AF1E0A18-FC55-41EE-A98E-23A8A4093CF9}"/>
+                <a16:creationId xmlns:a16="http://schemas.microsoft.com/office/drawing/2014/main" id="{79F9B810-CF20-41E3-B7DC-58AC2FED9A3B}"/>
               </a:ext>
             </a:extLst>
           </p:cNvPr>
@@ -23602,7 +23602,7 @@
           <p:cNvPr id="13" name="text">
             <a:extLst xmlns:a="http://schemas.openxmlformats.org/drawingml/2006/main">
               <a:ext uri="{FF2B5EF4-FFF2-40B4-BE49-F238E27FC236}">
-                <a16:creationId xmlns:a16="http://schemas.microsoft.com/office/drawing/2014/main" id="{301AF5DA-6666-40EE-89E2-1A1788D9A18F}"/>
+                <a16:creationId xmlns:a16="http://schemas.microsoft.com/office/drawing/2014/main" id="{2179CEE1-F61B-48A6-A40B-AEF581014818}"/>
               </a:ext>
             </a:extLst>
           </p:cNvPr>
@@ -23670,7 +23670,7 @@
           <p:cNvPr id="14" name="text">
             <a:extLst xmlns:a="http://schemas.openxmlformats.org/drawingml/2006/main">
               <a:ext uri="{FF2B5EF4-FFF2-40B4-BE49-F238E27FC236}">
-                <a16:creationId xmlns:a16="http://schemas.microsoft.com/office/drawing/2014/main" id="{17DA3088-EAFA-4F9B-BB68-42BAF048222A}"/>
+                <a16:creationId xmlns:a16="http://schemas.microsoft.com/office/drawing/2014/main" id="{20A6EFD6-96F7-43D9-ABC7-A9F0DDAD2638}"/>
               </a:ext>
             </a:extLst>
           </p:cNvPr>
@@ -23738,7 +23738,7 @@
           <p:cNvPr id="15" name="surface">
             <a:extLst xmlns:a="http://schemas.openxmlformats.org/drawingml/2006/main">
               <a:ext uri="{FF2B5EF4-FFF2-40B4-BE49-F238E27FC236}">
-                <a16:creationId xmlns:a16="http://schemas.microsoft.com/office/drawing/2014/main" id="{29125349-3010-4612-B3D9-CB7B89160025}"/>
+                <a16:creationId xmlns:a16="http://schemas.microsoft.com/office/drawing/2014/main" id="{D94760F1-4B37-4CDC-9011-4DA5A8AB2B8B}"/>
               </a:ext>
             </a:extLst>
           </p:cNvPr>
@@ -23773,7 +23773,7 @@
           <p:cNvPr id="16" name="surface">
             <a:extLst xmlns:a="http://schemas.openxmlformats.org/drawingml/2006/main">
               <a:ext uri="{FF2B5EF4-FFF2-40B4-BE49-F238E27FC236}">
-                <a16:creationId xmlns:a16="http://schemas.microsoft.com/office/drawing/2014/main" id="{B397FE79-877F-416B-BF77-D4A353EF4D70}"/>
+                <a16:creationId xmlns:a16="http://schemas.microsoft.com/office/drawing/2014/main" id="{7170A990-249B-4E29-93F5-166087CDDBCB}"/>
               </a:ext>
             </a:extLst>
           </p:cNvPr>
@@ -23810,7 +23810,7 @@
           <p:cNvPr id="17" name="text">
             <a:extLst xmlns:a="http://schemas.openxmlformats.org/drawingml/2006/main">
               <a:ext uri="{FF2B5EF4-FFF2-40B4-BE49-F238E27FC236}">
-                <a16:creationId xmlns:a16="http://schemas.microsoft.com/office/drawing/2014/main" id="{245E8FBA-055C-4CFC-9010-2C744C55EFCD}"/>
+                <a16:creationId xmlns:a16="http://schemas.microsoft.com/office/drawing/2014/main" id="{F676B638-DAD2-4D38-AED6-4C6CBF15EA0E}"/>
               </a:ext>
             </a:extLst>
           </p:cNvPr>
@@ -23878,7 +23878,7 @@
           <p:cNvPr id="18" name="text">
             <a:extLst xmlns:a="http://schemas.openxmlformats.org/drawingml/2006/main">
               <a:ext uri="{FF2B5EF4-FFF2-40B4-BE49-F238E27FC236}">
-                <a16:creationId xmlns:a16="http://schemas.microsoft.com/office/drawing/2014/main" id="{2F7C6F28-6E7F-4B81-804D-7CE5D624CAFA}"/>
+                <a16:creationId xmlns:a16="http://schemas.microsoft.com/office/drawing/2014/main" id="{8E126DC5-F4B3-430D-AE3E-D4BCCE848E21}"/>
               </a:ext>
             </a:extLst>
           </p:cNvPr>
@@ -23946,7 +23946,7 @@
           <p:cNvPr id="19" name="surface">
             <a:extLst xmlns:a="http://schemas.openxmlformats.org/drawingml/2006/main">
               <a:ext uri="{FF2B5EF4-FFF2-40B4-BE49-F238E27FC236}">
-                <a16:creationId xmlns:a16="http://schemas.microsoft.com/office/drawing/2014/main" id="{C01EDFA3-CB7D-4686-BBAD-9DE6D6DAE8A0}"/>
+                <a16:creationId xmlns:a16="http://schemas.microsoft.com/office/drawing/2014/main" id="{50B840CE-4520-4E0C-8028-CF1B881FA191}"/>
               </a:ext>
             </a:extLst>
           </p:cNvPr>
@@ -23981,7 +23981,7 @@
           <p:cNvPr id="20" name="text">
             <a:extLst xmlns:a="http://schemas.openxmlformats.org/drawingml/2006/main">
               <a:ext uri="{FF2B5EF4-FFF2-40B4-BE49-F238E27FC236}">
-                <a16:creationId xmlns:a16="http://schemas.microsoft.com/office/drawing/2014/main" id="{B0DEEF60-906E-4228-A329-46FFBC05CD72}"/>
+                <a16:creationId xmlns:a16="http://schemas.microsoft.com/office/drawing/2014/main" id="{9A016F5C-3580-4F5D-B4C9-17C8E0501601}"/>
               </a:ext>
             </a:extLst>
           </p:cNvPr>
@@ -24049,7 +24049,7 @@
           <p:cNvPr id="21" name="text">
             <a:extLst xmlns:a="http://schemas.openxmlformats.org/drawingml/2006/main">
               <a:ext uri="{FF2B5EF4-FFF2-40B4-BE49-F238E27FC236}">
-                <a16:creationId xmlns:a16="http://schemas.microsoft.com/office/drawing/2014/main" id="{92185E95-E4D5-4074-90FC-E5E9DD2A4F71}"/>
+                <a16:creationId xmlns:a16="http://schemas.microsoft.com/office/drawing/2014/main" id="{D1C2CB8C-941C-4DD2-BDA9-6D83E88972AF}"/>
               </a:ext>
             </a:extLst>
           </p:cNvPr>
@@ -24115,7 +24115,7 @@
     </p:spTree>
     <p:extLst>
       <p:ext uri="{BB962C8B-B14F-4D97-AF65-F5344CB8AC3E}">
-        <p14:creationId xmlns:p14="http://schemas.microsoft.com/office/powerpoint/2010/main" val="1427450603"/>
+        <p14:creationId xmlns:p14="http://schemas.microsoft.com/office/powerpoint/2010/main" val="1335173085"/>
       </p:ext>
     </p:extLst>
   </p:cSld>
@@ -24146,7 +24146,7 @@
           <p:cNvPr id="1" name="top-accent">
             <a:extLst xmlns:a="http://schemas.openxmlformats.org/drawingml/2006/main">
               <a:ext uri="{FF2B5EF4-FFF2-40B4-BE49-F238E27FC236}">
-                <a16:creationId xmlns:a16="http://schemas.microsoft.com/office/drawing/2014/main" id="{B373AF3B-1B86-487F-BF6C-B5729D89A079}"/>
+                <a16:creationId xmlns:a16="http://schemas.microsoft.com/office/drawing/2014/main" id="{8D0B2BAD-207B-4AA3-A37F-077BEDFE58A3}"/>
               </a:ext>
             </a:extLst>
           </p:cNvPr>
@@ -24181,7 +24181,7 @@
           <p:cNvPr id="2" name="bottom-line">
             <a:extLst xmlns:a="http://schemas.openxmlformats.org/drawingml/2006/main">
               <a:ext uri="{FF2B5EF4-FFF2-40B4-BE49-F238E27FC236}">
-                <a16:creationId xmlns:a16="http://schemas.microsoft.com/office/drawing/2014/main" id="{E1D165E0-E9F3-4B28-9457-8D9032C1F232}"/>
+                <a16:creationId xmlns:a16="http://schemas.microsoft.com/office/drawing/2014/main" id="{A4B04410-F36A-4E1B-B416-F9A8DE900ADF}"/>
               </a:ext>
             </a:extLst>
           </p:cNvPr>
@@ -24216,7 +24216,7 @@
           <p:cNvPr id="3" name="surface">
             <a:extLst xmlns:a="http://schemas.openxmlformats.org/drawingml/2006/main">
               <a:ext uri="{FF2B5EF4-FFF2-40B4-BE49-F238E27FC236}">
-                <a16:creationId xmlns:a16="http://schemas.microsoft.com/office/drawing/2014/main" id="{40AA6A39-7969-443E-B7AF-5E2D816CA4C6}"/>
+                <a16:creationId xmlns:a16="http://schemas.microsoft.com/office/drawing/2014/main" id="{F92E37C4-1A4C-4D9E-910A-D5D26729BE4B}"/>
               </a:ext>
             </a:extLst>
           </p:cNvPr>
@@ -24278,7 +24278,7 @@
           <p:cNvPr id="4" name="text">
             <a:extLst xmlns:a="http://schemas.openxmlformats.org/drawingml/2006/main">
               <a:ext uri="{FF2B5EF4-FFF2-40B4-BE49-F238E27FC236}">
-                <a16:creationId xmlns:a16="http://schemas.microsoft.com/office/drawing/2014/main" id="{6172425B-E86B-4159-866B-80F3109D5E71}"/>
+                <a16:creationId xmlns:a16="http://schemas.microsoft.com/office/drawing/2014/main" id="{BF2A8B91-3AE3-44BB-89A5-7A70B0B5C726}"/>
               </a:ext>
             </a:extLst>
           </p:cNvPr>
@@ -24346,7 +24346,7 @@
           <p:cNvPr id="5" name="text">
             <a:extLst xmlns:a="http://schemas.openxmlformats.org/drawingml/2006/main">
               <a:ext uri="{FF2B5EF4-FFF2-40B4-BE49-F238E27FC236}">
-                <a16:creationId xmlns:a16="http://schemas.microsoft.com/office/drawing/2014/main" id="{6BCEB8A7-BEF0-487D-BA5C-F1CEEC889EFC}"/>
+                <a16:creationId xmlns:a16="http://schemas.microsoft.com/office/drawing/2014/main" id="{E21F206E-4238-4906-8DB8-3E59A0CC9457}"/>
               </a:ext>
             </a:extLst>
           </p:cNvPr>
@@ -24414,7 +24414,7 @@
           <p:cNvPr id="6" name="text">
             <a:extLst xmlns:a="http://schemas.openxmlformats.org/drawingml/2006/main">
               <a:ext uri="{FF2B5EF4-FFF2-40B4-BE49-F238E27FC236}">
-                <a16:creationId xmlns:a16="http://schemas.microsoft.com/office/drawing/2014/main" id="{5EEA7F7F-21BD-4DD9-9B0E-9466F3D79A36}"/>
+                <a16:creationId xmlns:a16="http://schemas.microsoft.com/office/drawing/2014/main" id="{507A577F-F3E4-43DD-AE90-2858660A63C5}"/>
               </a:ext>
             </a:extLst>
           </p:cNvPr>
@@ -25142,7 +25142,7 @@
           <p:cNvPr id="8" name="surface">
             <a:extLst xmlns:a="http://schemas.openxmlformats.org/drawingml/2006/main">
               <a:ext uri="{FF2B5EF4-FFF2-40B4-BE49-F238E27FC236}">
-                <a16:creationId xmlns:a16="http://schemas.microsoft.com/office/drawing/2014/main" id="{FE5E91BB-B906-4CC3-84A8-0E99E4754B0F}"/>
+                <a16:creationId xmlns:a16="http://schemas.microsoft.com/office/drawing/2014/main" id="{F2A0CBEB-2AB0-43E9-8964-A482CEA79112}"/>
               </a:ext>
             </a:extLst>
           </p:cNvPr>
@@ -25177,7 +25177,7 @@
           <p:cNvPr id="9" name="text">
             <a:extLst xmlns:a="http://schemas.openxmlformats.org/drawingml/2006/main">
               <a:ext uri="{FF2B5EF4-FFF2-40B4-BE49-F238E27FC236}">
-                <a16:creationId xmlns:a16="http://schemas.microsoft.com/office/drawing/2014/main" id="{332A6C03-548F-4B93-B700-5391EC7A4D7D}"/>
+                <a16:creationId xmlns:a16="http://schemas.microsoft.com/office/drawing/2014/main" id="{EF10F38C-8915-406D-8FC8-F42D9DA71764}"/>
               </a:ext>
             </a:extLst>
           </p:cNvPr>
@@ -25245,7 +25245,7 @@
           <p:cNvPr id="10" name="text">
             <a:extLst xmlns:a="http://schemas.openxmlformats.org/drawingml/2006/main">
               <a:ext uri="{FF2B5EF4-FFF2-40B4-BE49-F238E27FC236}">
-                <a16:creationId xmlns:a16="http://schemas.microsoft.com/office/drawing/2014/main" id="{65808F7A-8BCA-41AA-AA7C-9BDA2217FAFC}"/>
+                <a16:creationId xmlns:a16="http://schemas.microsoft.com/office/drawing/2014/main" id="{A1EAE121-A590-4C19-A04C-47D0DBC95205}"/>
               </a:ext>
             </a:extLst>
           </p:cNvPr>
@@ -25311,7 +25311,7 @@
     </p:spTree>
     <p:extLst>
       <p:ext uri="{BB962C8B-B14F-4D97-AF65-F5344CB8AC3E}">
-        <p14:creationId xmlns:p14="http://schemas.microsoft.com/office/powerpoint/2010/main" val="95387831"/>
+        <p14:creationId xmlns:p14="http://schemas.microsoft.com/office/powerpoint/2010/main" val="516857156"/>
       </p:ext>
     </p:extLst>
   </p:cSld>
@@ -25342,7 +25342,7 @@
           <p:cNvPr id="1" name="top-accent">
             <a:extLst xmlns:a="http://schemas.openxmlformats.org/drawingml/2006/main">
               <a:ext uri="{FF2B5EF4-FFF2-40B4-BE49-F238E27FC236}">
-                <a16:creationId xmlns:a16="http://schemas.microsoft.com/office/drawing/2014/main" id="{1B9D7E36-C06F-4CC8-A19D-DD3C15D5A752}"/>
+                <a16:creationId xmlns:a16="http://schemas.microsoft.com/office/drawing/2014/main" id="{13EFC0B5-9283-4A94-A973-6383661CF1DB}"/>
               </a:ext>
             </a:extLst>
           </p:cNvPr>
@@ -25377,7 +25377,7 @@
           <p:cNvPr id="2" name="bottom-line">
             <a:extLst xmlns:a="http://schemas.openxmlformats.org/drawingml/2006/main">
               <a:ext uri="{FF2B5EF4-FFF2-40B4-BE49-F238E27FC236}">
-                <a16:creationId xmlns:a16="http://schemas.microsoft.com/office/drawing/2014/main" id="{1EC47139-1D4D-4915-8696-DD852F8ACAD0}"/>
+                <a16:creationId xmlns:a16="http://schemas.microsoft.com/office/drawing/2014/main" id="{F09B2960-62AA-4E1F-819A-1AD00EC22376}"/>
               </a:ext>
             </a:extLst>
           </p:cNvPr>
@@ -25412,7 +25412,7 @@
           <p:cNvPr id="3" name="surface">
             <a:extLst xmlns:a="http://schemas.openxmlformats.org/drawingml/2006/main">
               <a:ext uri="{FF2B5EF4-FFF2-40B4-BE49-F238E27FC236}">
-                <a16:creationId xmlns:a16="http://schemas.microsoft.com/office/drawing/2014/main" id="{73514864-8F79-491C-BC05-A69E201192BD}"/>
+                <a16:creationId xmlns:a16="http://schemas.microsoft.com/office/drawing/2014/main" id="{240C57DF-67D4-4C5C-9DD7-ED6620733F53}"/>
               </a:ext>
             </a:extLst>
           </p:cNvPr>
@@ -25474,7 +25474,7 @@
           <p:cNvPr id="4" name="text">
             <a:extLst xmlns:a="http://schemas.openxmlformats.org/drawingml/2006/main">
               <a:ext uri="{FF2B5EF4-FFF2-40B4-BE49-F238E27FC236}">
-                <a16:creationId xmlns:a16="http://schemas.microsoft.com/office/drawing/2014/main" id="{CD5481EC-93F7-444D-8E5C-99EAA0D7DA8F}"/>
+                <a16:creationId xmlns:a16="http://schemas.microsoft.com/office/drawing/2014/main" id="{66049CEF-B3A5-435E-A5D5-838B83B6BCBA}"/>
               </a:ext>
             </a:extLst>
           </p:cNvPr>
@@ -25542,7 +25542,7 @@
           <p:cNvPr id="5" name="text">
             <a:extLst xmlns:a="http://schemas.openxmlformats.org/drawingml/2006/main">
               <a:ext uri="{FF2B5EF4-FFF2-40B4-BE49-F238E27FC236}">
-                <a16:creationId xmlns:a16="http://schemas.microsoft.com/office/drawing/2014/main" id="{4B7F26A1-E9BE-4FAD-B9F0-23CA4D056E9E}"/>
+                <a16:creationId xmlns:a16="http://schemas.microsoft.com/office/drawing/2014/main" id="{C04E3466-6BDC-46AC-BC97-868EDC5A967F}"/>
               </a:ext>
             </a:extLst>
           </p:cNvPr>
@@ -25610,7 +25610,7 @@
           <p:cNvPr id="6" name="text">
             <a:extLst xmlns:a="http://schemas.openxmlformats.org/drawingml/2006/main">
               <a:ext uri="{FF2B5EF4-FFF2-40B4-BE49-F238E27FC236}">
-                <a16:creationId xmlns:a16="http://schemas.microsoft.com/office/drawing/2014/main" id="{C294E99E-BC7F-45B6-A24E-F4AE91674E3F}"/>
+                <a16:creationId xmlns:a16="http://schemas.microsoft.com/office/drawing/2014/main" id="{192E5F8B-C337-4744-8EBA-6475806EAEFF}"/>
               </a:ext>
             </a:extLst>
           </p:cNvPr>
@@ -25678,7 +25678,7 @@
           <p:cNvPr id="7" name="surface">
             <a:extLst xmlns:a="http://schemas.openxmlformats.org/drawingml/2006/main">
               <a:ext uri="{FF2B5EF4-FFF2-40B4-BE49-F238E27FC236}">
-                <a16:creationId xmlns:a16="http://schemas.microsoft.com/office/drawing/2014/main" id="{A0C3EFF7-2461-40E9-B77C-4C27093F7827}"/>
+                <a16:creationId xmlns:a16="http://schemas.microsoft.com/office/drawing/2014/main" id="{7E16D2DA-529A-4D50-8412-D14092861AD8}"/>
               </a:ext>
             </a:extLst>
           </p:cNvPr>
@@ -25713,7 +25713,7 @@
           <p:cNvPr id="8" name="surface">
             <a:extLst xmlns:a="http://schemas.openxmlformats.org/drawingml/2006/main">
               <a:ext uri="{FF2B5EF4-FFF2-40B4-BE49-F238E27FC236}">
-                <a16:creationId xmlns:a16="http://schemas.microsoft.com/office/drawing/2014/main" id="{311FD04B-AE25-4F1A-9CF4-B5A83A0246D9}"/>
+                <a16:creationId xmlns:a16="http://schemas.microsoft.com/office/drawing/2014/main" id="{B2564474-15DF-4209-9096-1D27855EB89B}"/>
               </a:ext>
             </a:extLst>
           </p:cNvPr>
@@ -25750,7 +25750,7 @@
           <p:cNvPr id="9" name="text">
             <a:extLst xmlns:a="http://schemas.openxmlformats.org/drawingml/2006/main">
               <a:ext uri="{FF2B5EF4-FFF2-40B4-BE49-F238E27FC236}">
-                <a16:creationId xmlns:a16="http://schemas.microsoft.com/office/drawing/2014/main" id="{04E5B4EC-AA8E-43C7-9BCD-C7C4F1F44D7F}"/>
+                <a16:creationId xmlns:a16="http://schemas.microsoft.com/office/drawing/2014/main" id="{A98A119F-6B5D-4802-B398-F3FA3E351C92}"/>
               </a:ext>
             </a:extLst>
           </p:cNvPr>
@@ -25818,7 +25818,7 @@
           <p:cNvPr id="10" name="text">
             <a:extLst xmlns:a="http://schemas.openxmlformats.org/drawingml/2006/main">
               <a:ext uri="{FF2B5EF4-FFF2-40B4-BE49-F238E27FC236}">
-                <a16:creationId xmlns:a16="http://schemas.microsoft.com/office/drawing/2014/main" id="{B7817C55-36A5-425D-8116-E318FF3F6D72}"/>
+                <a16:creationId xmlns:a16="http://schemas.microsoft.com/office/drawing/2014/main" id="{CDDBB6D1-0074-44C6-B0B2-C6937E4A218E}"/>
               </a:ext>
             </a:extLst>
           </p:cNvPr>
@@ -25886,7 +25886,7 @@
           <p:cNvPr id="11" name="surface">
             <a:extLst xmlns:a="http://schemas.openxmlformats.org/drawingml/2006/main">
               <a:ext uri="{FF2B5EF4-FFF2-40B4-BE49-F238E27FC236}">
-                <a16:creationId xmlns:a16="http://schemas.microsoft.com/office/drawing/2014/main" id="{886D4757-717F-48B9-AF15-B863733E2283}"/>
+                <a16:creationId xmlns:a16="http://schemas.microsoft.com/office/drawing/2014/main" id="{16E05ED5-2899-4CC0-83D8-029A065D20CD}"/>
               </a:ext>
             </a:extLst>
           </p:cNvPr>
@@ -25921,7 +25921,7 @@
           <p:cNvPr id="12" name="surface">
             <a:extLst xmlns:a="http://schemas.openxmlformats.org/drawingml/2006/main">
               <a:ext uri="{FF2B5EF4-FFF2-40B4-BE49-F238E27FC236}">
-                <a16:creationId xmlns:a16="http://schemas.microsoft.com/office/drawing/2014/main" id="{C3986AB1-7012-4795-A071-EF859059DD81}"/>
+                <a16:creationId xmlns:a16="http://schemas.microsoft.com/office/drawing/2014/main" id="{65676684-6B04-4D7E-98E1-4D4F34B1AFAF}"/>
               </a:ext>
             </a:extLst>
           </p:cNvPr>
@@ -25958,7 +25958,7 @@
           <p:cNvPr id="13" name="text">
             <a:extLst xmlns:a="http://schemas.openxmlformats.org/drawingml/2006/main">
               <a:ext uri="{FF2B5EF4-FFF2-40B4-BE49-F238E27FC236}">
-                <a16:creationId xmlns:a16="http://schemas.microsoft.com/office/drawing/2014/main" id="{89D12EE3-0D0F-4F1B-A39E-AE2F4BCB7A3C}"/>
+                <a16:creationId xmlns:a16="http://schemas.microsoft.com/office/drawing/2014/main" id="{7B0C97B1-3FBB-4D56-BE9E-1CEA119CDB41}"/>
               </a:ext>
             </a:extLst>
           </p:cNvPr>
@@ -26026,7 +26026,7 @@
           <p:cNvPr id="14" name="text">
             <a:extLst xmlns:a="http://schemas.openxmlformats.org/drawingml/2006/main">
               <a:ext uri="{FF2B5EF4-FFF2-40B4-BE49-F238E27FC236}">
-                <a16:creationId xmlns:a16="http://schemas.microsoft.com/office/drawing/2014/main" id="{FB236568-08B2-44D0-B911-5CED356E0017}"/>
+                <a16:creationId xmlns:a16="http://schemas.microsoft.com/office/drawing/2014/main" id="{0E01067F-DDA0-46B8-AC09-034991F30D9B}"/>
               </a:ext>
             </a:extLst>
           </p:cNvPr>
@@ -26094,7 +26094,7 @@
           <p:cNvPr id="15" name="surface">
             <a:extLst xmlns:a="http://schemas.openxmlformats.org/drawingml/2006/main">
               <a:ext uri="{FF2B5EF4-FFF2-40B4-BE49-F238E27FC236}">
-                <a16:creationId xmlns:a16="http://schemas.microsoft.com/office/drawing/2014/main" id="{30EDD018-7F3B-456D-B629-B39335E547CD}"/>
+                <a16:creationId xmlns:a16="http://schemas.microsoft.com/office/drawing/2014/main" id="{A3B494EE-CDAB-40BB-A3AE-DC8C8F440D33}"/>
               </a:ext>
             </a:extLst>
           </p:cNvPr>
@@ -26129,7 +26129,7 @@
           <p:cNvPr id="16" name="surface">
             <a:extLst xmlns:a="http://schemas.openxmlformats.org/drawingml/2006/main">
               <a:ext uri="{FF2B5EF4-FFF2-40B4-BE49-F238E27FC236}">
-                <a16:creationId xmlns:a16="http://schemas.microsoft.com/office/drawing/2014/main" id="{78C206AD-9BFC-4DC5-9576-DA17C5BB94F6}"/>
+                <a16:creationId xmlns:a16="http://schemas.microsoft.com/office/drawing/2014/main" id="{19D73011-D6C2-43E1-991D-20E1EA1CBC32}"/>
               </a:ext>
             </a:extLst>
           </p:cNvPr>
@@ -26166,7 +26166,7 @@
           <p:cNvPr id="17" name="text">
             <a:extLst xmlns:a="http://schemas.openxmlformats.org/drawingml/2006/main">
               <a:ext uri="{FF2B5EF4-FFF2-40B4-BE49-F238E27FC236}">
-                <a16:creationId xmlns:a16="http://schemas.microsoft.com/office/drawing/2014/main" id="{118251FE-3036-4ECB-A0EF-1C734B2F68B9}"/>
+                <a16:creationId xmlns:a16="http://schemas.microsoft.com/office/drawing/2014/main" id="{6DDCA210-2B26-4C35-BD13-0E6629B02D82}"/>
               </a:ext>
             </a:extLst>
           </p:cNvPr>
@@ -26234,7 +26234,7 @@
           <p:cNvPr id="18" name="text">
             <a:extLst xmlns:a="http://schemas.openxmlformats.org/drawingml/2006/main">
               <a:ext uri="{FF2B5EF4-FFF2-40B4-BE49-F238E27FC236}">
-                <a16:creationId xmlns:a16="http://schemas.microsoft.com/office/drawing/2014/main" id="{2E0DF958-B77E-4300-97A1-8AE9B04C9CBB}"/>
+                <a16:creationId xmlns:a16="http://schemas.microsoft.com/office/drawing/2014/main" id="{FA5A84FA-BD93-4436-87A3-A3B8BB7917CA}"/>
               </a:ext>
             </a:extLst>
           </p:cNvPr>
@@ -26302,7 +26302,7 @@
           <p:cNvPr id="19" name="surface">
             <a:extLst xmlns:a="http://schemas.openxmlformats.org/drawingml/2006/main">
               <a:ext uri="{FF2B5EF4-FFF2-40B4-BE49-F238E27FC236}">
-                <a16:creationId xmlns:a16="http://schemas.microsoft.com/office/drawing/2014/main" id="{C2978413-5180-4E21-B5F8-9CF77832F5F8}"/>
+                <a16:creationId xmlns:a16="http://schemas.microsoft.com/office/drawing/2014/main" id="{1592EE10-58C0-48AB-B4DD-77B544288BE4}"/>
               </a:ext>
             </a:extLst>
           </p:cNvPr>
@@ -26337,7 +26337,7 @@
           <p:cNvPr id="20" name="surface">
             <a:extLst xmlns:a="http://schemas.openxmlformats.org/drawingml/2006/main">
               <a:ext uri="{FF2B5EF4-FFF2-40B4-BE49-F238E27FC236}">
-                <a16:creationId xmlns:a16="http://schemas.microsoft.com/office/drawing/2014/main" id="{3CB98589-94D3-4B4A-9F2C-C3D04E122C28}"/>
+                <a16:creationId xmlns:a16="http://schemas.microsoft.com/office/drawing/2014/main" id="{C04FB6E4-5606-429F-B95D-232789CF9B94}"/>
               </a:ext>
             </a:extLst>
           </p:cNvPr>
@@ -26374,7 +26374,7 @@
           <p:cNvPr id="21" name="text">
             <a:extLst xmlns:a="http://schemas.openxmlformats.org/drawingml/2006/main">
               <a:ext uri="{FF2B5EF4-FFF2-40B4-BE49-F238E27FC236}">
-                <a16:creationId xmlns:a16="http://schemas.microsoft.com/office/drawing/2014/main" id="{75E0BA1F-030B-44FF-BE86-761D4EF42E49}"/>
+                <a16:creationId xmlns:a16="http://schemas.microsoft.com/office/drawing/2014/main" id="{31429E95-B6C7-479C-851D-1EC881224F93}"/>
               </a:ext>
             </a:extLst>
           </p:cNvPr>
@@ -26442,7 +26442,7 @@
           <p:cNvPr id="22" name="text">
             <a:extLst xmlns:a="http://schemas.openxmlformats.org/drawingml/2006/main">
               <a:ext uri="{FF2B5EF4-FFF2-40B4-BE49-F238E27FC236}">
-                <a16:creationId xmlns:a16="http://schemas.microsoft.com/office/drawing/2014/main" id="{FF5E1F86-5715-44BD-B15A-F2EAC93265C9}"/>
+                <a16:creationId xmlns:a16="http://schemas.microsoft.com/office/drawing/2014/main" id="{1E86D937-2CE6-46E5-A048-BCBE95BC4BEF}"/>
               </a:ext>
             </a:extLst>
           </p:cNvPr>
@@ -26510,7 +26510,7 @@
           <p:cNvPr id="23" name="surface">
             <a:extLst xmlns:a="http://schemas.openxmlformats.org/drawingml/2006/main">
               <a:ext uri="{FF2B5EF4-FFF2-40B4-BE49-F238E27FC236}">
-                <a16:creationId xmlns:a16="http://schemas.microsoft.com/office/drawing/2014/main" id="{229FF6DE-3BF9-49FC-A87B-A7408C8AB140}"/>
+                <a16:creationId xmlns:a16="http://schemas.microsoft.com/office/drawing/2014/main" id="{83D7BD37-AD71-4F36-8AA5-9BDC721AA99B}"/>
               </a:ext>
             </a:extLst>
           </p:cNvPr>
@@ -26545,7 +26545,7 @@
           <p:cNvPr id="24" name="text">
             <a:extLst xmlns:a="http://schemas.openxmlformats.org/drawingml/2006/main">
               <a:ext uri="{FF2B5EF4-FFF2-40B4-BE49-F238E27FC236}">
-                <a16:creationId xmlns:a16="http://schemas.microsoft.com/office/drawing/2014/main" id="{616AD5F6-2987-4F0F-A8B9-32239ACAA8AA}"/>
+                <a16:creationId xmlns:a16="http://schemas.microsoft.com/office/drawing/2014/main" id="{AD3F0B56-A4FC-4084-8FFE-1D579E55780F}"/>
               </a:ext>
             </a:extLst>
           </p:cNvPr>
@@ -26613,7 +26613,7 @@
           <p:cNvPr id="25" name="text">
             <a:extLst xmlns:a="http://schemas.openxmlformats.org/drawingml/2006/main">
               <a:ext uri="{FF2B5EF4-FFF2-40B4-BE49-F238E27FC236}">
-                <a16:creationId xmlns:a16="http://schemas.microsoft.com/office/drawing/2014/main" id="{61727C9B-D8BB-47D5-9B8A-2C6F36692BAD}"/>
+                <a16:creationId xmlns:a16="http://schemas.microsoft.com/office/drawing/2014/main" id="{DC8115FD-D5F7-4806-8BCB-651EF8A7427D}"/>
               </a:ext>
             </a:extLst>
           </p:cNvPr>
@@ -26679,7 +26679,7 @@
     </p:spTree>
     <p:extLst>
       <p:ext uri="{BB962C8B-B14F-4D97-AF65-F5344CB8AC3E}">
-        <p14:creationId xmlns:p14="http://schemas.microsoft.com/office/powerpoint/2010/main" val="1391057412"/>
+        <p14:creationId xmlns:p14="http://schemas.microsoft.com/office/powerpoint/2010/main" val="957140944"/>
       </p:ext>
     </p:extLst>
   </p:cSld>
@@ -26710,7 +26710,7 @@
           <p:cNvPr id="1" name="top-accent">
             <a:extLst xmlns:a="http://schemas.openxmlformats.org/drawingml/2006/main">
               <a:ext uri="{FF2B5EF4-FFF2-40B4-BE49-F238E27FC236}">
-                <a16:creationId xmlns:a16="http://schemas.microsoft.com/office/drawing/2014/main" id="{148571F0-E9F2-4FB5-B970-97D14935A6EE}"/>
+                <a16:creationId xmlns:a16="http://schemas.microsoft.com/office/drawing/2014/main" id="{07CF53F4-F882-44EE-940F-757F2E3847BF}"/>
               </a:ext>
             </a:extLst>
           </p:cNvPr>
@@ -26745,7 +26745,7 @@
           <p:cNvPr id="2" name="bottom-line">
             <a:extLst xmlns:a="http://schemas.openxmlformats.org/drawingml/2006/main">
               <a:ext uri="{FF2B5EF4-FFF2-40B4-BE49-F238E27FC236}">
-                <a16:creationId xmlns:a16="http://schemas.microsoft.com/office/drawing/2014/main" id="{61E67C79-CE3E-4C46-B4E4-D54E18FC6375}"/>
+                <a16:creationId xmlns:a16="http://schemas.microsoft.com/office/drawing/2014/main" id="{A6320F5F-6301-4EC1-86DA-DFC743BBE6B0}"/>
               </a:ext>
             </a:extLst>
           </p:cNvPr>
@@ -26780,7 +26780,7 @@
           <p:cNvPr id="3" name="surface">
             <a:extLst xmlns:a="http://schemas.openxmlformats.org/drawingml/2006/main">
               <a:ext uri="{FF2B5EF4-FFF2-40B4-BE49-F238E27FC236}">
-                <a16:creationId xmlns:a16="http://schemas.microsoft.com/office/drawing/2014/main" id="{636D286C-8BAA-47DD-95FE-91721F284E6C}"/>
+                <a16:creationId xmlns:a16="http://schemas.microsoft.com/office/drawing/2014/main" id="{40E63FDF-6B95-482C-86F0-A8639640D4A7}"/>
               </a:ext>
             </a:extLst>
           </p:cNvPr>
@@ -26842,7 +26842,7 @@
           <p:cNvPr id="4" name="text">
             <a:extLst xmlns:a="http://schemas.openxmlformats.org/drawingml/2006/main">
               <a:ext uri="{FF2B5EF4-FFF2-40B4-BE49-F238E27FC236}">
-                <a16:creationId xmlns:a16="http://schemas.microsoft.com/office/drawing/2014/main" id="{A28FFE4F-F5B4-4AD1-BC66-01655B0D1936}"/>
+                <a16:creationId xmlns:a16="http://schemas.microsoft.com/office/drawing/2014/main" id="{8B4DBE78-7363-44D7-9C8D-3E02A2D5FC39}"/>
               </a:ext>
             </a:extLst>
           </p:cNvPr>
@@ -26910,7 +26910,7 @@
           <p:cNvPr id="5" name="text">
             <a:extLst xmlns:a="http://schemas.openxmlformats.org/drawingml/2006/main">
               <a:ext uri="{FF2B5EF4-FFF2-40B4-BE49-F238E27FC236}">
-                <a16:creationId xmlns:a16="http://schemas.microsoft.com/office/drawing/2014/main" id="{72A5CB4F-1471-4765-8051-12D7C5258F62}"/>
+                <a16:creationId xmlns:a16="http://schemas.microsoft.com/office/drawing/2014/main" id="{2BA97371-C57B-4E54-8704-DF0D1F78E688}"/>
               </a:ext>
             </a:extLst>
           </p:cNvPr>
@@ -26978,7 +26978,7 @@
           <p:cNvPr id="6" name="text">
             <a:extLst xmlns:a="http://schemas.openxmlformats.org/drawingml/2006/main">
               <a:ext uri="{FF2B5EF4-FFF2-40B4-BE49-F238E27FC236}">
-                <a16:creationId xmlns:a16="http://schemas.microsoft.com/office/drawing/2014/main" id="{AE7CDB20-073D-43A2-BE9E-3A8F75316024}"/>
+                <a16:creationId xmlns:a16="http://schemas.microsoft.com/office/drawing/2014/main" id="{19088265-8A75-49F7-99F6-D5EEB0B1B8B9}"/>
               </a:ext>
             </a:extLst>
           </p:cNvPr>
@@ -27046,7 +27046,7 @@
           <p:cNvPr id="7" name="surface">
             <a:extLst xmlns:a="http://schemas.openxmlformats.org/drawingml/2006/main">
               <a:ext uri="{FF2B5EF4-FFF2-40B4-BE49-F238E27FC236}">
-                <a16:creationId xmlns:a16="http://schemas.microsoft.com/office/drawing/2014/main" id="{626A3DA2-DE89-409B-AC3C-C597D12C73AD}"/>
+                <a16:creationId xmlns:a16="http://schemas.microsoft.com/office/drawing/2014/main" id="{A5D90F9D-03C4-4A8E-A6C6-4582D693013E}"/>
               </a:ext>
             </a:extLst>
           </p:cNvPr>
@@ -27112,7 +27112,7 @@
           <p:cNvPr id="8" name="surface">
             <a:extLst xmlns:a="http://schemas.openxmlformats.org/drawingml/2006/main">
               <a:ext uri="{FF2B5EF4-FFF2-40B4-BE49-F238E27FC236}">
-                <a16:creationId xmlns:a16="http://schemas.microsoft.com/office/drawing/2014/main" id="{A8C9C3B3-199E-430E-8745-D236C0E79338}"/>
+                <a16:creationId xmlns:a16="http://schemas.microsoft.com/office/drawing/2014/main" id="{D79B67DD-1036-46D6-BAB6-19AB16812CDF}"/>
               </a:ext>
             </a:extLst>
           </p:cNvPr>
@@ -27178,7 +27178,7 @@
           <p:cNvPr id="9" name="surface">
             <a:extLst xmlns:a="http://schemas.openxmlformats.org/drawingml/2006/main">
               <a:ext uri="{FF2B5EF4-FFF2-40B4-BE49-F238E27FC236}">
-                <a16:creationId xmlns:a16="http://schemas.microsoft.com/office/drawing/2014/main" id="{E901992D-6F87-4091-A74E-E01B2404CCE8}"/>
+                <a16:creationId xmlns:a16="http://schemas.microsoft.com/office/drawing/2014/main" id="{31FC681F-A671-4C1A-A341-0D3691365E70}"/>
               </a:ext>
             </a:extLst>
           </p:cNvPr>
@@ -27244,7 +27244,7 @@
           <p:cNvPr id="10" name="surface">
             <a:extLst xmlns:a="http://schemas.openxmlformats.org/drawingml/2006/main">
               <a:ext uri="{FF2B5EF4-FFF2-40B4-BE49-F238E27FC236}">
-                <a16:creationId xmlns:a16="http://schemas.microsoft.com/office/drawing/2014/main" id="{CEB6A029-807A-4251-B8E7-ED64C595EE06}"/>
+                <a16:creationId xmlns:a16="http://schemas.microsoft.com/office/drawing/2014/main" id="{8C3C7FC2-8B4B-4233-956D-DC4CF6362A62}"/>
               </a:ext>
             </a:extLst>
           </p:cNvPr>
@@ -27314,7 +27314,7 @@
           <p:nvPr/>
         </p:nvPicPr>
         <p:blipFill>
-          <a:blip xmlns:r="http://schemas.openxmlformats.org/officeDocument/2006/relationships" xmlns:a="http://schemas.openxmlformats.org/drawingml/2006/main" r:embed="R8187fabc64f446d7"/>
+          <a:blip xmlns:r="http://schemas.openxmlformats.org/officeDocument/2006/relationships" xmlns:a="http://schemas.openxmlformats.org/drawingml/2006/main" r:embed="Rbc69bdf67bcd4764"/>
           <a:stretch xmlns:a="http://schemas.openxmlformats.org/drawingml/2006/main"/>
         </p:blipFill>
         <p:spPr>
@@ -27334,7 +27334,7 @@
           <p:cNvPr id="12" name="surface">
             <a:extLst xmlns:a="http://schemas.openxmlformats.org/drawingml/2006/main">
               <a:ext uri="{FF2B5EF4-FFF2-40B4-BE49-F238E27FC236}">
-                <a16:creationId xmlns:a16="http://schemas.microsoft.com/office/drawing/2014/main" id="{1D18AC50-9B2A-436A-8B26-EA0CDCCEAF86}"/>
+                <a16:creationId xmlns:a16="http://schemas.microsoft.com/office/drawing/2014/main" id="{6BB527C9-CA9A-4076-9CD5-E3C17C885520}"/>
               </a:ext>
             </a:extLst>
           </p:cNvPr>
@@ -27369,7 +27369,7 @@
           <p:cNvPr id="13" name="text">
             <a:extLst xmlns:a="http://schemas.openxmlformats.org/drawingml/2006/main">
               <a:ext uri="{FF2B5EF4-FFF2-40B4-BE49-F238E27FC236}">
-                <a16:creationId xmlns:a16="http://schemas.microsoft.com/office/drawing/2014/main" id="{F308A46D-243F-473C-918D-3DD24E8E677F}"/>
+                <a16:creationId xmlns:a16="http://schemas.microsoft.com/office/drawing/2014/main" id="{C223B19D-4E7F-4AF8-A450-7D3821ED6416}"/>
               </a:ext>
             </a:extLst>
           </p:cNvPr>
@@ -27437,7 +27437,7 @@
           <p:cNvPr id="14" name="text">
             <a:extLst xmlns:a="http://schemas.openxmlformats.org/drawingml/2006/main">
               <a:ext uri="{FF2B5EF4-FFF2-40B4-BE49-F238E27FC236}">
-                <a16:creationId xmlns:a16="http://schemas.microsoft.com/office/drawing/2014/main" id="{0CF76677-2342-4FBA-8A0E-646EA4B45090}"/>
+                <a16:creationId xmlns:a16="http://schemas.microsoft.com/office/drawing/2014/main" id="{AC99B263-57A7-4F5E-88C1-F3CA06F8C4DE}"/>
               </a:ext>
             </a:extLst>
           </p:cNvPr>
@@ -27503,7 +27503,7 @@
     </p:spTree>
     <p:extLst>
       <p:ext uri="{BB962C8B-B14F-4D97-AF65-F5344CB8AC3E}">
-        <p14:creationId xmlns:p14="http://schemas.microsoft.com/office/powerpoint/2010/main" val="1990727746"/>
+        <p14:creationId xmlns:p14="http://schemas.microsoft.com/office/powerpoint/2010/main" val="1725934721"/>
       </p:ext>
     </p:extLst>
   </p:cSld>
@@ -27534,7 +27534,7 @@
           <p:cNvPr id="1" name="top-accent">
             <a:extLst xmlns:a="http://schemas.openxmlformats.org/drawingml/2006/main">
               <a:ext uri="{FF2B5EF4-FFF2-40B4-BE49-F238E27FC236}">
-                <a16:creationId xmlns:a16="http://schemas.microsoft.com/office/drawing/2014/main" id="{DDA5B6A2-716A-4109-8A75-961515F2AC8F}"/>
+                <a16:creationId xmlns:a16="http://schemas.microsoft.com/office/drawing/2014/main" id="{8102324B-0E6F-4C47-ACAB-F14B5B5B782C}"/>
               </a:ext>
             </a:extLst>
           </p:cNvPr>
@@ -27569,7 +27569,7 @@
           <p:cNvPr id="2" name="bottom-line">
             <a:extLst xmlns:a="http://schemas.openxmlformats.org/drawingml/2006/main">
               <a:ext uri="{FF2B5EF4-FFF2-40B4-BE49-F238E27FC236}">
-                <a16:creationId xmlns:a16="http://schemas.microsoft.com/office/drawing/2014/main" id="{CE0D19FA-6298-4AA8-B9A7-6856C153672D}"/>
+                <a16:creationId xmlns:a16="http://schemas.microsoft.com/office/drawing/2014/main" id="{66A0A22B-8CAC-418E-8853-613C268B7365}"/>
               </a:ext>
             </a:extLst>
           </p:cNvPr>
@@ -27604,7 +27604,7 @@
           <p:cNvPr id="3" name="surface">
             <a:extLst xmlns:a="http://schemas.openxmlformats.org/drawingml/2006/main">
               <a:ext uri="{FF2B5EF4-FFF2-40B4-BE49-F238E27FC236}">
-                <a16:creationId xmlns:a16="http://schemas.microsoft.com/office/drawing/2014/main" id="{DB486535-43DC-4CDC-B013-156FBEEFB0DE}"/>
+                <a16:creationId xmlns:a16="http://schemas.microsoft.com/office/drawing/2014/main" id="{D82F2551-9D80-4A5E-A58D-DDD9B8CB5ADE}"/>
               </a:ext>
             </a:extLst>
           </p:cNvPr>
@@ -27666,7 +27666,7 @@
           <p:cNvPr id="4" name="text">
             <a:extLst xmlns:a="http://schemas.openxmlformats.org/drawingml/2006/main">
               <a:ext uri="{FF2B5EF4-FFF2-40B4-BE49-F238E27FC236}">
-                <a16:creationId xmlns:a16="http://schemas.microsoft.com/office/drawing/2014/main" id="{3667353C-2413-422D-94FD-B91DE473CB75}"/>
+                <a16:creationId xmlns:a16="http://schemas.microsoft.com/office/drawing/2014/main" id="{A41429C0-9CA1-410E-81FA-A3175068BCE4}"/>
               </a:ext>
             </a:extLst>
           </p:cNvPr>
@@ -27734,7 +27734,7 @@
           <p:cNvPr id="5" name="text">
             <a:extLst xmlns:a="http://schemas.openxmlformats.org/drawingml/2006/main">
               <a:ext uri="{FF2B5EF4-FFF2-40B4-BE49-F238E27FC236}">
-                <a16:creationId xmlns:a16="http://schemas.microsoft.com/office/drawing/2014/main" id="{47A1119B-BB6C-4E36-BA1C-74C619D130D8}"/>
+                <a16:creationId xmlns:a16="http://schemas.microsoft.com/office/drawing/2014/main" id="{2C2B5C61-A1BC-4E28-9AA2-28057088A234}"/>
               </a:ext>
             </a:extLst>
           </p:cNvPr>
@@ -27802,7 +27802,7 @@
           <p:cNvPr id="6" name="text">
             <a:extLst xmlns:a="http://schemas.openxmlformats.org/drawingml/2006/main">
               <a:ext uri="{FF2B5EF4-FFF2-40B4-BE49-F238E27FC236}">
-                <a16:creationId xmlns:a16="http://schemas.microsoft.com/office/drawing/2014/main" id="{138DF387-14C6-4A93-9140-7D1449A2EB75}"/>
+                <a16:creationId xmlns:a16="http://schemas.microsoft.com/office/drawing/2014/main" id="{83977711-D5DB-435F-8AC2-36E01E752AB8}"/>
               </a:ext>
             </a:extLst>
           </p:cNvPr>
@@ -27870,7 +27870,7 @@
           <p:cNvPr id="7" name="surface">
             <a:extLst xmlns:a="http://schemas.openxmlformats.org/drawingml/2006/main">
               <a:ext uri="{FF2B5EF4-FFF2-40B4-BE49-F238E27FC236}">
-                <a16:creationId xmlns:a16="http://schemas.microsoft.com/office/drawing/2014/main" id="{A358D4C0-2E06-42FE-8FFF-34D27C146726}"/>
+                <a16:creationId xmlns:a16="http://schemas.microsoft.com/office/drawing/2014/main" id="{739AC0D9-8148-4109-8D05-7AB069890A03}"/>
               </a:ext>
             </a:extLst>
           </p:cNvPr>
@@ -27905,7 +27905,7 @@
           <p:cNvPr id="8" name="text">
             <a:extLst xmlns:a="http://schemas.openxmlformats.org/drawingml/2006/main">
               <a:ext uri="{FF2B5EF4-FFF2-40B4-BE49-F238E27FC236}">
-                <a16:creationId xmlns:a16="http://schemas.microsoft.com/office/drawing/2014/main" id="{F1D38683-D2C9-48C0-A181-294F4E3C3C71}"/>
+                <a16:creationId xmlns:a16="http://schemas.microsoft.com/office/drawing/2014/main" id="{AF5258F2-2023-4321-AC15-3D4DC6898A61}"/>
               </a:ext>
             </a:extLst>
           </p:cNvPr>
@@ -27973,7 +27973,7 @@
           <p:cNvPr id="9" name="">
             <a:extLst xmlns:a="http://schemas.openxmlformats.org/drawingml/2006/main">
               <a:ext uri="{FF2B5EF4-FFF2-40B4-BE49-F238E27FC236}">
-                <a16:creationId xmlns:a16="http://schemas.microsoft.com/office/drawing/2014/main" id="{4E775079-8C1E-4FB2-B04B-8D8A1600252B}"/>
+                <a16:creationId xmlns:a16="http://schemas.microsoft.com/office/drawing/2014/main" id="{500200B9-E0F8-436D-98FF-2154A7095BA9}"/>
               </a:ext>
             </a:extLst>
           </p:cNvPr>
@@ -28008,7 +28008,7 @@
           <p:cNvPr id="10" name="surface">
             <a:extLst xmlns:a="http://schemas.openxmlformats.org/drawingml/2006/main">
               <a:ext uri="{FF2B5EF4-FFF2-40B4-BE49-F238E27FC236}">
-                <a16:creationId xmlns:a16="http://schemas.microsoft.com/office/drawing/2014/main" id="{3BD0DC9A-9E3B-4002-A2CB-D5549F896D66}"/>
+                <a16:creationId xmlns:a16="http://schemas.microsoft.com/office/drawing/2014/main" id="{EA1A95B2-AEAE-4B7B-8EBD-BC765677E413}"/>
               </a:ext>
             </a:extLst>
           </p:cNvPr>
@@ -28043,7 +28043,7 @@
           <p:cNvPr id="11" name="text">
             <a:extLst xmlns:a="http://schemas.openxmlformats.org/drawingml/2006/main">
               <a:ext uri="{FF2B5EF4-FFF2-40B4-BE49-F238E27FC236}">
-                <a16:creationId xmlns:a16="http://schemas.microsoft.com/office/drawing/2014/main" id="{05998C91-5B15-4F5F-BCC0-2115C88F440F}"/>
+                <a16:creationId xmlns:a16="http://schemas.microsoft.com/office/drawing/2014/main" id="{007598E8-17AA-47CE-A32D-91509C53710D}"/>
               </a:ext>
             </a:extLst>
           </p:cNvPr>
@@ -28111,7 +28111,7 @@
           <p:cNvPr id="12" name="surface">
             <a:extLst xmlns:a="http://schemas.openxmlformats.org/drawingml/2006/main">
               <a:ext uri="{FF2B5EF4-FFF2-40B4-BE49-F238E27FC236}">
-                <a16:creationId xmlns:a16="http://schemas.microsoft.com/office/drawing/2014/main" id="{4CDEFE66-E1F1-4CD3-B3C0-66DFF6F5F1E1}"/>
+                <a16:creationId xmlns:a16="http://schemas.microsoft.com/office/drawing/2014/main" id="{E0846187-7265-496F-BA25-12E5D15DBB7E}"/>
               </a:ext>
             </a:extLst>
           </p:cNvPr>
@@ -28146,7 +28146,7 @@
           <p:cNvPr id="13" name="text">
             <a:extLst xmlns:a="http://schemas.openxmlformats.org/drawingml/2006/main">
               <a:ext uri="{FF2B5EF4-FFF2-40B4-BE49-F238E27FC236}">
-                <a16:creationId xmlns:a16="http://schemas.microsoft.com/office/drawing/2014/main" id="{866D4634-4273-4484-9B8B-748E54CDDBA9}"/>
+                <a16:creationId xmlns:a16="http://schemas.microsoft.com/office/drawing/2014/main" id="{EA202E80-AB96-4285-96AD-470FDD957FF1}"/>
               </a:ext>
             </a:extLst>
           </p:cNvPr>
@@ -28214,7 +28214,7 @@
           <p:cNvPr id="14" name="surface">
             <a:extLst xmlns:a="http://schemas.openxmlformats.org/drawingml/2006/main">
               <a:ext uri="{FF2B5EF4-FFF2-40B4-BE49-F238E27FC236}">
-                <a16:creationId xmlns:a16="http://schemas.microsoft.com/office/drawing/2014/main" id="{F8C10EEB-4B61-40B2-95C8-E49376372A66}"/>
+                <a16:creationId xmlns:a16="http://schemas.microsoft.com/office/drawing/2014/main" id="{33F188CB-70D0-4F03-846A-5D1DFC7405C0}"/>
               </a:ext>
             </a:extLst>
           </p:cNvPr>
@@ -28249,7 +28249,7 @@
           <p:cNvPr id="15" name="text">
             <a:extLst xmlns:a="http://schemas.openxmlformats.org/drawingml/2006/main">
               <a:ext uri="{FF2B5EF4-FFF2-40B4-BE49-F238E27FC236}">
-                <a16:creationId xmlns:a16="http://schemas.microsoft.com/office/drawing/2014/main" id="{BE0632B6-77D1-47B4-9599-7416DD91FB76}"/>
+                <a16:creationId xmlns:a16="http://schemas.microsoft.com/office/drawing/2014/main" id="{46D737F6-6315-4073-A467-6F6536D40386}"/>
               </a:ext>
             </a:extLst>
           </p:cNvPr>
@@ -28317,7 +28317,7 @@
           <p:cNvPr id="16" name="surface">
             <a:extLst xmlns:a="http://schemas.openxmlformats.org/drawingml/2006/main">
               <a:ext uri="{FF2B5EF4-FFF2-40B4-BE49-F238E27FC236}">
-                <a16:creationId xmlns:a16="http://schemas.microsoft.com/office/drawing/2014/main" id="{09A26521-B950-402C-9A6F-84431A94A7F2}"/>
+                <a16:creationId xmlns:a16="http://schemas.microsoft.com/office/drawing/2014/main" id="{198C9D10-D483-42ED-A99C-A04CE58A938F}"/>
               </a:ext>
             </a:extLst>
           </p:cNvPr>
@@ -28352,7 +28352,7 @@
           <p:cNvPr id="17" name="text">
             <a:extLst xmlns:a="http://schemas.openxmlformats.org/drawingml/2006/main">
               <a:ext uri="{FF2B5EF4-FFF2-40B4-BE49-F238E27FC236}">
-                <a16:creationId xmlns:a16="http://schemas.microsoft.com/office/drawing/2014/main" id="{74F6EE7B-E55A-4A5D-9D7A-7D02C997002A}"/>
+                <a16:creationId xmlns:a16="http://schemas.microsoft.com/office/drawing/2014/main" id="{ED49BC72-D5DF-424D-AA6A-5FDBF87CC148}"/>
               </a:ext>
             </a:extLst>
           </p:cNvPr>
@@ -28420,7 +28420,7 @@
           <p:cNvPr id="18" name="surface">
             <a:extLst xmlns:a="http://schemas.openxmlformats.org/drawingml/2006/main">
               <a:ext uri="{FF2B5EF4-FFF2-40B4-BE49-F238E27FC236}">
-                <a16:creationId xmlns:a16="http://schemas.microsoft.com/office/drawing/2014/main" id="{EB96C83B-3801-4327-959B-375BA93E8C60}"/>
+                <a16:creationId xmlns:a16="http://schemas.microsoft.com/office/drawing/2014/main" id="{32E7FD65-3A12-4A8E-8BA5-D35315A2B85D}"/>
               </a:ext>
             </a:extLst>
           </p:cNvPr>
@@ -28455,7 +28455,7 @@
           <p:cNvPr id="19" name="text">
             <a:extLst xmlns:a="http://schemas.openxmlformats.org/drawingml/2006/main">
               <a:ext uri="{FF2B5EF4-FFF2-40B4-BE49-F238E27FC236}">
-                <a16:creationId xmlns:a16="http://schemas.microsoft.com/office/drawing/2014/main" id="{E930B1DC-1B4D-4B2D-AA62-1C8679ED5194}"/>
+                <a16:creationId xmlns:a16="http://schemas.microsoft.com/office/drawing/2014/main" id="{CEBA1881-2071-4F72-A119-301C3F0D4CC2}"/>
               </a:ext>
             </a:extLst>
           </p:cNvPr>
@@ -28523,7 +28523,7 @@
           <p:cNvPr id="20" name="text">
             <a:extLst xmlns:a="http://schemas.openxmlformats.org/drawingml/2006/main">
               <a:ext uri="{FF2B5EF4-FFF2-40B4-BE49-F238E27FC236}">
-                <a16:creationId xmlns:a16="http://schemas.microsoft.com/office/drawing/2014/main" id="{DD67184F-493D-4C87-BB95-363FCC43993C}"/>
+                <a16:creationId xmlns:a16="http://schemas.microsoft.com/office/drawing/2014/main" id="{2D68BDF0-2302-4CF9-91DA-EDB99983BE08}"/>
               </a:ext>
             </a:extLst>
           </p:cNvPr>
@@ -28591,7 +28591,7 @@
           <p:cNvPr id="21" name="">
             <a:extLst xmlns:a="http://schemas.openxmlformats.org/drawingml/2006/main">
               <a:ext uri="{FF2B5EF4-FFF2-40B4-BE49-F238E27FC236}">
-                <a16:creationId xmlns:a16="http://schemas.microsoft.com/office/drawing/2014/main" id="{7FB77DA0-DB1D-4895-AE9A-0A823200A576}"/>
+                <a16:creationId xmlns:a16="http://schemas.microsoft.com/office/drawing/2014/main" id="{6653CA7A-C286-4E9E-B675-EC7682B0FB9C}"/>
               </a:ext>
             </a:extLst>
           </p:cNvPr>
@@ -28626,7 +28626,7 @@
           <p:cNvPr id="22" name="">
             <a:extLst xmlns:a="http://schemas.openxmlformats.org/drawingml/2006/main">
               <a:ext uri="{FF2B5EF4-FFF2-40B4-BE49-F238E27FC236}">
-                <a16:creationId xmlns:a16="http://schemas.microsoft.com/office/drawing/2014/main" id="{F0AD35E2-84AC-43C9-8629-D995133BE794}"/>
+                <a16:creationId xmlns:a16="http://schemas.microsoft.com/office/drawing/2014/main" id="{297F89B1-4CB8-409E-BDBF-AD777DDBA1A7}"/>
               </a:ext>
             </a:extLst>
           </p:cNvPr>
@@ -28661,7 +28661,7 @@
           <p:cNvPr id="23" name="">
             <a:extLst xmlns:a="http://schemas.openxmlformats.org/drawingml/2006/main">
               <a:ext uri="{FF2B5EF4-FFF2-40B4-BE49-F238E27FC236}">
-                <a16:creationId xmlns:a16="http://schemas.microsoft.com/office/drawing/2014/main" id="{BBA44740-7CAE-418C-B368-01DF5F620B9C}"/>
+                <a16:creationId xmlns:a16="http://schemas.microsoft.com/office/drawing/2014/main" id="{57C2CCE2-0D40-47E7-9458-D71AE9D1D032}"/>
               </a:ext>
             </a:extLst>
           </p:cNvPr>
@@ -28696,7 +28696,7 @@
           <p:cNvPr id="24" name="">
             <a:extLst xmlns:a="http://schemas.openxmlformats.org/drawingml/2006/main">
               <a:ext uri="{FF2B5EF4-FFF2-40B4-BE49-F238E27FC236}">
-                <a16:creationId xmlns:a16="http://schemas.microsoft.com/office/drawing/2014/main" id="{7AC3B740-7EAA-472A-95B4-614C6562E728}"/>
+                <a16:creationId xmlns:a16="http://schemas.microsoft.com/office/drawing/2014/main" id="{27AA3E1A-D2D6-4AC8-9AFE-5459E95273D9}"/>
               </a:ext>
             </a:extLst>
           </p:cNvPr>
@@ -28731,7 +28731,7 @@
           <p:cNvPr id="25" name="">
             <a:extLst xmlns:a="http://schemas.openxmlformats.org/drawingml/2006/main">
               <a:ext uri="{FF2B5EF4-FFF2-40B4-BE49-F238E27FC236}">
-                <a16:creationId xmlns:a16="http://schemas.microsoft.com/office/drawing/2014/main" id="{B0629702-E124-4B99-9CA7-F8BD5D454B45}"/>
+                <a16:creationId xmlns:a16="http://schemas.microsoft.com/office/drawing/2014/main" id="{55EC32FD-D686-4D3D-9E49-DF711724F781}"/>
               </a:ext>
             </a:extLst>
           </p:cNvPr>
@@ -28766,7 +28766,7 @@
           <p:cNvPr id="26" name="surface">
             <a:extLst xmlns:a="http://schemas.openxmlformats.org/drawingml/2006/main">
               <a:ext uri="{FF2B5EF4-FFF2-40B4-BE49-F238E27FC236}">
-                <a16:creationId xmlns:a16="http://schemas.microsoft.com/office/drawing/2014/main" id="{37DE4C1D-9E92-442E-BAE5-535BC9AF34C6}"/>
+                <a16:creationId xmlns:a16="http://schemas.microsoft.com/office/drawing/2014/main" id="{6F983CF3-20C5-461C-B159-AF7CE61D1805}"/>
               </a:ext>
             </a:extLst>
           </p:cNvPr>
@@ -28801,7 +28801,7 @@
           <p:cNvPr id="27" name="text">
             <a:extLst xmlns:a="http://schemas.openxmlformats.org/drawingml/2006/main">
               <a:ext uri="{FF2B5EF4-FFF2-40B4-BE49-F238E27FC236}">
-                <a16:creationId xmlns:a16="http://schemas.microsoft.com/office/drawing/2014/main" id="{542B0B4A-E0CE-4436-AD93-0E8803FEDA87}"/>
+                <a16:creationId xmlns:a16="http://schemas.microsoft.com/office/drawing/2014/main" id="{FCCFF389-28F5-4653-A054-3DBA6A9DD1EE}"/>
               </a:ext>
             </a:extLst>
           </p:cNvPr>
@@ -28869,7 +28869,7 @@
           <p:cNvPr id="28" name="">
             <a:extLst xmlns:a="http://schemas.openxmlformats.org/drawingml/2006/main">
               <a:ext uri="{FF2B5EF4-FFF2-40B4-BE49-F238E27FC236}">
-                <a16:creationId xmlns:a16="http://schemas.microsoft.com/office/drawing/2014/main" id="{5BE91D67-660A-4425-AA3B-52F53CEEFDAD}"/>
+                <a16:creationId xmlns:a16="http://schemas.microsoft.com/office/drawing/2014/main" id="{B90D3CA3-3448-4F6E-891E-33A7FE46500E}"/>
               </a:ext>
             </a:extLst>
           </p:cNvPr>
@@ -28904,7 +28904,7 @@
           <p:cNvPr id="29" name="">
             <a:extLst xmlns:a="http://schemas.openxmlformats.org/drawingml/2006/main">
               <a:ext uri="{FF2B5EF4-FFF2-40B4-BE49-F238E27FC236}">
-                <a16:creationId xmlns:a16="http://schemas.microsoft.com/office/drawing/2014/main" id="{978A91EF-01AD-4876-ABB0-918BD0E99080}"/>
+                <a16:creationId xmlns:a16="http://schemas.microsoft.com/office/drawing/2014/main" id="{E8053043-5663-45AD-9D0C-F544F1CA815D}"/>
               </a:ext>
             </a:extLst>
           </p:cNvPr>
@@ -28939,7 +28939,7 @@
           <p:cNvPr id="30" name="surface">
             <a:extLst xmlns:a="http://schemas.openxmlformats.org/drawingml/2006/main">
               <a:ext uri="{FF2B5EF4-FFF2-40B4-BE49-F238E27FC236}">
-                <a16:creationId xmlns:a16="http://schemas.microsoft.com/office/drawing/2014/main" id="{1F9507C7-E2AD-4A4A-A880-E8686C9FA5F0}"/>
+                <a16:creationId xmlns:a16="http://schemas.microsoft.com/office/drawing/2014/main" id="{EFEAEA93-2D54-418A-A83D-3885E650F437}"/>
               </a:ext>
             </a:extLst>
           </p:cNvPr>
@@ -28974,7 +28974,7 @@
           <p:cNvPr id="31" name="text">
             <a:extLst xmlns:a="http://schemas.openxmlformats.org/drawingml/2006/main">
               <a:ext uri="{FF2B5EF4-FFF2-40B4-BE49-F238E27FC236}">
-                <a16:creationId xmlns:a16="http://schemas.microsoft.com/office/drawing/2014/main" id="{56225C6F-D2FB-409E-87D4-2D6413F5ABDC}"/>
+                <a16:creationId xmlns:a16="http://schemas.microsoft.com/office/drawing/2014/main" id="{B3CF363C-B38D-4AB5-87FF-2B2AF1BEFCE8}"/>
               </a:ext>
             </a:extLst>
           </p:cNvPr>
@@ -29042,7 +29042,7 @@
           <p:cNvPr id="32" name="">
             <a:extLst xmlns:a="http://schemas.openxmlformats.org/drawingml/2006/main">
               <a:ext uri="{FF2B5EF4-FFF2-40B4-BE49-F238E27FC236}">
-                <a16:creationId xmlns:a16="http://schemas.microsoft.com/office/drawing/2014/main" id="{FB62FF07-06E9-460F-8C14-4AA03803987A}"/>
+                <a16:creationId xmlns:a16="http://schemas.microsoft.com/office/drawing/2014/main" id="{A54D55D3-A5F8-4E1C-BEB9-9441D7EF8A87}"/>
               </a:ext>
             </a:extLst>
           </p:cNvPr>
@@ -29077,7 +29077,7 @@
           <p:cNvPr id="33" name="surface">
             <a:extLst xmlns:a="http://schemas.openxmlformats.org/drawingml/2006/main">
               <a:ext uri="{FF2B5EF4-FFF2-40B4-BE49-F238E27FC236}">
-                <a16:creationId xmlns:a16="http://schemas.microsoft.com/office/drawing/2014/main" id="{B96AABB6-7ECE-48F9-98CF-4FE62EF31AAC}"/>
+                <a16:creationId xmlns:a16="http://schemas.microsoft.com/office/drawing/2014/main" id="{5CED7B3D-5D87-445D-B08B-C0D0B627BE0F}"/>
               </a:ext>
             </a:extLst>
           </p:cNvPr>
@@ -29112,7 +29112,7 @@
           <p:cNvPr id="34" name="text">
             <a:extLst xmlns:a="http://schemas.openxmlformats.org/drawingml/2006/main">
               <a:ext uri="{FF2B5EF4-FFF2-40B4-BE49-F238E27FC236}">
-                <a16:creationId xmlns:a16="http://schemas.microsoft.com/office/drawing/2014/main" id="{BC1D8D30-1071-4796-BE11-8C5F774D5AFB}"/>
+                <a16:creationId xmlns:a16="http://schemas.microsoft.com/office/drawing/2014/main" id="{3365AAAC-FC1C-4E3C-B568-C2E3BC85C8E8}"/>
               </a:ext>
             </a:extLst>
           </p:cNvPr>
@@ -29180,7 +29180,7 @@
           <p:cNvPr id="35" name="surface">
             <a:extLst xmlns:a="http://schemas.openxmlformats.org/drawingml/2006/main">
               <a:ext uri="{FF2B5EF4-FFF2-40B4-BE49-F238E27FC236}">
-                <a16:creationId xmlns:a16="http://schemas.microsoft.com/office/drawing/2014/main" id="{45F06D6D-F69C-4889-8B8A-B44C03FA7E98}"/>
+                <a16:creationId xmlns:a16="http://schemas.microsoft.com/office/drawing/2014/main" id="{289774BF-31E9-4FC2-81B6-A143A29B9AD2}"/>
               </a:ext>
             </a:extLst>
           </p:cNvPr>
@@ -29215,7 +29215,7 @@
           <p:cNvPr id="36" name="text">
             <a:extLst xmlns:a="http://schemas.openxmlformats.org/drawingml/2006/main">
               <a:ext uri="{FF2B5EF4-FFF2-40B4-BE49-F238E27FC236}">
-                <a16:creationId xmlns:a16="http://schemas.microsoft.com/office/drawing/2014/main" id="{33A7DA93-E4D7-4212-9590-ED8F84E3F19D}"/>
+                <a16:creationId xmlns:a16="http://schemas.microsoft.com/office/drawing/2014/main" id="{C2A527E8-9217-4817-A0FC-3FE1E31FF1C7}"/>
               </a:ext>
             </a:extLst>
           </p:cNvPr>
@@ -29283,7 +29283,7 @@
           <p:cNvPr id="37" name="">
             <a:extLst xmlns:a="http://schemas.openxmlformats.org/drawingml/2006/main">
               <a:ext uri="{FF2B5EF4-FFF2-40B4-BE49-F238E27FC236}">
-                <a16:creationId xmlns:a16="http://schemas.microsoft.com/office/drawing/2014/main" id="{4039E149-444D-4704-B06B-F7841D162472}"/>
+                <a16:creationId xmlns:a16="http://schemas.microsoft.com/office/drawing/2014/main" id="{F8311C58-D97B-4A0B-89AD-8A78D19E6885}"/>
               </a:ext>
             </a:extLst>
           </p:cNvPr>
@@ -29318,7 +29318,7 @@
           <p:cNvPr id="38" name="surface">
             <a:extLst xmlns:a="http://schemas.openxmlformats.org/drawingml/2006/main">
               <a:ext uri="{FF2B5EF4-FFF2-40B4-BE49-F238E27FC236}">
-                <a16:creationId xmlns:a16="http://schemas.microsoft.com/office/drawing/2014/main" id="{02833368-425B-49E9-9CA1-0A4C02A49C37}"/>
+                <a16:creationId xmlns:a16="http://schemas.microsoft.com/office/drawing/2014/main" id="{F2F47D4D-2DEF-4F63-A0D1-673B69C13CED}"/>
               </a:ext>
             </a:extLst>
           </p:cNvPr>
@@ -29353,7 +29353,7 @@
           <p:cNvPr id="39" name="text">
             <a:extLst xmlns:a="http://schemas.openxmlformats.org/drawingml/2006/main">
               <a:ext uri="{FF2B5EF4-FFF2-40B4-BE49-F238E27FC236}">
-                <a16:creationId xmlns:a16="http://schemas.microsoft.com/office/drawing/2014/main" id="{828486A0-C809-4502-9C55-181B1CFCD317}"/>
+                <a16:creationId xmlns:a16="http://schemas.microsoft.com/office/drawing/2014/main" id="{2C85430C-4C78-4CAC-9773-A58799712635}"/>
               </a:ext>
             </a:extLst>
           </p:cNvPr>
@@ -29421,7 +29421,7 @@
           <p:cNvPr id="40" name="surface">
             <a:extLst xmlns:a="http://schemas.openxmlformats.org/drawingml/2006/main">
               <a:ext uri="{FF2B5EF4-FFF2-40B4-BE49-F238E27FC236}">
-                <a16:creationId xmlns:a16="http://schemas.microsoft.com/office/drawing/2014/main" id="{556050E8-0352-4FF0-A3E8-5BE86BF6BC37}"/>
+                <a16:creationId xmlns:a16="http://schemas.microsoft.com/office/drawing/2014/main" id="{C19ACFF0-B3E2-42A6-AD99-03734D05C7AD}"/>
               </a:ext>
             </a:extLst>
           </p:cNvPr>
@@ -29456,7 +29456,7 @@
           <p:cNvPr id="41" name="text">
             <a:extLst xmlns:a="http://schemas.openxmlformats.org/drawingml/2006/main">
               <a:ext uri="{FF2B5EF4-FFF2-40B4-BE49-F238E27FC236}">
-                <a16:creationId xmlns:a16="http://schemas.microsoft.com/office/drawing/2014/main" id="{3CF68D0C-0664-4A5D-8967-BC547714FD6C}"/>
+                <a16:creationId xmlns:a16="http://schemas.microsoft.com/office/drawing/2014/main" id="{BA9A8354-EF02-4480-92BB-6AACF608CCC8}"/>
               </a:ext>
             </a:extLst>
           </p:cNvPr>
@@ -29524,7 +29524,7 @@
           <p:cNvPr id="42" name="text">
             <a:extLst xmlns:a="http://schemas.openxmlformats.org/drawingml/2006/main">
               <a:ext uri="{FF2B5EF4-FFF2-40B4-BE49-F238E27FC236}">
-                <a16:creationId xmlns:a16="http://schemas.microsoft.com/office/drawing/2014/main" id="{B119270A-DD92-440D-8177-E91EFE694628}"/>
+                <a16:creationId xmlns:a16="http://schemas.microsoft.com/office/drawing/2014/main" id="{2C19A03C-7EAC-4BF7-A787-06EBCF95F248}"/>
               </a:ext>
             </a:extLst>
           </p:cNvPr>
@@ -29590,7 +29590,7 @@
     </p:spTree>
     <p:extLst>
       <p:ext uri="{BB962C8B-B14F-4D97-AF65-F5344CB8AC3E}">
-        <p14:creationId xmlns:p14="http://schemas.microsoft.com/office/powerpoint/2010/main" val="2015157431"/>
+        <p14:creationId xmlns:p14="http://schemas.microsoft.com/office/powerpoint/2010/main" val="452385162"/>
       </p:ext>
     </p:extLst>
   </p:cSld>
@@ -29621,7 +29621,7 @@
           <p:cNvPr id="1" name="top-accent">
             <a:extLst xmlns:a="http://schemas.openxmlformats.org/drawingml/2006/main">
               <a:ext uri="{FF2B5EF4-FFF2-40B4-BE49-F238E27FC236}">
-                <a16:creationId xmlns:a16="http://schemas.microsoft.com/office/drawing/2014/main" id="{6ABCC5D9-F99A-453A-AFEF-97534E85BD29}"/>
+                <a16:creationId xmlns:a16="http://schemas.microsoft.com/office/drawing/2014/main" id="{3DEB5B88-F7F6-48A5-ACDD-93617A388FD3}"/>
               </a:ext>
             </a:extLst>
           </p:cNvPr>
@@ -29656,7 +29656,7 @@
           <p:cNvPr id="2" name="bottom-line">
             <a:extLst xmlns:a="http://schemas.openxmlformats.org/drawingml/2006/main">
               <a:ext uri="{FF2B5EF4-FFF2-40B4-BE49-F238E27FC236}">
-                <a16:creationId xmlns:a16="http://schemas.microsoft.com/office/drawing/2014/main" id="{524413C9-618D-4074-9A70-C7DC9CD69FD4}"/>
+                <a16:creationId xmlns:a16="http://schemas.microsoft.com/office/drawing/2014/main" id="{9358078D-A23C-44B5-956F-CC16AC4D1EF1}"/>
               </a:ext>
             </a:extLst>
           </p:cNvPr>
@@ -29691,7 +29691,7 @@
           <p:cNvPr id="3" name="surface">
             <a:extLst xmlns:a="http://schemas.openxmlformats.org/drawingml/2006/main">
               <a:ext uri="{FF2B5EF4-FFF2-40B4-BE49-F238E27FC236}">
-                <a16:creationId xmlns:a16="http://schemas.microsoft.com/office/drawing/2014/main" id="{25DD1FC2-4132-49BF-B3EE-31F49769519C}"/>
+                <a16:creationId xmlns:a16="http://schemas.microsoft.com/office/drawing/2014/main" id="{51186BD3-1E2A-4B20-95BC-6259669AF5D9}"/>
               </a:ext>
             </a:extLst>
           </p:cNvPr>
@@ -29753,7 +29753,7 @@
           <p:cNvPr id="4" name="text">
             <a:extLst xmlns:a="http://schemas.openxmlformats.org/drawingml/2006/main">
               <a:ext uri="{FF2B5EF4-FFF2-40B4-BE49-F238E27FC236}">
-                <a16:creationId xmlns:a16="http://schemas.microsoft.com/office/drawing/2014/main" id="{B2798D7E-7999-4F79-9F66-B67ED0736614}"/>
+                <a16:creationId xmlns:a16="http://schemas.microsoft.com/office/drawing/2014/main" id="{4F8AC484-8401-40B6-86CA-D59B1210BA8F}"/>
               </a:ext>
             </a:extLst>
           </p:cNvPr>
@@ -29821,7 +29821,7 @@
           <p:cNvPr id="5" name="text">
             <a:extLst xmlns:a="http://schemas.openxmlformats.org/drawingml/2006/main">
               <a:ext uri="{FF2B5EF4-FFF2-40B4-BE49-F238E27FC236}">
-                <a16:creationId xmlns:a16="http://schemas.microsoft.com/office/drawing/2014/main" id="{01E79338-AC19-4F93-9CC1-9CB24318C16E}"/>
+                <a16:creationId xmlns:a16="http://schemas.microsoft.com/office/drawing/2014/main" id="{50FCAFB4-5D65-4FF8-96BA-5494C87B8F86}"/>
               </a:ext>
             </a:extLst>
           </p:cNvPr>
@@ -29889,7 +29889,7 @@
           <p:cNvPr id="6" name="text">
             <a:extLst xmlns:a="http://schemas.openxmlformats.org/drawingml/2006/main">
               <a:ext uri="{FF2B5EF4-FFF2-40B4-BE49-F238E27FC236}">
-                <a16:creationId xmlns:a16="http://schemas.microsoft.com/office/drawing/2014/main" id="{B77DC0DA-7D8B-4BF2-92CF-7FFE9ADA6972}"/>
+                <a16:creationId xmlns:a16="http://schemas.microsoft.com/office/drawing/2014/main" id="{A8FF5829-317D-46E2-BEB1-D67FE280838B}"/>
               </a:ext>
             </a:extLst>
           </p:cNvPr>
@@ -29957,7 +29957,7 @@
           <p:cNvPr id="7" name="surface">
             <a:extLst xmlns:a="http://schemas.openxmlformats.org/drawingml/2006/main">
               <a:ext uri="{FF2B5EF4-FFF2-40B4-BE49-F238E27FC236}">
-                <a16:creationId xmlns:a16="http://schemas.microsoft.com/office/drawing/2014/main" id="{2F52FC5F-DC7D-481A-B34B-7BCEB317A910}"/>
+                <a16:creationId xmlns:a16="http://schemas.microsoft.com/office/drawing/2014/main" id="{75D1112F-7D2A-4EDA-B33B-F0ED2E17EA86}"/>
               </a:ext>
             </a:extLst>
           </p:cNvPr>
@@ -29992,7 +29992,7 @@
           <p:cNvPr id="8" name="surface">
             <a:extLst xmlns:a="http://schemas.openxmlformats.org/drawingml/2006/main">
               <a:ext uri="{FF2B5EF4-FFF2-40B4-BE49-F238E27FC236}">
-                <a16:creationId xmlns:a16="http://schemas.microsoft.com/office/drawing/2014/main" id="{D2DC0E2A-0A81-4593-8C43-B8CEF5D3CB29}"/>
+                <a16:creationId xmlns:a16="http://schemas.microsoft.com/office/drawing/2014/main" id="{1E46AC4B-487A-4AF3-9117-FCB4C3066360}"/>
               </a:ext>
             </a:extLst>
           </p:cNvPr>
@@ -30029,7 +30029,7 @@
           <p:cNvPr id="9" name="text">
             <a:extLst xmlns:a="http://schemas.openxmlformats.org/drawingml/2006/main">
               <a:ext uri="{FF2B5EF4-FFF2-40B4-BE49-F238E27FC236}">
-                <a16:creationId xmlns:a16="http://schemas.microsoft.com/office/drawing/2014/main" id="{FCA5B602-2A0B-4EC4-B64A-A9E819B7C1CC}"/>
+                <a16:creationId xmlns:a16="http://schemas.microsoft.com/office/drawing/2014/main" id="{785BE285-521A-419E-B590-BF48D891233E}"/>
               </a:ext>
             </a:extLst>
           </p:cNvPr>
@@ -30097,7 +30097,7 @@
           <p:cNvPr id="10" name="text">
             <a:extLst xmlns:a="http://schemas.openxmlformats.org/drawingml/2006/main">
               <a:ext uri="{FF2B5EF4-FFF2-40B4-BE49-F238E27FC236}">
-                <a16:creationId xmlns:a16="http://schemas.microsoft.com/office/drawing/2014/main" id="{53D6C8A3-A457-4DF5-A48B-371EEFDBD306}"/>
+                <a16:creationId xmlns:a16="http://schemas.microsoft.com/office/drawing/2014/main" id="{93265055-3FEF-415F-93E7-7FC8900F0BFF}"/>
               </a:ext>
             </a:extLst>
           </p:cNvPr>
@@ -30165,7 +30165,7 @@
           <p:cNvPr id="11" name="surface">
             <a:extLst xmlns:a="http://schemas.openxmlformats.org/drawingml/2006/main">
               <a:ext uri="{FF2B5EF4-FFF2-40B4-BE49-F238E27FC236}">
-                <a16:creationId xmlns:a16="http://schemas.microsoft.com/office/drawing/2014/main" id="{2473ADC8-0562-471A-8BC5-D0231415A4F0}"/>
+                <a16:creationId xmlns:a16="http://schemas.microsoft.com/office/drawing/2014/main" id="{2A2B0E95-BC9E-4C53-8BAD-8550B0B91F0C}"/>
               </a:ext>
             </a:extLst>
           </p:cNvPr>
@@ -30200,7 +30200,7 @@
           <p:cNvPr id="12" name="surface">
             <a:extLst xmlns:a="http://schemas.openxmlformats.org/drawingml/2006/main">
               <a:ext uri="{FF2B5EF4-FFF2-40B4-BE49-F238E27FC236}">
-                <a16:creationId xmlns:a16="http://schemas.microsoft.com/office/drawing/2014/main" id="{ABC2652F-A5B9-44D9-8C04-70D7687E234E}"/>
+                <a16:creationId xmlns:a16="http://schemas.microsoft.com/office/drawing/2014/main" id="{3EC8367F-B56A-447F-A93A-B5315E924818}"/>
               </a:ext>
             </a:extLst>
           </p:cNvPr>
@@ -30237,7 +30237,7 @@
           <p:cNvPr id="13" name="text">
             <a:extLst xmlns:a="http://schemas.openxmlformats.org/drawingml/2006/main">
               <a:ext uri="{FF2B5EF4-FFF2-40B4-BE49-F238E27FC236}">
-                <a16:creationId xmlns:a16="http://schemas.microsoft.com/office/drawing/2014/main" id="{11FA001A-E368-4828-9459-FD35AC1F25F9}"/>
+                <a16:creationId xmlns:a16="http://schemas.microsoft.com/office/drawing/2014/main" id="{FE3F13E2-BDD9-4C8B-8E93-18A98C5D6800}"/>
               </a:ext>
             </a:extLst>
           </p:cNvPr>
@@ -30305,7 +30305,7 @@
           <p:cNvPr id="14" name="text">
             <a:extLst xmlns:a="http://schemas.openxmlformats.org/drawingml/2006/main">
               <a:ext uri="{FF2B5EF4-FFF2-40B4-BE49-F238E27FC236}">
-                <a16:creationId xmlns:a16="http://schemas.microsoft.com/office/drawing/2014/main" id="{C9FC3162-B988-4FA1-A729-79EB758CE3AE}"/>
+                <a16:creationId xmlns:a16="http://schemas.microsoft.com/office/drawing/2014/main" id="{00F2F75F-1BB0-4C1F-B405-E50B70B37DEA}"/>
               </a:ext>
             </a:extLst>
           </p:cNvPr>
@@ -30373,7 +30373,7 @@
           <p:cNvPr id="15" name="surface">
             <a:extLst xmlns:a="http://schemas.openxmlformats.org/drawingml/2006/main">
               <a:ext uri="{FF2B5EF4-FFF2-40B4-BE49-F238E27FC236}">
-                <a16:creationId xmlns:a16="http://schemas.microsoft.com/office/drawing/2014/main" id="{30AA14BE-A295-48AF-B4F7-AADC79077789}"/>
+                <a16:creationId xmlns:a16="http://schemas.microsoft.com/office/drawing/2014/main" id="{834B269C-E2F8-4F0F-A383-1925C12874A9}"/>
               </a:ext>
             </a:extLst>
           </p:cNvPr>
@@ -30408,7 +30408,7 @@
           <p:cNvPr id="16" name="surface">
             <a:extLst xmlns:a="http://schemas.openxmlformats.org/drawingml/2006/main">
               <a:ext uri="{FF2B5EF4-FFF2-40B4-BE49-F238E27FC236}">
-                <a16:creationId xmlns:a16="http://schemas.microsoft.com/office/drawing/2014/main" id="{48566116-CC69-4088-ACE9-8C85124DEFEE}"/>
+                <a16:creationId xmlns:a16="http://schemas.microsoft.com/office/drawing/2014/main" id="{4BA03CCD-B73D-4367-9CE4-A7615ACB51EB}"/>
               </a:ext>
             </a:extLst>
           </p:cNvPr>
@@ -30445,7 +30445,7 @@
           <p:cNvPr id="17" name="text">
             <a:extLst xmlns:a="http://schemas.openxmlformats.org/drawingml/2006/main">
               <a:ext uri="{FF2B5EF4-FFF2-40B4-BE49-F238E27FC236}">
-                <a16:creationId xmlns:a16="http://schemas.microsoft.com/office/drawing/2014/main" id="{36EEE767-963D-4E71-AE3D-366C060426E7}"/>
+                <a16:creationId xmlns:a16="http://schemas.microsoft.com/office/drawing/2014/main" id="{87F4D508-4BE7-4B20-9CE4-91B23BB1AFCF}"/>
               </a:ext>
             </a:extLst>
           </p:cNvPr>
@@ -30513,7 +30513,7 @@
           <p:cNvPr id="18" name="text">
             <a:extLst xmlns:a="http://schemas.openxmlformats.org/drawingml/2006/main">
               <a:ext uri="{FF2B5EF4-FFF2-40B4-BE49-F238E27FC236}">
-                <a16:creationId xmlns:a16="http://schemas.microsoft.com/office/drawing/2014/main" id="{ADBE4787-823C-4DBF-ABA6-F722ED95A77A}"/>
+                <a16:creationId xmlns:a16="http://schemas.microsoft.com/office/drawing/2014/main" id="{9A96EB5F-B2EB-4174-B778-7D3DB2CF607D}"/>
               </a:ext>
             </a:extLst>
           </p:cNvPr>
@@ -30581,7 +30581,7 @@
           <p:cNvPr id="19" name="surface">
             <a:extLst xmlns:a="http://schemas.openxmlformats.org/drawingml/2006/main">
               <a:ext uri="{FF2B5EF4-FFF2-40B4-BE49-F238E27FC236}">
-                <a16:creationId xmlns:a16="http://schemas.microsoft.com/office/drawing/2014/main" id="{62133B6E-2F44-45CC-A67B-894EDC5586DC}"/>
+                <a16:creationId xmlns:a16="http://schemas.microsoft.com/office/drawing/2014/main" id="{89ECBB84-D59A-4A25-AD49-752A59106151}"/>
               </a:ext>
             </a:extLst>
           </p:cNvPr>
@@ -30616,7 +30616,7 @@
           <p:cNvPr id="20" name="surface">
             <a:extLst xmlns:a="http://schemas.openxmlformats.org/drawingml/2006/main">
               <a:ext uri="{FF2B5EF4-FFF2-40B4-BE49-F238E27FC236}">
-                <a16:creationId xmlns:a16="http://schemas.microsoft.com/office/drawing/2014/main" id="{F2E3759B-53FC-48FC-8CE0-AF0A4AC3C405}"/>
+                <a16:creationId xmlns:a16="http://schemas.microsoft.com/office/drawing/2014/main" id="{3544F2A8-B7CE-455B-9887-22D05988D4D9}"/>
               </a:ext>
             </a:extLst>
           </p:cNvPr>
@@ -30653,7 +30653,7 @@
           <p:cNvPr id="21" name="text">
             <a:extLst xmlns:a="http://schemas.openxmlformats.org/drawingml/2006/main">
               <a:ext uri="{FF2B5EF4-FFF2-40B4-BE49-F238E27FC236}">
-                <a16:creationId xmlns:a16="http://schemas.microsoft.com/office/drawing/2014/main" id="{596DC54D-FA8D-43A5-80AF-D74C1BF13DFA}"/>
+                <a16:creationId xmlns:a16="http://schemas.microsoft.com/office/drawing/2014/main" id="{6DCFBEBB-2096-4A1C-A59B-11645ABBC73B}"/>
               </a:ext>
             </a:extLst>
           </p:cNvPr>
@@ -30721,7 +30721,7 @@
           <p:cNvPr id="22" name="text">
             <a:extLst xmlns:a="http://schemas.openxmlformats.org/drawingml/2006/main">
               <a:ext uri="{FF2B5EF4-FFF2-40B4-BE49-F238E27FC236}">
-                <a16:creationId xmlns:a16="http://schemas.microsoft.com/office/drawing/2014/main" id="{6CF46DCB-698D-4F82-B358-0B3A9A708A40}"/>
+                <a16:creationId xmlns:a16="http://schemas.microsoft.com/office/drawing/2014/main" id="{C93852BA-CDA3-4BA8-962C-969CC509FA43}"/>
               </a:ext>
             </a:extLst>
           </p:cNvPr>
@@ -30789,7 +30789,7 @@
           <p:cNvPr id="23" name="surface">
             <a:extLst xmlns:a="http://schemas.openxmlformats.org/drawingml/2006/main">
               <a:ext uri="{FF2B5EF4-FFF2-40B4-BE49-F238E27FC236}">
-                <a16:creationId xmlns:a16="http://schemas.microsoft.com/office/drawing/2014/main" id="{69678260-9517-46A5-85F9-E35A78E3FFFF}"/>
+                <a16:creationId xmlns:a16="http://schemas.microsoft.com/office/drawing/2014/main" id="{73CF23DD-EE40-422B-8F03-96537638B09A}"/>
               </a:ext>
             </a:extLst>
           </p:cNvPr>
@@ -30824,7 +30824,7 @@
           <p:cNvPr id="24" name="text">
             <a:extLst xmlns:a="http://schemas.openxmlformats.org/drawingml/2006/main">
               <a:ext uri="{FF2B5EF4-FFF2-40B4-BE49-F238E27FC236}">
-                <a16:creationId xmlns:a16="http://schemas.microsoft.com/office/drawing/2014/main" id="{B68468B9-6B06-4EB1-8CF8-C5AD11AFAC0A}"/>
+                <a16:creationId xmlns:a16="http://schemas.microsoft.com/office/drawing/2014/main" id="{16AE45F9-93A2-4282-AA6D-CBBF89207F66}"/>
               </a:ext>
             </a:extLst>
           </p:cNvPr>
@@ -30892,7 +30892,7 @@
           <p:cNvPr id="25" name="text">
             <a:extLst xmlns:a="http://schemas.openxmlformats.org/drawingml/2006/main">
               <a:ext uri="{FF2B5EF4-FFF2-40B4-BE49-F238E27FC236}">
-                <a16:creationId xmlns:a16="http://schemas.microsoft.com/office/drawing/2014/main" id="{0670592F-5F4A-43DA-9461-2DD771CBA26B}"/>
+                <a16:creationId xmlns:a16="http://schemas.microsoft.com/office/drawing/2014/main" id="{06D8B664-46E3-4B34-9887-FFA4F73625F0}"/>
               </a:ext>
             </a:extLst>
           </p:cNvPr>
@@ -30960,7 +30960,7 @@
           <p:cNvPr id="26" name="surface">
             <a:extLst xmlns:a="http://schemas.openxmlformats.org/drawingml/2006/main">
               <a:ext uri="{FF2B5EF4-FFF2-40B4-BE49-F238E27FC236}">
-                <a16:creationId xmlns:a16="http://schemas.microsoft.com/office/drawing/2014/main" id="{C2A40553-4B35-4470-99C0-0D1F4FA8959C}"/>
+                <a16:creationId xmlns:a16="http://schemas.microsoft.com/office/drawing/2014/main" id="{6B548763-3104-45D9-94E9-15233FF39130}"/>
               </a:ext>
             </a:extLst>
           </p:cNvPr>
@@ -30995,7 +30995,7 @@
           <p:cNvPr id="27" name="text">
             <a:extLst xmlns:a="http://schemas.openxmlformats.org/drawingml/2006/main">
               <a:ext uri="{FF2B5EF4-FFF2-40B4-BE49-F238E27FC236}">
-                <a16:creationId xmlns:a16="http://schemas.microsoft.com/office/drawing/2014/main" id="{62121652-0497-4854-B401-01DA21037A9B}"/>
+                <a16:creationId xmlns:a16="http://schemas.microsoft.com/office/drawing/2014/main" id="{AD5EABE5-3B39-4EC0-92FD-9BFBD45A8232}"/>
               </a:ext>
             </a:extLst>
           </p:cNvPr>
@@ -31063,7 +31063,7 @@
           <p:cNvPr id="28" name="text">
             <a:extLst xmlns:a="http://schemas.openxmlformats.org/drawingml/2006/main">
               <a:ext uri="{FF2B5EF4-FFF2-40B4-BE49-F238E27FC236}">
-                <a16:creationId xmlns:a16="http://schemas.microsoft.com/office/drawing/2014/main" id="{438A05E0-C7AE-4215-89D8-0DCC03601529}"/>
+                <a16:creationId xmlns:a16="http://schemas.microsoft.com/office/drawing/2014/main" id="{EA941CE8-7B5F-4B50-BCCB-AA40252E99CB}"/>
               </a:ext>
             </a:extLst>
           </p:cNvPr>
@@ -31131,7 +31131,7 @@
           <p:cNvPr id="29" name="surface">
             <a:extLst xmlns:a="http://schemas.openxmlformats.org/drawingml/2006/main">
               <a:ext uri="{FF2B5EF4-FFF2-40B4-BE49-F238E27FC236}">
-                <a16:creationId xmlns:a16="http://schemas.microsoft.com/office/drawing/2014/main" id="{2692431D-7EBC-449B-90C5-B63CAFD45527}"/>
+                <a16:creationId xmlns:a16="http://schemas.microsoft.com/office/drawing/2014/main" id="{6E2821A5-A814-4D6B-A56A-B50563B21EA4}"/>
               </a:ext>
             </a:extLst>
           </p:cNvPr>
@@ -31166,7 +31166,7 @@
           <p:cNvPr id="30" name="text">
             <a:extLst xmlns:a="http://schemas.openxmlformats.org/drawingml/2006/main">
               <a:ext uri="{FF2B5EF4-FFF2-40B4-BE49-F238E27FC236}">
-                <a16:creationId xmlns:a16="http://schemas.microsoft.com/office/drawing/2014/main" id="{A1EAEED8-2879-4155-A599-71FDD5EBCAAB}"/>
+                <a16:creationId xmlns:a16="http://schemas.microsoft.com/office/drawing/2014/main" id="{27C84976-62BE-429E-AB46-B7E0F96449D3}"/>
               </a:ext>
             </a:extLst>
           </p:cNvPr>
@@ -31234,7 +31234,7 @@
           <p:cNvPr id="31" name="text">
             <a:extLst xmlns:a="http://schemas.openxmlformats.org/drawingml/2006/main">
               <a:ext uri="{FF2B5EF4-FFF2-40B4-BE49-F238E27FC236}">
-                <a16:creationId xmlns:a16="http://schemas.microsoft.com/office/drawing/2014/main" id="{D598F6F6-E426-46A9-8567-88C3D4E2989C}"/>
+                <a16:creationId xmlns:a16="http://schemas.microsoft.com/office/drawing/2014/main" id="{80412F26-EE11-4E7D-94BF-89C1C8D325AD}"/>
               </a:ext>
             </a:extLst>
           </p:cNvPr>
@@ -31302,7 +31302,7 @@
           <p:cNvPr id="32" name="surface">
             <a:extLst xmlns:a="http://schemas.openxmlformats.org/drawingml/2006/main">
               <a:ext uri="{FF2B5EF4-FFF2-40B4-BE49-F238E27FC236}">
-                <a16:creationId xmlns:a16="http://schemas.microsoft.com/office/drawing/2014/main" id="{70A552EC-4BB1-418E-95A2-1C251E7BF5C0}"/>
+                <a16:creationId xmlns:a16="http://schemas.microsoft.com/office/drawing/2014/main" id="{B3F4128B-ED08-4AD0-AF71-45B4931075D3}"/>
               </a:ext>
             </a:extLst>
           </p:cNvPr>
@@ -31337,7 +31337,7 @@
           <p:cNvPr id="33" name="text">
             <a:extLst xmlns:a="http://schemas.openxmlformats.org/drawingml/2006/main">
               <a:ext uri="{FF2B5EF4-FFF2-40B4-BE49-F238E27FC236}">
-                <a16:creationId xmlns:a16="http://schemas.microsoft.com/office/drawing/2014/main" id="{B8380C41-0C92-4689-BDEA-59FAB9D855B9}"/>
+                <a16:creationId xmlns:a16="http://schemas.microsoft.com/office/drawing/2014/main" id="{29DD00D5-4EEB-4C21-A9EB-5EF8B488EE7D}"/>
               </a:ext>
             </a:extLst>
           </p:cNvPr>
@@ -31405,7 +31405,7 @@
           <p:cNvPr id="34" name="text">
             <a:extLst xmlns:a="http://schemas.openxmlformats.org/drawingml/2006/main">
               <a:ext uri="{FF2B5EF4-FFF2-40B4-BE49-F238E27FC236}">
-                <a16:creationId xmlns:a16="http://schemas.microsoft.com/office/drawing/2014/main" id="{C2CEC255-3BC1-4830-AF87-969B80AA50B9}"/>
+                <a16:creationId xmlns:a16="http://schemas.microsoft.com/office/drawing/2014/main" id="{935B3283-D05E-423D-9D30-3BD4ED2F933D}"/>
               </a:ext>
             </a:extLst>
           </p:cNvPr>
@@ -31471,7 +31471,7 @@
     </p:spTree>
     <p:extLst>
       <p:ext uri="{BB962C8B-B14F-4D97-AF65-F5344CB8AC3E}">
-        <p14:creationId xmlns:p14="http://schemas.microsoft.com/office/powerpoint/2010/main" val="947196525"/>
+        <p14:creationId xmlns:p14="http://schemas.microsoft.com/office/powerpoint/2010/main" val="1275858527"/>
       </p:ext>
     </p:extLst>
   </p:cSld>
